--- a/presentation/Apurbo - Homotopy and Path Following.pptx
+++ b/presentation/Apurbo - Homotopy and Path Following.pptx
@@ -5,21 +5,20 @@
     <p:sldMasterId id="2147483648" r:id="rId1"/>
   </p:sldMasterIdLst>
   <p:notesMasterIdLst>
-    <p:notesMasterId r:id="rId24"/>
+    <p:notesMasterId r:id="rId13"/>
   </p:notesMasterIdLst>
   <p:sldIdLst>
     <p:sldId id="256" r:id="rId2"/>
-    <p:sldId id="257" r:id="rId8"/>
-    <p:sldId id="258" r:id="rId9"/>
-    <p:sldId id="259" r:id="rId10"/>
-    <p:sldId id="260" r:id="rId11"/>
-    <p:sldId id="261" r:id="rId12"/>
-    <p:sldId id="262" r:id="rId13"/>
-    <p:sldId id="263" r:id="rId14"/>
-    <p:sldId id="264" r:id="rId15"/>
-    <p:sldId id="265" r:id="rId16"/>
-    <p:sldId id="266" r:id="rId17"/>
-    <p:sldId id="267" r:id="rId18"/>
+    <p:sldId id="257" r:id="rId3"/>
+    <p:sldId id="258" r:id="rId4"/>
+    <p:sldId id="259" r:id="rId5"/>
+    <p:sldId id="260" r:id="rId6"/>
+    <p:sldId id="262" r:id="rId7"/>
+    <p:sldId id="263" r:id="rId8"/>
+    <p:sldId id="264" r:id="rId9"/>
+    <p:sldId id="265" r:id="rId10"/>
+    <p:sldId id="266" r:id="rId11"/>
+    <p:sldId id="267" r:id="rId12"/>
   </p:sldIdLst>
   <p:sldSz cx="12192000" cy="6858000"/>
   <p:notesSz cx="6858000" cy="12192000"/>
@@ -336,7 +335,7 @@
 </file>
 
 <file path=ppt/notesSlides/notesSlide10.xml><?xml version="1.0" encoding="utf-8"?>
-<p:notes xmlns:a="http://schemas.openxmlformats.org/drawingml/2006/main" xmlns:p="http://schemas.openxmlformats.org/presentationml/2006/main" xmlns:r="http://schemas.openxmlformats.org/officeDocument/2006/relationships">
+<p:notes xmlns:a="http://schemas.openxmlformats.org/drawingml/2006/main" xmlns:r="http://schemas.openxmlformats.org/officeDocument/2006/relationships" xmlns:p="http://schemas.openxmlformats.org/presentationml/2006/main">
   <p:cSld>
     <p:spTree>
       <p:nvGrpSpPr>
@@ -376,7 +375,7 @@
           <a:lstStyle/>
           <a:p>
             <a:r>
-              <a:t>Every step the adaptive rule tries on case6748 at the paper's setting, accepted and rejected, next to the paper's fixed path. Rejected steps still cost LUs, so on its own it helps little.</a:t>
+              <a:t>Shifted inverse iteration gives the smallest eigenvalue of J + delta I, the matrix of the first step. The shift lowers the ratio on the ill-conditioned grids but hardly changes most limit cases, whose smallest eigenvalue is already larger than 0.02; there the method behaves like plain NR. The power method is up to 19% off on grids made of copies of one network, where the largest eigenvalues cluster.</a:t>
             </a:r>
           </a:p>
         </p:txBody>
@@ -389,8 +388,8 @@
 </p:notes>
 </file>
 
-<file path=ppt/notesSlides/notesSlide11.xml><?xml version="1.0" encoding="utf-8"?>
-<p:notes xmlns:a="http://schemas.openxmlformats.org/drawingml/2006/main" xmlns:p="http://schemas.openxmlformats.org/presentationml/2006/main" xmlns:r="http://schemas.openxmlformats.org/officeDocument/2006/relationships">
+<file path=ppt/notesSlides/notesSlide2.xml><?xml version="1.0" encoding="utf-8"?>
+<p:notes xmlns:a="http://schemas.openxmlformats.org/drawingml/2006/main" xmlns:r="http://schemas.openxmlformats.org/officeDocument/2006/relationships" xmlns:p="http://schemas.openxmlformats.org/presentationml/2006/main">
   <p:cSld>
     <p:spTree>
       <p:nvGrpSpPr>
@@ -430,7 +429,7 @@
           <a:lstStyle/>
           <a:p>
             <a:r>
-              <a:t>Shifted inverse iteration gives the smallest eigenvalue of J + delta I, the matrix of the first step. The shift lowers the ratio on the ill-conditioned grids but hardly changes most limit cases, whose smallest eigenvalue is already larger than 0.02; there the method behaves like plain NR. The power method is up to 19% off on grids made of copies of one network, where the largest eigenvalues cluster.</a:t>
+              <a:t>I implemented the core of the paper, the dynamic homotopy, and the framework that lets every improvement be switched on and off.</a:t>
             </a:r>
           </a:p>
         </p:txBody>
@@ -443,8 +442,8 @@
 </p:notes>
 </file>
 
-<file path=ppt/notesSlides/notesSlide2.xml><?xml version="1.0" encoding="utf-8"?>
-<p:notes xmlns:a="http://schemas.openxmlformats.org/drawingml/2006/main" xmlns:p="http://schemas.openxmlformats.org/presentationml/2006/main" xmlns:r="http://schemas.openxmlformats.org/officeDocument/2006/relationships">
+<file path=ppt/notesSlides/notesSlide3.xml><?xml version="1.0" encoding="utf-8"?>
+<p:notes xmlns:a="http://schemas.openxmlformats.org/drawingml/2006/main" xmlns:r="http://schemas.openxmlformats.org/officeDocument/2006/relationships" xmlns:p="http://schemas.openxmlformats.org/presentationml/2006/main">
   <p:cSld>
     <p:spTree>
       <p:nvGrpSpPr>
@@ -484,7 +483,7 @@
           <a:lstStyle/>
           <a:p>
             <a:r>
-              <a:t>I implemented the core of the paper, the dynamic homotopy, and the framework that lets every improvement be switched on and off.</a:t>
+              <a:t>Section 3.1 of the paper, equations 15, 23 and 24. Differentiating G(x(t), t) = 0 with the chain rule gives the ODE. The integrators FE, BE and RK2 (equations 16, 19, 20-21) each take a few big steps along it, and NR or FDXB finishes from x(1).</a:t>
             </a:r>
           </a:p>
         </p:txBody>
@@ -497,8 +496,8 @@
 </p:notes>
 </file>
 
-<file path=ppt/notesSlides/notesSlide3.xml><?xml version="1.0" encoding="utf-8"?>
-<p:notes xmlns:a="http://schemas.openxmlformats.org/drawingml/2006/main" xmlns:p="http://schemas.openxmlformats.org/presentationml/2006/main" xmlns:r="http://schemas.openxmlformats.org/officeDocument/2006/relationships">
+<file path=ppt/notesSlides/notesSlide4.xml><?xml version="1.0" encoding="utf-8"?>
+<p:notes xmlns:a="http://schemas.openxmlformats.org/drawingml/2006/main" xmlns:r="http://schemas.openxmlformats.org/officeDocument/2006/relationships" xmlns:p="http://schemas.openxmlformats.org/presentationml/2006/main">
   <p:cSld>
     <p:spTree>
       <p:nvGrpSpPr>
@@ -538,7 +537,7 @@
           <a:lstStyle/>
           <a:p>
             <a:r>
-              <a:t>Section 3.1 of the paper, equations 15, 23 and 24. Differentiating G(x(t), t) = 0 with the chain rule gives the ODE. The integrators FE, BE and RK2 (equations 16, 19, 20-21) each take a few big steps along it, and NR or FDXB finishes from x(1).</a:t>
+              <a:t>Divide the BE step by dt0 and it is exactly x0 - (J + (1 - dt0) K/dt0 I)^-1 g(x0). This is the key fact behind the whole method: on the ill-conditioned grids J is nearly singular, and delta keeps the Newton step from exploding.</a:t>
             </a:r>
           </a:p>
         </p:txBody>
@@ -551,8 +550,8 @@
 </p:notes>
 </file>
 
-<file path=ppt/notesSlides/notesSlide4.xml><?xml version="1.0" encoding="utf-8"?>
-<p:notes xmlns:a="http://schemas.openxmlformats.org/drawingml/2006/main" xmlns:p="http://schemas.openxmlformats.org/presentationml/2006/main" xmlns:r="http://schemas.openxmlformats.org/officeDocument/2006/relationships">
+<file path=ppt/notesSlides/notesSlide5.xml><?xml version="1.0" encoding="utf-8"?>
+<p:notes xmlns:a="http://schemas.openxmlformats.org/drawingml/2006/main" xmlns:r="http://schemas.openxmlformats.org/officeDocument/2006/relationships" xmlns:p="http://schemas.openxmlformats.org/presentationml/2006/main">
   <p:cSld>
     <p:spTree>
       <p:nvGrpSpPr>
@@ -592,7 +591,7 @@
           <a:lstStyle/>
           <a:p>
             <a:r>
-              <a:t>Divide the BE step by dt0 and it is exactly x0 - (J + (1 - dt0) K/dt0 I)^-1 g(x0). This is the key fact behind the whole method: on the ill-conditioned grids J is nearly singular, and delta keeps the Newton step from exploding.</a:t>
+              <a:t>For every case of the paper, the flat-start mismatch next to the mismatch after one FE, RK2 or BE step to t1 = 0.005. Explicit steps blow up to about 1e12 on the large grids (9.7e12 on case18482); backward Euler brings it down to 65 and 25. This is why the paper always takes the first step with BE.</a:t>
             </a:r>
           </a:p>
         </p:txBody>
@@ -605,8 +604,8 @@
 </p:notes>
 </file>
 
-<file path=ppt/notesSlides/notesSlide5.xml><?xml version="1.0" encoding="utf-8"?>
-<p:notes xmlns:a="http://schemas.openxmlformats.org/drawingml/2006/main" xmlns:p="http://schemas.openxmlformats.org/presentationml/2006/main" xmlns:r="http://schemas.openxmlformats.org/officeDocument/2006/relationships">
+<file path=ppt/notesSlides/notesSlide6.xml><?xml version="1.0" encoding="utf-8"?>
+<p:notes xmlns:a="http://schemas.openxmlformats.org/drawingml/2006/main" xmlns:r="http://schemas.openxmlformats.org/officeDocument/2006/relationships" xmlns:p="http://schemas.openxmlformats.org/presentationml/2006/main">
   <p:cSld>
     <p:spTree>
       <p:nvGrpSpPr>
@@ -646,7 +645,7 @@
           <a:lstStyle/>
           <a:p>
             <a:r>
-              <a:t>For every case of the paper, the flat-start mismatch next to the mismatch after one FE, RK2 or BE step to t1 = 0.005. Explicit steps blow up to about 1e12 on the large grids (9.7e12 on case18482); backward Euler brings it down to 65 and 25. This is why the paper always takes the first step with BE.</a:t>
+              <a:t>Voltages of buses 2 to 6 along the two-point BE path and then NR. The angles overshoot to about 60 degrees at t = 1, which is harmless: the point is already inside Newton's region of convergence. Mismatch 201, 25, 1.26 along the path, then 1.7, 1.7e-2, 7.3e-7, 8.8e-12.</a:t>
             </a:r>
           </a:p>
         </p:txBody>
@@ -659,8 +658,8 @@
 </p:notes>
 </file>
 
-<file path=ppt/notesSlides/notesSlide6.xml><?xml version="1.0" encoding="utf-8"?>
-<p:notes xmlns:a="http://schemas.openxmlformats.org/drawingml/2006/main" xmlns:p="http://schemas.openxmlformats.org/presentationml/2006/main" xmlns:r="http://schemas.openxmlformats.org/officeDocument/2006/relationships">
+<file path=ppt/notesSlides/notesSlide7.xml><?xml version="1.0" encoding="utf-8"?>
+<p:notes xmlns:a="http://schemas.openxmlformats.org/drawingml/2006/main" xmlns:r="http://schemas.openxmlformats.org/officeDocument/2006/relationships" xmlns:p="http://schemas.openxmlformats.org/presentationml/2006/main">
   <p:cSld>
     <p:spTree>
       <p:nvGrpSpPr>
@@ -700,7 +699,7 @@
           <a:lstStyle/>
           <a:p>
             <a:r>
-              <a:t>Section 3.3's example, drawn in the (x1, x2) plane over a map of the mismatch for K = 0.05 and 0.005: the exact homotopy path, the three-step FE, RK2 and BE paths and the Newton iterations after them, the singular line of the Jacobian and the two roots. For eps = 0.05, one NR step from (1, 0.95) gives a mismatch near 100, log10 about 2, but the paper's curve starts near 3.</a:t>
+              <a:t>improvements/solve.py holds Options and solve(). Every team member's change plugs in as a switch, so they can be tested alone or combined in the study. With everything off it reproduces the paper's result exactly.</a:t>
             </a:r>
           </a:p>
         </p:txBody>
@@ -713,8 +712,8 @@
 </p:notes>
 </file>
 
-<file path=ppt/notesSlides/notesSlide7.xml><?xml version="1.0" encoding="utf-8"?>
-<p:notes xmlns:a="http://schemas.openxmlformats.org/drawingml/2006/main" xmlns:p="http://schemas.openxmlformats.org/presentationml/2006/main" xmlns:r="http://schemas.openxmlformats.org/officeDocument/2006/relationships">
+<file path=ppt/notesSlides/notesSlide8.xml><?xml version="1.0" encoding="utf-8"?>
+<p:notes xmlns:a="http://schemas.openxmlformats.org/drawingml/2006/main" xmlns:r="http://schemas.openxmlformats.org/officeDocument/2006/relationships" xmlns:p="http://schemas.openxmlformats.org/presentationml/2006/main">
   <p:cSld>
     <p:spTree>
       <p:nvGrpSpPr>
@@ -754,7 +753,7 @@
           <a:lstStyle/>
           <a:p>
             <a:r>
-              <a:t>Voltages of buses 2 to 6 along the two-point BE path and then NR. The angles overshoot to about 60 degrees at t = 1, which is harmless: the point is already inside Newton's region of convergence. Mismatch 201, 25, 1.26 along the path, then 1.7, 1.7e-2, 7.3e-7, 8.8e-12.</a:t>
+              <a:t>The standard predictor-corrector of continuation methods, at a fixed new time. It is the most useful change of the whole study, and it makes the result almost independent of dt0.</a:t>
             </a:r>
           </a:p>
         </p:txBody>
@@ -767,8 +766,8 @@
 </p:notes>
 </file>
 
-<file path=ppt/notesSlides/notesSlide8.xml><?xml version="1.0" encoding="utf-8"?>
-<p:notes xmlns:a="http://schemas.openxmlformats.org/drawingml/2006/main" xmlns:p="http://schemas.openxmlformats.org/presentationml/2006/main" xmlns:r="http://schemas.openxmlformats.org/officeDocument/2006/relationships">
+<file path=ppt/notesSlides/notesSlide9.xml><?xml version="1.0" encoding="utf-8"?>
+<p:notes xmlns:a="http://schemas.openxmlformats.org/drawingml/2006/main" xmlns:r="http://schemas.openxmlformats.org/officeDocument/2006/relationships" xmlns:p="http://schemas.openxmlformats.org/presentationml/2006/main">
   <p:cSld>
     <p:spTree>
       <p:nvGrpSpPr>
@@ -808,61 +807,7 @@
           <a:lstStyle/>
           <a:p>
             <a:r>
-              <a:t>improvements/solve.py holds Options and solve(). Every team member's change plugs in as a switch, so they can be tested alone or combined in the study. With everything off it reproduces the paper's result exactly.</a:t>
-            </a:r>
-          </a:p>
-        </p:txBody>
-      </p:sp>
-    </p:spTree>
-  </p:cSld>
-  <p:clrMapOvr>
-    <a:masterClrMapping/>
-  </p:clrMapOvr>
-</p:notes>
-</file>
-
-<file path=ppt/notesSlides/notesSlide9.xml><?xml version="1.0" encoding="utf-8"?>
-<p:notes xmlns:a="http://schemas.openxmlformats.org/drawingml/2006/main" xmlns:p="http://schemas.openxmlformats.org/presentationml/2006/main" xmlns:r="http://schemas.openxmlformats.org/officeDocument/2006/relationships">
-  <p:cSld>
-    <p:spTree>
-      <p:nvGrpSpPr>
-        <p:cNvPr id="1" name=""/>
-        <p:cNvGrpSpPr/>
-        <p:nvPr/>
-      </p:nvGrpSpPr>
-      <p:grpSpPr>
-        <a:xfrm>
-          <a:off x="0" y="0"/>
-          <a:ext cx="0" cy="0"/>
-          <a:chOff x="0" y="0"/>
-          <a:chExt cx="0" cy="0"/>
-        </a:xfrm>
-      </p:grpSpPr>
-      <p:sp>
-        <p:nvSpPr>
-          <p:cNvPr id="90" name="Notes Placeholder"/>
-          <p:cNvSpPr>
-            <a:spLocks noGrp="1"/>
-          </p:cNvSpPr>
-          <p:nvPr>
-            <p:ph type="body" idx="1"/>
-          </p:nvPr>
-        </p:nvSpPr>
-        <p:spPr>
-          <a:xfrm>
-            <a:off x="685800" y="4400550"/>
-            <a:ext cx="5486400" cy="3600450"/>
-          </a:xfrm>
-          <a:prstGeom prst="rect">
-            <a:avLst/>
-          </a:prstGeom>
-        </p:spPr>
-        <p:txBody>
-          <a:bodyPr/>
-          <a:lstStyle/>
-          <a:p>
-            <a:r>
-              <a:t>The standard predictor-corrector of continuation methods, at a fixed new time. It is the most useful change of the whole study, and it makes the result almost independent of dt0.</a:t>
+              <a:t>Every step the adaptive rule tries on case6748 at the paper's setting, accepted and rejected, next to the paper's fixed path. Rejected steps still cost LUs, so on its own it helps little.</a:t>
             </a:r>
           </a:p>
         </p:txBody>
@@ -1438,7 +1383,7 @@
 </file>
 
 <file path=ppt/slides/slide10.xml><?xml version="1.0" encoding="utf-8"?>
-<p:sld xmlns:a="http://schemas.openxmlformats.org/drawingml/2006/main" xmlns:p="http://schemas.openxmlformats.org/presentationml/2006/main" xmlns:r="http://schemas.openxmlformats.org/officeDocument/2006/relationships">
+<p:sld xmlns:a="http://schemas.openxmlformats.org/drawingml/2006/main" xmlns:r="http://schemas.openxmlformats.org/officeDocument/2006/relationships" xmlns:p="http://schemas.openxmlformats.org/presentationml/2006/main">
   <p:cSld>
     <p:bg>
       <p:bgPr>
@@ -1454,7 +1399,14 @@
         <p:cNvGrpSpPr/>
         <p:nvPr/>
       </p:nvGrpSpPr>
-      <p:grpSpPr/>
+      <p:grpSpPr>
+        <a:xfrm>
+          <a:off x="0" y="0"/>
+          <a:ext cx="0" cy="0"/>
+          <a:chOff x="0" y="0"/>
+          <a:chExt cx="0" cy="0"/>
+        </a:xfrm>
+      </p:grpSpPr>
       <p:sp>
         <p:nvSpPr>
           <p:cNvPr id="2" name="TextBox 1"/>
@@ -1472,7 +1424,7 @@
           <a:noFill/>
         </p:spPr>
         <p:txBody>
-          <a:bodyPr wrap="square" lIns="0" rIns="0" tIns="0" bIns="0" anchor="t">
+          <a:bodyPr wrap="square" lIns="0" tIns="0" rIns="0" bIns="0" anchor="t">
             <a:spAutoFit/>
           </a:bodyPr>
           <a:lstStyle/>
@@ -1491,7 +1443,7 @@
                 <a:ea typeface="IBM Plex Sans"/>
                 <a:cs typeface="IBM Plex Sans"/>
               </a:rPr>
-              <a:t>Adaptive steps: a smaller gain</a:t>
+              <a:t>Why the shift works: the spectrum of J</a:t>
             </a:r>
           </a:p>
         </p:txBody>
@@ -1499,112 +1451,6 @@
       <p:pic>
         <p:nvPicPr>
           <p:cNvPr id="3" name="Picture 2" descr="image.png"/>
-          <p:cNvPicPr>
-            <a:picLocks noChangeAspect="1"/>
-          </p:cNvPicPr>
-          <p:nvPr/>
-        </p:nvPicPr>
-        <p:blipFill>
-          <a:blip r:embed="rId2"/>
-          <a:stretch>
-            <a:fillRect/>
-          </a:stretch>
-        </p:blipFill>
-        <p:spPr>
-          <a:xfrm>
-            <a:off x="812800" y="1221741"/>
-            <a:ext cx="10566400" cy="20320"/>
-          </a:xfrm>
-          <a:prstGeom prst="rect">
-            <a:avLst/>
-          </a:prstGeom>
-        </p:spPr>
-      </p:pic>
-      <p:sp>
-        <p:nvSpPr>
-          <p:cNvPr id="4" name="TextBox 3"/>
-          <p:cNvSpPr txBox="1"/>
-          <p:nvPr/>
-        </p:nvSpPr>
-        <p:spPr>
-          <a:xfrm>
-            <a:off x="813816" y="6236208"/>
-            <a:ext cx="7845552" cy="237744"/>
-          </a:xfrm>
-          <a:prstGeom prst="rect">
-            <a:avLst/>
-          </a:prstGeom>
-          <a:noFill/>
-        </p:spPr>
-        <p:txBody>
-          <a:bodyPr wrap="square" lIns="0" rIns="0" tIns="0" bIns="0" anchor="t">
-            <a:spAutoFit/>
-          </a:bodyPr>
-          <a:lstStyle/>
-          <a:p>
-            <a:pPr algn="l">
-              <a:spcAft>
-                <a:spcPts val="800"/>
-              </a:spcAft>
-            </a:pPr>
-            <a:r>
-              <a:rPr sz="1200" b="0" i="0">
-                <a:solidFill>
-                  <a:srgbClr val="6B7280"/>
-                </a:solidFill>
-                <a:latin typeface="IBM Plex Sans"/>
-                <a:ea typeface="IBM Plex Sans"/>
-                <a:cs typeface="IBM Plex Sans"/>
-              </a:rPr>
-              <a:t>Apurbo's part · Lima-Silva &amp; Freitas (2024): reproduction and improvements</a:t>
-            </a:r>
-          </a:p>
-        </p:txBody>
-      </p:sp>
-      <p:sp>
-        <p:nvSpPr>
-          <p:cNvPr id="5" name="TextBox 4"/>
-          <p:cNvSpPr txBox="1"/>
-          <p:nvPr/>
-        </p:nvSpPr>
-        <p:spPr>
-          <a:xfrm>
-            <a:off x="10058400" y="6236208"/>
-            <a:ext cx="1316736" cy="237744"/>
-          </a:xfrm>
-          <a:prstGeom prst="rect">
-            <a:avLst/>
-          </a:prstGeom>
-          <a:noFill/>
-        </p:spPr>
-        <p:txBody>
-          <a:bodyPr wrap="square" lIns="0" rIns="0" tIns="0" bIns="0" anchor="t">
-            <a:spAutoFit/>
-          </a:bodyPr>
-          <a:lstStyle/>
-          <a:p>
-            <a:pPr algn="r">
-              <a:spcAft>
-                <a:spcPts val="800"/>
-              </a:spcAft>
-            </a:pPr>
-            <a:r>
-              <a:rPr sz="1200" b="0" i="0">
-                <a:solidFill>
-                  <a:srgbClr val="6B7280"/>
-                </a:solidFill>
-                <a:latin typeface="IBM Plex Sans"/>
-                <a:ea typeface="IBM Plex Sans"/>
-                <a:cs typeface="IBM Plex Sans"/>
-              </a:rPr>
-              <a:t>10</a:t>
-            </a:r>
-          </a:p>
-        </p:txBody>
-      </p:sp>
-      <p:pic>
-        <p:nvPicPr>
-          <p:cNvPr id="6" name="Picture 5" descr="adaptive_path.png"/>
           <p:cNvPicPr>
             <a:picLocks noChangeAspect="1"/>
           </p:cNvPicPr>
@@ -1618,8 +1464,8 @@
         </p:blipFill>
         <p:spPr>
           <a:xfrm>
-            <a:off x="722376" y="1406613"/>
-            <a:ext cx="6309360" cy="3953333"/>
+            <a:off x="812800" y="1221741"/>
+            <a:ext cx="10566400" cy="20320"/>
           </a:xfrm>
           <a:prstGeom prst="rect">
             <a:avLst/>
@@ -1628,14 +1474,14 @@
       </p:pic>
       <p:sp>
         <p:nvSpPr>
-          <p:cNvPr id="7" name="TextBox 6"/>
+          <p:cNvPr id="4" name="TextBox 3"/>
           <p:cNvSpPr txBox="1"/>
           <p:nvPr/>
         </p:nvSpPr>
         <p:spPr>
           <a:xfrm>
-            <a:off x="7498079" y="1737360"/>
-            <a:ext cx="3840480" cy="1463040"/>
+            <a:off x="813816" y="6236208"/>
+            <a:ext cx="7845552" cy="237744"/>
           </a:xfrm>
           <a:prstGeom prst="rect">
             <a:avLst/>
@@ -1643,70 +1489,7 @@
           <a:noFill/>
         </p:spPr>
         <p:txBody>
-          <a:bodyPr wrap="square" lIns="0" rIns="0" tIns="0" bIns="0" anchor="t">
-            <a:spAutoFit/>
-          </a:bodyPr>
-          <a:lstStyle/>
-          <a:p>
-            <a:pPr algn="l" marL="228600" indent="-228600">
-              <a:spcAft>
-                <a:spcPts val="800"/>
-              </a:spcAft>
-              <a:buFont typeface="Arial"/>
-              <a:buChar char="•"/>
-            </a:pPr>
-            <a:r>
-              <a:rPr sz="1700" b="0" i="0">
-                <a:solidFill>
-                  <a:srgbClr val="1B1F2A"/>
-                </a:solidFill>
-                <a:latin typeface="IBM Plex Sans"/>
-                <a:ea typeface="IBM Plex Sans"/>
-                <a:cs typeface="IBM Plex Sans"/>
-              </a:rPr>
-              <a:t>try to jump straight to t = 1</a:t>
-            </a:r>
-          </a:p>
-          <a:p>
-            <a:pPr algn="l" marL="228600" indent="-228600">
-              <a:spcAft>
-                <a:spcPts val="800"/>
-              </a:spcAft>
-              <a:buFont typeface="Arial"/>
-              <a:buChar char="•"/>
-            </a:pPr>
-            <a:r>
-              <a:rPr sz="1700" b="0" i="0">
-                <a:solidFill>
-                  <a:srgbClr val="1B1F2A"/>
-                </a:solidFill>
-                <a:latin typeface="IBM Plex Sans"/>
-                <a:ea typeface="IBM Plex Sans"/>
-                <a:cs typeface="IBM Plex Sans"/>
-              </a:rPr>
-              <a:t>halve the step while ‖g‖ grows</a:t>
-            </a:r>
-          </a:p>
-        </p:txBody>
-      </p:sp>
-      <p:sp>
-        <p:nvSpPr>
-          <p:cNvPr id="8" name="TextBox 7"/>
-          <p:cNvSpPr txBox="1"/>
-          <p:nvPr/>
-        </p:nvSpPr>
-        <p:spPr>
-          <a:xfrm>
-            <a:off x="7498079" y="3108960"/>
-            <a:ext cx="3840480" cy="822960"/>
-          </a:xfrm>
-          <a:prstGeom prst="rect">
-            <a:avLst/>
-          </a:prstGeom>
-          <a:noFill/>
-        </p:spPr>
-        <p:txBody>
-          <a:bodyPr wrap="square" lIns="0" rIns="0" tIns="0" bIns="0" anchor="t">
+          <a:bodyPr wrap="square" lIns="0" tIns="0" rIns="0" bIns="0" anchor="t">
             <a:spAutoFit/>
           </a:bodyPr>
           <a:lstStyle/>
@@ -1717,29 +1500,29 @@
               </a:spcAft>
             </a:pPr>
             <a:r>
-              <a:rPr sz="4800" b="1" i="0">
-                <a:solidFill>
-                  <a:srgbClr val="1F3A5F"/>
-                </a:solidFill>
-                <a:latin typeface="IBM Plex Sans"/>
-                <a:ea typeface="IBM Plex Sans"/>
-                <a:cs typeface="IBM Plex Sans"/>
-              </a:rPr>
-              <a:t>132</a:t>
-            </a:r>
-          </a:p>
-        </p:txBody>
-      </p:sp>
-      <p:sp>
-        <p:nvSpPr>
-          <p:cNvPr id="9" name="TextBox 8"/>
+              <a:rPr sz="1200" b="0" i="0">
+                <a:solidFill>
+                  <a:srgbClr val="6B7280"/>
+                </a:solidFill>
+                <a:latin typeface="IBM Plex Sans"/>
+                <a:ea typeface="IBM Plex Sans"/>
+                <a:cs typeface="IBM Plex Sans"/>
+              </a:rPr>
+              <a:t>Apurbo's part · Lima-Silva &amp; Freitas (2024): reproduction and improvements</a:t>
+            </a:r>
+          </a:p>
+        </p:txBody>
+      </p:sp>
+      <p:sp>
+        <p:nvSpPr>
+          <p:cNvPr id="5" name="TextBox 4"/>
           <p:cNvSpPr txBox="1"/>
           <p:nvPr/>
         </p:nvSpPr>
         <p:spPr>
           <a:xfrm>
-            <a:off x="7498079" y="3977640"/>
-            <a:ext cx="3840480" cy="731520"/>
+            <a:off x="10058400" y="6236208"/>
+            <a:ext cx="1316736" cy="237744"/>
           </a:xfrm>
           <a:prstGeom prst="rect">
             <a:avLst/>
@@ -1747,7 +1530,135 @@
           <a:noFill/>
         </p:spPr>
         <p:txBody>
-          <a:bodyPr wrap="square" lIns="0" rIns="0" tIns="0" bIns="0" anchor="t">
+          <a:bodyPr wrap="square" lIns="0" tIns="0" rIns="0" bIns="0" anchor="t">
+            <a:spAutoFit/>
+          </a:bodyPr>
+          <a:lstStyle/>
+          <a:p>
+            <a:pPr algn="r">
+              <a:spcAft>
+                <a:spcPts val="800"/>
+              </a:spcAft>
+            </a:pPr>
+            <a:r>
+              <a:rPr sz="1200" b="0" i="0">
+                <a:solidFill>
+                  <a:srgbClr val="6B7280"/>
+                </a:solidFill>
+                <a:latin typeface="IBM Plex Sans"/>
+                <a:ea typeface="IBM Plex Sans"/>
+                <a:cs typeface="IBM Plex Sans"/>
+              </a:rPr>
+              <a:t>11</a:t>
+            </a:r>
+          </a:p>
+        </p:txBody>
+      </p:sp>
+      <p:pic>
+        <p:nvPicPr>
+          <p:cNvPr id="6" name="Picture 5" descr="spectrum.png"/>
+          <p:cNvPicPr>
+            <a:picLocks noChangeAspect="1"/>
+          </p:cNvPicPr>
+          <p:nvPr/>
+        </p:nvPicPr>
+        <p:blipFill>
+          <a:blip r:embed="rId4"/>
+          <a:stretch>
+            <a:fillRect/>
+          </a:stretch>
+        </p:blipFill>
+        <p:spPr>
+          <a:xfrm>
+            <a:off x="857844" y="1325880"/>
+            <a:ext cx="5581223" cy="4114800"/>
+          </a:xfrm>
+          <a:prstGeom prst="rect">
+            <a:avLst/>
+          </a:prstGeom>
+        </p:spPr>
+      </p:pic>
+      <p:sp>
+        <p:nvSpPr>
+          <p:cNvPr id="7" name="TextBox 6"/>
+          <p:cNvSpPr txBox="1"/>
+          <p:nvPr/>
+        </p:nvSpPr>
+        <p:spPr>
+          <a:xfrm>
+            <a:off x="7040880" y="1463040"/>
+            <a:ext cx="4297680" cy="1097280"/>
+          </a:xfrm>
+          <a:prstGeom prst="rect">
+            <a:avLst/>
+          </a:prstGeom>
+          <a:noFill/>
+        </p:spPr>
+        <p:txBody>
+          <a:bodyPr wrap="square" lIns="0" tIns="0" rIns="0" bIns="0" anchor="t">
+            <a:spAutoFit/>
+          </a:bodyPr>
+          <a:lstStyle/>
+          <a:p>
+            <a:pPr marL="228600" indent="-228600" algn="l">
+              <a:spcAft>
+                <a:spcPts val="600"/>
+              </a:spcAft>
+              <a:buFont typeface="Arial"/>
+              <a:buChar char="•"/>
+            </a:pPr>
+            <a:r>
+              <a:rPr sz="1600" b="0" i="0">
+                <a:solidFill>
+                  <a:srgbClr val="1B1F2A"/>
+                </a:solidFill>
+                <a:latin typeface="IBM Plex Sans"/>
+                <a:ea typeface="IBM Plex Sans"/>
+                <a:cs typeface="IBM Plex Sans"/>
+              </a:rPr>
+              <a:t>|λ|max: power method</a:t>
+            </a:r>
+          </a:p>
+          <a:p>
+            <a:pPr marL="228600" indent="-228600" algn="l">
+              <a:spcAft>
+                <a:spcPts val="600"/>
+              </a:spcAft>
+              <a:buFont typeface="Arial"/>
+              <a:buChar char="•"/>
+            </a:pPr>
+            <a:r>
+              <a:rPr sz="1600" b="0" i="0">
+                <a:solidFill>
+                  <a:srgbClr val="1B1F2A"/>
+                </a:solidFill>
+                <a:latin typeface="IBM Plex Sans"/>
+                <a:ea typeface="IBM Plex Sans"/>
+                <a:cs typeface="IBM Plex Sans"/>
+              </a:rPr>
+              <a:t>|λ|min: inverse iteration (one LU)</a:t>
+            </a:r>
+          </a:p>
+        </p:txBody>
+      </p:sp>
+      <p:sp>
+        <p:nvSpPr>
+          <p:cNvPr id="8" name="TextBox 7"/>
+          <p:cNvSpPr txBox="1"/>
+          <p:nvPr/>
+        </p:nvSpPr>
+        <p:spPr>
+          <a:xfrm>
+            <a:off x="7040880" y="2514600"/>
+            <a:ext cx="4297680" cy="457200"/>
+          </a:xfrm>
+          <a:prstGeom prst="rect">
+            <a:avLst/>
+          </a:prstGeom>
+          <a:noFill/>
+        </p:spPr>
+        <p:txBody>
+          <a:bodyPr wrap="square" lIns="0" tIns="0" rIns="0" bIns="0" anchor="t">
             <a:spAutoFit/>
           </a:bodyPr>
           <a:lstStyle/>
@@ -1766,7 +1677,133 @@
                 <a:ea typeface="IBM Plex Sans"/>
                 <a:cs typeface="IBM Plex Sans"/>
               </a:rPr>
-              <a:t>of 170 solved (paper 127)</a:t>
+              <a:t>eigenvalue ratio, case109272</a:t>
+            </a:r>
+          </a:p>
+        </p:txBody>
+      </p:sp>
+      <p:sp>
+        <p:nvSpPr>
+          <p:cNvPr id="9" name="TextBox 8"/>
+          <p:cNvSpPr txBox="1"/>
+          <p:nvPr/>
+        </p:nvSpPr>
+        <p:spPr>
+          <a:xfrm>
+            <a:off x="7040880" y="2880360"/>
+            <a:ext cx="4297680" cy="731520"/>
+          </a:xfrm>
+          <a:prstGeom prst="rect">
+            <a:avLst/>
+          </a:prstGeom>
+          <a:noFill/>
+        </p:spPr>
+        <p:txBody>
+          <a:bodyPr wrap="square" lIns="0" tIns="0" rIns="0" bIns="0" anchor="t">
+            <a:spAutoFit/>
+          </a:bodyPr>
+          <a:lstStyle/>
+          <a:p>
+            <a:pPr algn="l">
+              <a:spcAft>
+                <a:spcPts val="800"/>
+              </a:spcAft>
+            </a:pPr>
+            <a:r>
+              <a:rPr sz="3400" b="1" i="0">
+                <a:solidFill>
+                  <a:srgbClr val="B54A3F"/>
+                </a:solidFill>
+                <a:latin typeface="IBM Plex Sans"/>
+                <a:ea typeface="IBM Plex Sans"/>
+                <a:cs typeface="IBM Plex Sans"/>
+              </a:rPr>
+              <a:t>1.2×10⁸</a:t>
+            </a:r>
+            <a:r>
+              <a:rPr sz="3400" b="0" i="0">
+                <a:solidFill>
+                  <a:srgbClr val="1B1F2A"/>
+                </a:solidFill>
+                <a:latin typeface="IBM Plex Sans"/>
+                <a:ea typeface="IBM Plex Sans"/>
+                <a:cs typeface="IBM Plex Sans"/>
+              </a:rPr>
+              <a:t>  →  </a:t>
+            </a:r>
+            <a:r>
+              <a:rPr sz="3400" b="1" i="0">
+                <a:solidFill>
+                  <a:srgbClr val="2F8F5B"/>
+                </a:solidFill>
+                <a:latin typeface="IBM Plex Sans"/>
+                <a:ea typeface="IBM Plex Sans"/>
+                <a:cs typeface="IBM Plex Sans"/>
+              </a:rPr>
+              <a:t>2×10⁶</a:t>
+            </a:r>
+          </a:p>
+        </p:txBody>
+      </p:sp>
+      <p:sp>
+        <p:nvSpPr>
+          <p:cNvPr id="10" name="TextBox 9"/>
+          <p:cNvSpPr txBox="1"/>
+          <p:nvPr/>
+        </p:nvSpPr>
+        <p:spPr>
+          <a:xfrm>
+            <a:off x="7040880" y="3703320"/>
+            <a:ext cx="4297680" cy="1280160"/>
+          </a:xfrm>
+          <a:prstGeom prst="rect">
+            <a:avLst/>
+          </a:prstGeom>
+          <a:noFill/>
+        </p:spPr>
+        <p:txBody>
+          <a:bodyPr wrap="square" lIns="0" tIns="0" rIns="0" bIns="0" anchor="t">
+            <a:spAutoFit/>
+          </a:bodyPr>
+          <a:lstStyle/>
+          <a:p>
+            <a:pPr marL="228600" indent="-228600" algn="l">
+              <a:spcAft>
+                <a:spcPts val="600"/>
+              </a:spcAft>
+              <a:buFont typeface="Arial"/>
+              <a:buChar char="•"/>
+            </a:pPr>
+            <a:r>
+              <a:rPr sz="1500" b="0" i="0">
+                <a:solidFill>
+                  <a:srgbClr val="1B1F2A"/>
+                </a:solidFill>
+                <a:latin typeface="IBM Plex Sans"/>
+                <a:ea typeface="IBM Plex Sans"/>
+                <a:cs typeface="IBM Plex Sans"/>
+              </a:rPr>
+              <a:t>J  →  J + 0.02 I</a:t>
+            </a:r>
+          </a:p>
+          <a:p>
+            <a:pPr marL="228600" indent="-228600" algn="l">
+              <a:spcAft>
+                <a:spcPts val="600"/>
+              </a:spcAft>
+              <a:buFont typeface="Arial"/>
+              <a:buChar char="•"/>
+            </a:pPr>
+            <a:r>
+              <a:rPr sz="1500" b="0" i="0">
+                <a:solidFill>
+                  <a:srgbClr val="1B1F2A"/>
+                </a:solidFill>
+                <a:latin typeface="IBM Plex Sans"/>
+                <a:ea typeface="IBM Plex Sans"/>
+                <a:cs typeface="IBM Plex Sans"/>
+              </a:rPr>
+              <a:t>inverse iteration matches ARPACK on 33 of 34 grids</a:t>
             </a:r>
           </a:p>
         </p:txBody>
@@ -1780,7 +1817,7 @@
 </file>
 
 <file path=ppt/slides/slide11.xml><?xml version="1.0" encoding="utf-8"?>
-<p:sld xmlns:a="http://schemas.openxmlformats.org/drawingml/2006/main" xmlns:p="http://schemas.openxmlformats.org/presentationml/2006/main" xmlns:r="http://schemas.openxmlformats.org/officeDocument/2006/relationships">
+<p:sld xmlns:a="http://schemas.openxmlformats.org/drawingml/2006/main" xmlns:r="http://schemas.openxmlformats.org/officeDocument/2006/relationships" xmlns:p="http://schemas.openxmlformats.org/presentationml/2006/main">
   <p:cSld>
     <p:bg>
       <p:bgPr>
@@ -1796,7 +1833,14 @@
         <p:cNvGrpSpPr/>
         <p:nvPr/>
       </p:nvGrpSpPr>
-      <p:grpSpPr/>
+      <p:grpSpPr>
+        <a:xfrm>
+          <a:off x="0" y="0"/>
+          <a:ext cx="0" cy="0"/>
+          <a:chOff x="0" y="0"/>
+          <a:chExt cx="0" cy="0"/>
+        </a:xfrm>
+      </p:grpSpPr>
       <p:sp>
         <p:nvSpPr>
           <p:cNvPr id="2" name="TextBox 1"/>
@@ -1814,7 +1858,7 @@
           <a:noFill/>
         </p:spPr>
         <p:txBody>
-          <a:bodyPr wrap="square" lIns="0" rIns="0" tIns="0" bIns="0" anchor="t">
+          <a:bodyPr wrap="square" lIns="0" tIns="0" rIns="0" bIns="0" anchor="t">
             <a:spAutoFit/>
           </a:bodyPr>
           <a:lstStyle/>
@@ -1833,7 +1877,7 @@
                 <a:ea typeface="IBM Plex Sans"/>
                 <a:cs typeface="IBM Plex Sans"/>
               </a:rPr>
-              <a:t>Why the shift works: the spectrum of J</a:t>
+              <a:t>Summary</a:t>
             </a:r>
           </a:p>
         </p:txBody>
@@ -1879,7 +1923,7 @@
           <a:noFill/>
         </p:spPr>
         <p:txBody>
-          <a:bodyPr wrap="square" lIns="0" rIns="0" tIns="0" bIns="0" anchor="t">
+          <a:bodyPr wrap="square" lIns="0" tIns="0" rIns="0" bIns="0" anchor="t">
             <a:spAutoFit/>
           </a:bodyPr>
           <a:lstStyle/>
@@ -1920,7 +1964,7 @@
           <a:noFill/>
         </p:spPr>
         <p:txBody>
-          <a:bodyPr wrap="square" lIns="0" rIns="0" tIns="0" bIns="0" anchor="t">
+          <a:bodyPr wrap="square" lIns="0" tIns="0" rIns="0" bIns="0" anchor="t">
             <a:spAutoFit/>
           </a:bodyPr>
           <a:lstStyle/>
@@ -1939,45 +1983,21 @@
                 <a:ea typeface="IBM Plex Sans"/>
                 <a:cs typeface="IBM Plex Sans"/>
               </a:rPr>
-              <a:t>11</a:t>
-            </a:r>
-          </a:p>
-        </p:txBody>
-      </p:sp>
-      <p:pic>
-        <p:nvPicPr>
-          <p:cNvPr id="6" name="Picture 5" descr="spectrum.png"/>
-          <p:cNvPicPr>
-            <a:picLocks noChangeAspect="1"/>
-          </p:cNvPicPr>
-          <p:nvPr/>
-        </p:nvPicPr>
-        <p:blipFill>
-          <a:blip r:embed="rId3"/>
-          <a:stretch>
-            <a:fillRect/>
-          </a:stretch>
-        </p:blipFill>
-        <p:spPr>
-          <a:xfrm>
-            <a:off x="857844" y="1325880"/>
-            <a:ext cx="5581223" cy="4114800"/>
-          </a:xfrm>
-          <a:prstGeom prst="rect">
-            <a:avLst/>
-          </a:prstGeom>
-        </p:spPr>
-      </p:pic>
-      <p:sp>
-        <p:nvSpPr>
-          <p:cNvPr id="7" name="TextBox 6"/>
+              <a:t>12</a:t>
+            </a:r>
+          </a:p>
+        </p:txBody>
+      </p:sp>
+      <p:sp>
+        <p:nvSpPr>
+          <p:cNvPr id="6" name="TextBox 5"/>
           <p:cNvSpPr txBox="1"/>
           <p:nvPr/>
         </p:nvSpPr>
         <p:spPr>
           <a:xfrm>
-            <a:off x="7040880" y="1463040"/>
-            <a:ext cx="4297680" cy="1097280"/>
+            <a:off x="813816" y="1554480"/>
+            <a:ext cx="10561320" cy="3200400"/>
           </a:xfrm>
           <a:prstGeom prst="rect">
             <a:avLst/>
@@ -1985,20 +2005,20 @@
           <a:noFill/>
         </p:spPr>
         <p:txBody>
-          <a:bodyPr wrap="square" lIns="0" rIns="0" tIns="0" bIns="0" anchor="t">
+          <a:bodyPr wrap="square" lIns="0" tIns="0" rIns="0" bIns="0" anchor="t">
             <a:spAutoFit/>
           </a:bodyPr>
           <a:lstStyle/>
           <a:p>
-            <a:pPr algn="l" marL="228600" indent="-228600">
+            <a:pPr marL="228600" indent="-228600" algn="l">
               <a:spcAft>
-                <a:spcPts val="600"/>
+                <a:spcPts val="1400"/>
               </a:spcAft>
               <a:buFont typeface="Arial"/>
               <a:buChar char="•"/>
             </a:pPr>
             <a:r>
-              <a:rPr sz="1600" b="0" i="0">
+              <a:rPr sz="1900" b="0" i="0">
                 <a:solidFill>
                   <a:srgbClr val="1B1F2A"/>
                 </a:solidFill>
@@ -2006,19 +2026,19 @@
                 <a:ea typeface="IBM Plex Sans"/>
                 <a:cs typeface="IBM Plex Sans"/>
               </a:rPr>
-              <a:t>|λ|max: power method</a:t>
-            </a:r>
-          </a:p>
-          <a:p>
-            <a:pPr algn="l" marL="228600" indent="-228600">
+              <a:t>Implemented the homotopy, the ODE and the FE, RK2 and BE integrators</a:t>
+            </a:r>
+          </a:p>
+          <a:p>
+            <a:pPr marL="228600" indent="-228600" algn="l">
               <a:spcAft>
-                <a:spcPts val="600"/>
+                <a:spcPts val="1400"/>
               </a:spcAft>
               <a:buFont typeface="Arial"/>
               <a:buChar char="•"/>
             </a:pPr>
             <a:r>
-              <a:rPr sz="1600" b="0" i="0">
+              <a:rPr sz="1900" b="0" i="0">
                 <a:solidFill>
                   <a:srgbClr val="1B1F2A"/>
                 </a:solidFill>
@@ -2026,21 +2046,61 @@
                 <a:ea typeface="IBM Plex Sans"/>
                 <a:cs typeface="IBM Plex Sans"/>
               </a:rPr>
-              <a:t>|λ|min: inverse iteration (one LU)</a:t>
-            </a:r>
-          </a:p>
-        </p:txBody>
-      </p:sp>
-      <p:sp>
-        <p:nvSpPr>
-          <p:cNvPr id="8" name="TextBox 7"/>
+              <a:t>Reproduced Figures 1, 2 and 4 and Section 4.2.1</a:t>
+            </a:r>
+          </a:p>
+          <a:p>
+            <a:pPr marL="228600" indent="-228600" algn="l">
+              <a:spcAft>
+                <a:spcPts val="1400"/>
+              </a:spcAft>
+              <a:buFont typeface="Arial"/>
+              <a:buChar char="•"/>
+            </a:pPr>
+            <a:r>
+              <a:rPr sz="1900" b="0" i="0">
+                <a:solidFill>
+                  <a:srgbClr val="1B1F2A"/>
+                </a:solidFill>
+                <a:latin typeface="IBM Plex Sans"/>
+                <a:ea typeface="IBM Plex Sans"/>
+                <a:cs typeface="IBM Plex Sans"/>
+              </a:rPr>
+              <a:t>The first BE step is a Newton step on J + δI: that is why the method works</a:t>
+            </a:r>
+          </a:p>
+          <a:p>
+            <a:pPr marL="228600" indent="-228600" algn="l">
+              <a:spcAft>
+                <a:spcPts val="1400"/>
+              </a:spcAft>
+              <a:buFont typeface="Arial"/>
+              <a:buChar char="•"/>
+            </a:pPr>
+            <a:r>
+              <a:rPr sz="1900" b="0" i="0">
+                <a:solidFill>
+                  <a:srgbClr val="1B1F2A"/>
+                </a:solidFill>
+                <a:latin typeface="IBM Plex Sans"/>
+                <a:ea typeface="IBM Plex Sans"/>
+                <a:cs typeface="IBM Plex Sans"/>
+              </a:rPr>
+              <a:t>Corrector: 152 of 170 solved, wrong roots from 14 to 2</a:t>
+            </a:r>
+          </a:p>
+        </p:txBody>
+      </p:sp>
+      <p:sp>
+        <p:nvSpPr>
+          <p:cNvPr id="7" name="TextBox 6"/>
           <p:cNvSpPr txBox="1"/>
           <p:nvPr/>
         </p:nvSpPr>
         <p:spPr>
           <a:xfrm>
-            <a:off x="7040880" y="2514600"/>
-            <a:ext cx="4297680" cy="457200"/>
+            <a:off x="813816" y="4297680"/>
+            <a:ext cx="10561320" cy="548640"/>
           </a:xfrm>
           <a:prstGeom prst="rect">
             <a:avLst/>
@@ -2048,7 +2108,7 @@
           <a:noFill/>
         </p:spPr>
         <p:txBody>
-          <a:bodyPr wrap="square" lIns="0" rIns="0" tIns="0" bIns="0" anchor="t">
+          <a:bodyPr wrap="square" lIns="0" tIns="0" rIns="0" bIns="0" anchor="t">
             <a:spAutoFit/>
           </a:bodyPr>
           <a:lstStyle/>
@@ -2059,141 +2119,15 @@
               </a:spcAft>
             </a:pPr>
             <a:r>
-              <a:rPr sz="1500" b="0" i="0">
-                <a:solidFill>
-                  <a:srgbClr val="333A48"/>
-                </a:solidFill>
-                <a:latin typeface="IBM Plex Sans"/>
-                <a:ea typeface="IBM Plex Sans"/>
-                <a:cs typeface="IBM Plex Sans"/>
-              </a:rPr>
-              <a:t>eigenvalue ratio, case109272</a:t>
-            </a:r>
-          </a:p>
-        </p:txBody>
-      </p:sp>
-      <p:sp>
-        <p:nvSpPr>
-          <p:cNvPr id="9" name="TextBox 8"/>
-          <p:cNvSpPr txBox="1"/>
-          <p:nvPr/>
-        </p:nvSpPr>
-        <p:spPr>
-          <a:xfrm>
-            <a:off x="7040880" y="2880360"/>
-            <a:ext cx="4297680" cy="731520"/>
-          </a:xfrm>
-          <a:prstGeom prst="rect">
-            <a:avLst/>
-          </a:prstGeom>
-          <a:noFill/>
-        </p:spPr>
-        <p:txBody>
-          <a:bodyPr wrap="square" lIns="0" rIns="0" tIns="0" bIns="0" anchor="t">
-            <a:spAutoFit/>
-          </a:bodyPr>
-          <a:lstStyle/>
-          <a:p>
-            <a:pPr algn="l">
-              <a:spcAft>
-                <a:spcPts val="800"/>
-              </a:spcAft>
-            </a:pPr>
-            <a:r>
-              <a:rPr sz="3400" b="1" i="0">
-                <a:solidFill>
-                  <a:srgbClr val="B54A3F"/>
-                </a:solidFill>
-                <a:latin typeface="IBM Plex Sans"/>
-                <a:ea typeface="IBM Plex Sans"/>
-                <a:cs typeface="IBM Plex Sans"/>
-              </a:rPr>
-              <a:t>1.2×10⁸</a:t>
-            </a:r>
-            <a:r>
-              <a:rPr sz="3400" b="0" i="0">
-                <a:solidFill>
-                  <a:srgbClr val="1B1F2A"/>
-                </a:solidFill>
-                <a:latin typeface="IBM Plex Sans"/>
-                <a:ea typeface="IBM Plex Sans"/>
-                <a:cs typeface="IBM Plex Sans"/>
-              </a:rPr>
-              <a:t>  →  </a:t>
-            </a:r>
-            <a:r>
-              <a:rPr sz="3400" b="1" i="0">
-                <a:solidFill>
-                  <a:srgbClr val="2F8F5B"/>
-                </a:solidFill>
-                <a:latin typeface="IBM Plex Sans"/>
-                <a:ea typeface="IBM Plex Sans"/>
-                <a:cs typeface="IBM Plex Sans"/>
-              </a:rPr>
-              <a:t>2×10⁶</a:t>
-            </a:r>
-          </a:p>
-        </p:txBody>
-      </p:sp>
-      <p:sp>
-        <p:nvSpPr>
-          <p:cNvPr id="10" name="TextBox 9"/>
-          <p:cNvSpPr txBox="1"/>
-          <p:nvPr/>
-        </p:nvSpPr>
-        <p:spPr>
-          <a:xfrm>
-            <a:off x="7040880" y="3703320"/>
-            <a:ext cx="4297680" cy="1280160"/>
-          </a:xfrm>
-          <a:prstGeom prst="rect">
-            <a:avLst/>
-          </a:prstGeom>
-          <a:noFill/>
-        </p:spPr>
-        <p:txBody>
-          <a:bodyPr wrap="square" lIns="0" rIns="0" tIns="0" bIns="0" anchor="t">
-            <a:spAutoFit/>
-          </a:bodyPr>
-          <a:lstStyle/>
-          <a:p>
-            <a:pPr algn="l" marL="228600" indent="-228600">
-              <a:spcAft>
-                <a:spcPts val="600"/>
-              </a:spcAft>
-              <a:buFont typeface="Arial"/>
-              <a:buChar char="•"/>
-            </a:pPr>
-            <a:r>
-              <a:rPr sz="1500" b="0" i="0">
-                <a:solidFill>
-                  <a:srgbClr val="1B1F2A"/>
-                </a:solidFill>
-                <a:latin typeface="IBM Plex Sans"/>
-                <a:ea typeface="IBM Plex Sans"/>
-                <a:cs typeface="IBM Plex Sans"/>
-              </a:rPr>
-              <a:t>J  →  J + 0.02 I</a:t>
-            </a:r>
-          </a:p>
-          <a:p>
-            <a:pPr algn="l" marL="228600" indent="-228600">
-              <a:spcAft>
-                <a:spcPts val="600"/>
-              </a:spcAft>
-              <a:buFont typeface="Arial"/>
-              <a:buChar char="•"/>
-            </a:pPr>
-            <a:r>
-              <a:rPr sz="1500" b="0" i="0">
-                <a:solidFill>
-                  <a:srgbClr val="1B1F2A"/>
-                </a:solidFill>
-                <a:latin typeface="IBM Plex Sans"/>
-                <a:ea typeface="IBM Plex Sans"/>
-                <a:cs typeface="IBM Plex Sans"/>
-              </a:rPr>
-              <a:t>inverse iteration matches ARPACK on 33 of 34 grids</a:t>
+              <a:rPr sz="2200" b="1" i="0">
+                <a:solidFill>
+                  <a:srgbClr val="1F3A5F"/>
+                </a:solidFill>
+                <a:latin typeface="IBM Plex Sans"/>
+                <a:ea typeface="IBM Plex Sans"/>
+                <a:cs typeface="IBM Plex Sans"/>
+              </a:rPr>
+              <a:t>Thank you. Questions?</a:t>
             </a:r>
           </a:p>
         </p:txBody>
@@ -2206,8 +2140,8 @@
 </p:sld>
 </file>
 
-<file path=ppt/slides/slide12.xml><?xml version="1.0" encoding="utf-8"?>
-<p:sld xmlns:a="http://schemas.openxmlformats.org/drawingml/2006/main" xmlns:p="http://schemas.openxmlformats.org/presentationml/2006/main" xmlns:r="http://schemas.openxmlformats.org/officeDocument/2006/relationships">
+<file path=ppt/slides/slide2.xml><?xml version="1.0" encoding="utf-8"?>
+<p:sld xmlns:a="http://schemas.openxmlformats.org/drawingml/2006/main" xmlns:r="http://schemas.openxmlformats.org/officeDocument/2006/relationships" xmlns:p="http://schemas.openxmlformats.org/presentationml/2006/main">
   <p:cSld>
     <p:bg>
       <p:bgPr>
@@ -2223,7 +2157,14 @@
         <p:cNvGrpSpPr/>
         <p:nvPr/>
       </p:nvGrpSpPr>
-      <p:grpSpPr/>
+      <p:grpSpPr>
+        <a:xfrm>
+          <a:off x="0" y="0"/>
+          <a:ext cx="0" cy="0"/>
+          <a:chOff x="0" y="0"/>
+          <a:chExt cx="0" cy="0"/>
+        </a:xfrm>
+      </p:grpSpPr>
       <p:sp>
         <p:nvSpPr>
           <p:cNvPr id="2" name="TextBox 1"/>
@@ -2241,7 +2182,7 @@
           <a:noFill/>
         </p:spPr>
         <p:txBody>
-          <a:bodyPr wrap="square" lIns="0" rIns="0" tIns="0" bIns="0" anchor="t">
+          <a:bodyPr wrap="square" lIns="0" tIns="0" rIns="0" bIns="0" anchor="t">
             <a:spAutoFit/>
           </a:bodyPr>
           <a:lstStyle/>
@@ -2260,7 +2201,7 @@
                 <a:ea typeface="IBM Plex Sans"/>
                 <a:cs typeface="IBM Plex Sans"/>
               </a:rPr>
-              <a:t>Summary</a:t>
+              <a:t>My part of the project</a:t>
             </a:r>
           </a:p>
         </p:txBody>
@@ -2274,7 +2215,7 @@
           <p:nvPr/>
         </p:nvPicPr>
         <p:blipFill>
-          <a:blip r:embed="rId2"/>
+          <a:blip r:embed="rId3"/>
           <a:stretch>
             <a:fillRect/>
           </a:stretch>
@@ -2306,7 +2247,7 @@
           <a:noFill/>
         </p:spPr>
         <p:txBody>
-          <a:bodyPr wrap="square" lIns="0" rIns="0" tIns="0" bIns="0" anchor="t">
+          <a:bodyPr wrap="square" lIns="0" tIns="0" rIns="0" bIns="0" anchor="t">
             <a:spAutoFit/>
           </a:bodyPr>
           <a:lstStyle/>
@@ -2347,7 +2288,7 @@
           <a:noFill/>
         </p:spPr>
         <p:txBody>
-          <a:bodyPr wrap="square" lIns="0" rIns="0" tIns="0" bIns="0" anchor="t">
+          <a:bodyPr wrap="square" lIns="0" tIns="0" rIns="0" bIns="0" anchor="t">
             <a:spAutoFit/>
           </a:bodyPr>
           <a:lstStyle/>
@@ -2366,21 +2307,123 @@
                 <a:ea typeface="IBM Plex Sans"/>
                 <a:cs typeface="IBM Plex Sans"/>
               </a:rPr>
-              <a:t>12</a:t>
-            </a:r>
-          </a:p>
-        </p:txBody>
-      </p:sp>
-      <p:sp>
-        <p:nvSpPr>
-          <p:cNvPr id="6" name="TextBox 5"/>
+              <a:t>2</a:t>
+            </a:r>
+          </a:p>
+        </p:txBody>
+      </p:sp>
+      <p:sp>
+        <p:nvSpPr>
+          <p:cNvPr id="6" name="Rounded Rectangle 5"/>
+          <p:cNvSpPr/>
+          <p:nvPr/>
+        </p:nvSpPr>
+        <p:spPr>
+          <a:xfrm>
+            <a:off x="813816" y="1600200"/>
+            <a:ext cx="5120640" cy="1737360"/>
+          </a:xfrm>
+          <a:prstGeom prst="roundRect">
+            <a:avLst>
+              <a:gd name="adj" fmla="val 8000"/>
+            </a:avLst>
+          </a:prstGeom>
+          <a:solidFill>
+            <a:srgbClr val="F1EFEA"/>
+          </a:solidFill>
+          <a:ln>
+            <a:noFill/>
+          </a:ln>
+          <a:effectLst/>
+        </p:spPr>
+        <p:style>
+          <a:lnRef idx="1">
+            <a:schemeClr val="accent1"/>
+          </a:lnRef>
+          <a:fillRef idx="3">
+            <a:schemeClr val="accent1"/>
+          </a:fillRef>
+          <a:effectRef idx="2">
+            <a:schemeClr val="accent1"/>
+          </a:effectRef>
+          <a:fontRef idx="minor">
+            <a:schemeClr val="lt1"/>
+          </a:fontRef>
+        </p:style>
+        <p:txBody>
+          <a:bodyPr rtlCol="0" anchor="ctr"/>
+          <a:lstStyle/>
+          <a:p>
+            <a:pPr algn="ctr"/>
+            <a:endParaRPr/>
+          </a:p>
+        </p:txBody>
+      </p:sp>
+      <p:sp>
+        <p:nvSpPr>
+          <p:cNvPr id="7" name="Oval 6"/>
+          <p:cNvSpPr/>
+          <p:nvPr/>
+        </p:nvSpPr>
+        <p:spPr>
+          <a:xfrm>
+            <a:off x="1088136" y="1874520"/>
+            <a:ext cx="475488" cy="475488"/>
+          </a:xfrm>
+          <a:prstGeom prst="ellipse">
+            <a:avLst/>
+          </a:prstGeom>
+          <a:solidFill>
+            <a:srgbClr val="1F3A5F"/>
+          </a:solidFill>
+          <a:ln>
+            <a:noFill/>
+          </a:ln>
+          <a:effectLst/>
+        </p:spPr>
+        <p:style>
+          <a:lnRef idx="1">
+            <a:schemeClr val="accent1"/>
+          </a:lnRef>
+          <a:fillRef idx="3">
+            <a:schemeClr val="accent1"/>
+          </a:fillRef>
+          <a:effectRef idx="2">
+            <a:schemeClr val="accent1"/>
+          </a:effectRef>
+          <a:fontRef idx="minor">
+            <a:schemeClr val="lt1"/>
+          </a:fontRef>
+        </p:style>
+        <p:txBody>
+          <a:bodyPr lIns="0" tIns="0" rIns="0" bIns="0" rtlCol="0" anchor="ctr"/>
+          <a:lstStyle/>
+          <a:p>
+            <a:pPr algn="ctr"/>
+            <a:r>
+              <a:rPr sz="1600" b="1" i="0">
+                <a:solidFill>
+                  <a:srgbClr val="FFFFFF"/>
+                </a:solidFill>
+                <a:latin typeface="IBM Plex Sans"/>
+                <a:ea typeface="IBM Plex Sans"/>
+                <a:cs typeface="IBM Plex Sans"/>
+              </a:rPr>
+              <a:t>1</a:t>
+            </a:r>
+          </a:p>
+        </p:txBody>
+      </p:sp>
+      <p:sp>
+        <p:nvSpPr>
+          <p:cNvPr id="8" name="TextBox 7"/>
           <p:cNvSpPr txBox="1"/>
           <p:nvPr/>
         </p:nvSpPr>
         <p:spPr>
           <a:xfrm>
-            <a:off x="813816" y="1554480"/>
-            <a:ext cx="10561320" cy="3200400"/>
+            <a:off x="1728216" y="1874520"/>
+            <a:ext cx="3977640" cy="457200"/>
           </a:xfrm>
           <a:prstGeom prst="rect">
             <a:avLst/>
@@ -2388,110 +2431,7 @@
           <a:noFill/>
         </p:spPr>
         <p:txBody>
-          <a:bodyPr wrap="square" lIns="0" rIns="0" tIns="0" bIns="0" anchor="t">
-            <a:spAutoFit/>
-          </a:bodyPr>
-          <a:lstStyle/>
-          <a:p>
-            <a:pPr algn="l" marL="228600" indent="-228600">
-              <a:spcAft>
-                <a:spcPts val="1400"/>
-              </a:spcAft>
-              <a:buFont typeface="Arial"/>
-              <a:buChar char="•"/>
-            </a:pPr>
-            <a:r>
-              <a:rPr sz="1900" b="0" i="0">
-                <a:solidFill>
-                  <a:srgbClr val="1B1F2A"/>
-                </a:solidFill>
-                <a:latin typeface="IBM Plex Sans"/>
-                <a:ea typeface="IBM Plex Sans"/>
-                <a:cs typeface="IBM Plex Sans"/>
-              </a:rPr>
-              <a:t>Implemented the homotopy, the ODE and the FE, RK2 and BE integrators</a:t>
-            </a:r>
-          </a:p>
-          <a:p>
-            <a:pPr algn="l" marL="228600" indent="-228600">
-              <a:spcAft>
-                <a:spcPts val="1400"/>
-              </a:spcAft>
-              <a:buFont typeface="Arial"/>
-              <a:buChar char="•"/>
-            </a:pPr>
-            <a:r>
-              <a:rPr sz="1900" b="0" i="0">
-                <a:solidFill>
-                  <a:srgbClr val="1B1F2A"/>
-                </a:solidFill>
-                <a:latin typeface="IBM Plex Sans"/>
-                <a:ea typeface="IBM Plex Sans"/>
-                <a:cs typeface="IBM Plex Sans"/>
-              </a:rPr>
-              <a:t>Reproduced Figures 1, 2 and 4 and Section 4.2.1</a:t>
-            </a:r>
-          </a:p>
-          <a:p>
-            <a:pPr algn="l" marL="228600" indent="-228600">
-              <a:spcAft>
-                <a:spcPts val="1400"/>
-              </a:spcAft>
-              <a:buFont typeface="Arial"/>
-              <a:buChar char="•"/>
-            </a:pPr>
-            <a:r>
-              <a:rPr sz="1900" b="0" i="0">
-                <a:solidFill>
-                  <a:srgbClr val="1B1F2A"/>
-                </a:solidFill>
-                <a:latin typeface="IBM Plex Sans"/>
-                <a:ea typeface="IBM Plex Sans"/>
-                <a:cs typeface="IBM Plex Sans"/>
-              </a:rPr>
-              <a:t>The first BE step is a Newton step on J + δI: that is why the method works</a:t>
-            </a:r>
-          </a:p>
-          <a:p>
-            <a:pPr algn="l" marL="228600" indent="-228600">
-              <a:spcAft>
-                <a:spcPts val="1400"/>
-              </a:spcAft>
-              <a:buFont typeface="Arial"/>
-              <a:buChar char="•"/>
-            </a:pPr>
-            <a:r>
-              <a:rPr sz="1900" b="0" i="0">
-                <a:solidFill>
-                  <a:srgbClr val="1B1F2A"/>
-                </a:solidFill>
-                <a:latin typeface="IBM Plex Sans"/>
-                <a:ea typeface="IBM Plex Sans"/>
-                <a:cs typeface="IBM Plex Sans"/>
-              </a:rPr>
-              <a:t>Corrector: 152 of 170 solved, wrong roots from 14 to 2</a:t>
-            </a:r>
-          </a:p>
-        </p:txBody>
-      </p:sp>
-      <p:sp>
-        <p:nvSpPr>
-          <p:cNvPr id="7" name="TextBox 6"/>
-          <p:cNvSpPr txBox="1"/>
-          <p:nvPr/>
-        </p:nvSpPr>
-        <p:spPr>
-          <a:xfrm>
-            <a:off x="813816" y="4297680"/>
-            <a:ext cx="10561320" cy="548640"/>
-          </a:xfrm>
-          <a:prstGeom prst="rect">
-            <a:avLst/>
-          </a:prstGeom>
-          <a:noFill/>
-        </p:spPr>
-        <p:txBody>
-          <a:bodyPr wrap="square" lIns="0" rIns="0" tIns="0" bIns="0" anchor="t">
+          <a:bodyPr wrap="square" lIns="0" tIns="0" rIns="0" bIns="0" anchor="t">
             <a:spAutoFit/>
           </a:bodyPr>
           <a:lstStyle/>
@@ -2502,7 +2442,7 @@
               </a:spcAft>
             </a:pPr>
             <a:r>
-              <a:rPr sz="2200" b="1" i="0">
+              <a:rPr sz="1900" b="1" i="0">
                 <a:solidFill>
                   <a:srgbClr val="1F3A5F"/>
                 </a:solidFill>
@@ -2510,7 +2450,600 @@
                 <a:ea typeface="IBM Plex Sans"/>
                 <a:cs typeface="IBM Plex Sans"/>
               </a:rPr>
-              <a:t>Thank you. Questions?</a:t>
+              <a:t>The homotopy</a:t>
+            </a:r>
+          </a:p>
+        </p:txBody>
+      </p:sp>
+      <p:sp>
+        <p:nvSpPr>
+          <p:cNvPr id="9" name="TextBox 8"/>
+          <p:cNvSpPr txBox="1"/>
+          <p:nvPr/>
+        </p:nvSpPr>
+        <p:spPr>
+          <a:xfrm>
+            <a:off x="1728216" y="2377440"/>
+            <a:ext cx="3977640" cy="822960"/>
+          </a:xfrm>
+          <a:prstGeom prst="rect">
+            <a:avLst/>
+          </a:prstGeom>
+          <a:noFill/>
+        </p:spPr>
+        <p:txBody>
+          <a:bodyPr wrap="square" lIns="0" tIns="0" rIns="0" bIns="0" anchor="t">
+            <a:spAutoFit/>
+          </a:bodyPr>
+          <a:lstStyle/>
+          <a:p>
+            <a:pPr algn="l">
+              <a:spcAft>
+                <a:spcPts val="800"/>
+              </a:spcAft>
+            </a:pPr>
+            <a:r>
+              <a:rPr sz="1500" b="0" i="0">
+                <a:solidFill>
+                  <a:srgbClr val="333A48"/>
+                </a:solidFill>
+                <a:latin typeface="IBM Plex Sans"/>
+                <a:ea typeface="IBM Plex Sans"/>
+                <a:cs typeface="IBM Plex Sans"/>
+              </a:rPr>
+              <a:t>G(x, t), the ODE, and the FE, RK2 and BE integrators</a:t>
+            </a:r>
+          </a:p>
+        </p:txBody>
+      </p:sp>
+      <p:sp>
+        <p:nvSpPr>
+          <p:cNvPr id="10" name="Rounded Rectangle 9"/>
+          <p:cNvSpPr/>
+          <p:nvPr/>
+        </p:nvSpPr>
+        <p:spPr>
+          <a:xfrm>
+            <a:off x="6254496" y="1600200"/>
+            <a:ext cx="5120640" cy="1737360"/>
+          </a:xfrm>
+          <a:prstGeom prst="roundRect">
+            <a:avLst>
+              <a:gd name="adj" fmla="val 8000"/>
+            </a:avLst>
+          </a:prstGeom>
+          <a:solidFill>
+            <a:srgbClr val="F1EFEA"/>
+          </a:solidFill>
+          <a:ln>
+            <a:noFill/>
+          </a:ln>
+          <a:effectLst/>
+        </p:spPr>
+        <p:style>
+          <a:lnRef idx="1">
+            <a:schemeClr val="accent1"/>
+          </a:lnRef>
+          <a:fillRef idx="3">
+            <a:schemeClr val="accent1"/>
+          </a:fillRef>
+          <a:effectRef idx="2">
+            <a:schemeClr val="accent1"/>
+          </a:effectRef>
+          <a:fontRef idx="minor">
+            <a:schemeClr val="lt1"/>
+          </a:fontRef>
+        </p:style>
+        <p:txBody>
+          <a:bodyPr rtlCol="0" anchor="ctr"/>
+          <a:lstStyle/>
+          <a:p>
+            <a:pPr algn="ctr"/>
+            <a:endParaRPr/>
+          </a:p>
+        </p:txBody>
+      </p:sp>
+      <p:sp>
+        <p:nvSpPr>
+          <p:cNvPr id="11" name="Oval 10"/>
+          <p:cNvSpPr/>
+          <p:nvPr/>
+        </p:nvSpPr>
+        <p:spPr>
+          <a:xfrm>
+            <a:off x="6528816" y="1874520"/>
+            <a:ext cx="475488" cy="475488"/>
+          </a:xfrm>
+          <a:prstGeom prst="ellipse">
+            <a:avLst/>
+          </a:prstGeom>
+          <a:solidFill>
+            <a:srgbClr val="1F3A5F"/>
+          </a:solidFill>
+          <a:ln>
+            <a:noFill/>
+          </a:ln>
+          <a:effectLst/>
+        </p:spPr>
+        <p:style>
+          <a:lnRef idx="1">
+            <a:schemeClr val="accent1"/>
+          </a:lnRef>
+          <a:fillRef idx="3">
+            <a:schemeClr val="accent1"/>
+          </a:fillRef>
+          <a:effectRef idx="2">
+            <a:schemeClr val="accent1"/>
+          </a:effectRef>
+          <a:fontRef idx="minor">
+            <a:schemeClr val="lt1"/>
+          </a:fontRef>
+        </p:style>
+        <p:txBody>
+          <a:bodyPr lIns="0" tIns="0" rIns="0" bIns="0" rtlCol="0" anchor="ctr"/>
+          <a:lstStyle/>
+          <a:p>
+            <a:pPr algn="ctr"/>
+            <a:r>
+              <a:rPr sz="1600" b="1" i="0">
+                <a:solidFill>
+                  <a:srgbClr val="FFFFFF"/>
+                </a:solidFill>
+                <a:latin typeface="IBM Plex Sans"/>
+                <a:ea typeface="IBM Plex Sans"/>
+                <a:cs typeface="IBM Plex Sans"/>
+              </a:rPr>
+              <a:t>2</a:t>
+            </a:r>
+          </a:p>
+        </p:txBody>
+      </p:sp>
+      <p:sp>
+        <p:nvSpPr>
+          <p:cNvPr id="12" name="TextBox 11"/>
+          <p:cNvSpPr txBox="1"/>
+          <p:nvPr/>
+        </p:nvSpPr>
+        <p:spPr>
+          <a:xfrm>
+            <a:off x="7168896" y="1874520"/>
+            <a:ext cx="3977640" cy="457200"/>
+          </a:xfrm>
+          <a:prstGeom prst="rect">
+            <a:avLst/>
+          </a:prstGeom>
+          <a:noFill/>
+        </p:spPr>
+        <p:txBody>
+          <a:bodyPr wrap="square" lIns="0" tIns="0" rIns="0" bIns="0" anchor="t">
+            <a:spAutoFit/>
+          </a:bodyPr>
+          <a:lstStyle/>
+          <a:p>
+            <a:pPr algn="l">
+              <a:spcAft>
+                <a:spcPts val="800"/>
+              </a:spcAft>
+            </a:pPr>
+            <a:r>
+              <a:rPr sz="1900" b="1" i="0">
+                <a:solidFill>
+                  <a:srgbClr val="1F3A5F"/>
+                </a:solidFill>
+                <a:latin typeface="IBM Plex Sans"/>
+                <a:ea typeface="IBM Plex Sans"/>
+                <a:cs typeface="IBM Plex Sans"/>
+              </a:rPr>
+              <a:t>Paper results</a:t>
+            </a:r>
+          </a:p>
+        </p:txBody>
+      </p:sp>
+      <p:sp>
+        <p:nvSpPr>
+          <p:cNvPr id="13" name="TextBox 12"/>
+          <p:cNvSpPr txBox="1"/>
+          <p:nvPr/>
+        </p:nvSpPr>
+        <p:spPr>
+          <a:xfrm>
+            <a:off x="7168896" y="2377440"/>
+            <a:ext cx="3977640" cy="822960"/>
+          </a:xfrm>
+          <a:prstGeom prst="rect">
+            <a:avLst/>
+          </a:prstGeom>
+          <a:noFill/>
+        </p:spPr>
+        <p:txBody>
+          <a:bodyPr wrap="square" lIns="0" tIns="0" rIns="0" bIns="0" anchor="t">
+            <a:spAutoFit/>
+          </a:bodyPr>
+          <a:lstStyle/>
+          <a:p>
+            <a:pPr algn="l">
+              <a:spcAft>
+                <a:spcPts val="800"/>
+              </a:spcAft>
+            </a:pPr>
+            <a:r>
+              <a:rPr sz="1500" b="0" i="0">
+                <a:solidFill>
+                  <a:srgbClr val="333A48"/>
+                </a:solidFill>
+                <a:latin typeface="IBM Plex Sans"/>
+                <a:ea typeface="IBM Plex Sans"/>
+                <a:cs typeface="IBM Plex Sans"/>
+              </a:rPr>
+              <a:t>Figures 1, 2 and 4, and the first-step study of Section 4.2.1</a:t>
+            </a:r>
+          </a:p>
+        </p:txBody>
+      </p:sp>
+      <p:sp>
+        <p:nvSpPr>
+          <p:cNvPr id="14" name="Rounded Rectangle 13"/>
+          <p:cNvSpPr/>
+          <p:nvPr/>
+        </p:nvSpPr>
+        <p:spPr>
+          <a:xfrm>
+            <a:off x="813816" y="3657600"/>
+            <a:ext cx="5120640" cy="1737360"/>
+          </a:xfrm>
+          <a:prstGeom prst="roundRect">
+            <a:avLst>
+              <a:gd name="adj" fmla="val 8000"/>
+            </a:avLst>
+          </a:prstGeom>
+          <a:solidFill>
+            <a:srgbClr val="F1EFEA"/>
+          </a:solidFill>
+          <a:ln>
+            <a:noFill/>
+          </a:ln>
+          <a:effectLst/>
+        </p:spPr>
+        <p:style>
+          <a:lnRef idx="1">
+            <a:schemeClr val="accent1"/>
+          </a:lnRef>
+          <a:fillRef idx="3">
+            <a:schemeClr val="accent1"/>
+          </a:fillRef>
+          <a:effectRef idx="2">
+            <a:schemeClr val="accent1"/>
+          </a:effectRef>
+          <a:fontRef idx="minor">
+            <a:schemeClr val="lt1"/>
+          </a:fontRef>
+        </p:style>
+        <p:txBody>
+          <a:bodyPr rtlCol="0" anchor="ctr"/>
+          <a:lstStyle/>
+          <a:p>
+            <a:pPr algn="ctr"/>
+            <a:endParaRPr/>
+          </a:p>
+        </p:txBody>
+      </p:sp>
+      <p:sp>
+        <p:nvSpPr>
+          <p:cNvPr id="15" name="Oval 14"/>
+          <p:cNvSpPr/>
+          <p:nvPr/>
+        </p:nvSpPr>
+        <p:spPr>
+          <a:xfrm>
+            <a:off x="1088136" y="3931920"/>
+            <a:ext cx="475488" cy="475488"/>
+          </a:xfrm>
+          <a:prstGeom prst="ellipse">
+            <a:avLst/>
+          </a:prstGeom>
+          <a:solidFill>
+            <a:srgbClr val="1F3A5F"/>
+          </a:solidFill>
+          <a:ln>
+            <a:noFill/>
+          </a:ln>
+          <a:effectLst/>
+        </p:spPr>
+        <p:style>
+          <a:lnRef idx="1">
+            <a:schemeClr val="accent1"/>
+          </a:lnRef>
+          <a:fillRef idx="3">
+            <a:schemeClr val="accent1"/>
+          </a:fillRef>
+          <a:effectRef idx="2">
+            <a:schemeClr val="accent1"/>
+          </a:effectRef>
+          <a:fontRef idx="minor">
+            <a:schemeClr val="lt1"/>
+          </a:fontRef>
+        </p:style>
+        <p:txBody>
+          <a:bodyPr lIns="0" tIns="0" rIns="0" bIns="0" rtlCol="0" anchor="ctr"/>
+          <a:lstStyle/>
+          <a:p>
+            <a:pPr algn="ctr"/>
+            <a:r>
+              <a:rPr sz="1600" b="1" i="0">
+                <a:solidFill>
+                  <a:srgbClr val="FFFFFF"/>
+                </a:solidFill>
+                <a:latin typeface="IBM Plex Sans"/>
+                <a:ea typeface="IBM Plex Sans"/>
+                <a:cs typeface="IBM Plex Sans"/>
+              </a:rPr>
+              <a:t>3</a:t>
+            </a:r>
+          </a:p>
+        </p:txBody>
+      </p:sp>
+      <p:sp>
+        <p:nvSpPr>
+          <p:cNvPr id="16" name="TextBox 15"/>
+          <p:cNvSpPr txBox="1"/>
+          <p:nvPr/>
+        </p:nvSpPr>
+        <p:spPr>
+          <a:xfrm>
+            <a:off x="1728216" y="3931920"/>
+            <a:ext cx="3977640" cy="457200"/>
+          </a:xfrm>
+          <a:prstGeom prst="rect">
+            <a:avLst/>
+          </a:prstGeom>
+          <a:noFill/>
+        </p:spPr>
+        <p:txBody>
+          <a:bodyPr wrap="square" lIns="0" tIns="0" rIns="0" bIns="0" anchor="t">
+            <a:spAutoFit/>
+          </a:bodyPr>
+          <a:lstStyle/>
+          <a:p>
+            <a:pPr algn="l">
+              <a:spcAft>
+                <a:spcPts val="800"/>
+              </a:spcAft>
+            </a:pPr>
+            <a:r>
+              <a:rPr sz="1900" b="1" i="0">
+                <a:solidFill>
+                  <a:srgbClr val="1F3A5F"/>
+                </a:solidFill>
+                <a:latin typeface="IBM Plex Sans"/>
+                <a:ea typeface="IBM Plex Sans"/>
+                <a:cs typeface="IBM Plex Sans"/>
+              </a:rPr>
+              <a:t>solve() and the corrector</a:t>
+            </a:r>
+          </a:p>
+        </p:txBody>
+      </p:sp>
+      <p:sp>
+        <p:nvSpPr>
+          <p:cNvPr id="17" name="TextBox 16"/>
+          <p:cNvSpPr txBox="1"/>
+          <p:nvPr/>
+        </p:nvSpPr>
+        <p:spPr>
+          <a:xfrm>
+            <a:off x="1728216" y="4434840"/>
+            <a:ext cx="3977640" cy="822960"/>
+          </a:xfrm>
+          <a:prstGeom prst="rect">
+            <a:avLst/>
+          </a:prstGeom>
+          <a:noFill/>
+        </p:spPr>
+        <p:txBody>
+          <a:bodyPr wrap="square" lIns="0" tIns="0" rIns="0" bIns="0" anchor="t">
+            <a:spAutoFit/>
+          </a:bodyPr>
+          <a:lstStyle/>
+          <a:p>
+            <a:pPr algn="l">
+              <a:spcAft>
+                <a:spcPts val="800"/>
+              </a:spcAft>
+            </a:pPr>
+            <a:r>
+              <a:rPr sz="1500" b="0" i="0">
+                <a:solidFill>
+                  <a:srgbClr val="333A48"/>
+                </a:solidFill>
+                <a:latin typeface="IBM Plex Sans"/>
+                <a:ea typeface="IBM Plex Sans"/>
+                <a:cs typeface="IBM Plex Sans"/>
+              </a:rPr>
+              <a:t>one path follower with switches; a Newton corrector</a:t>
+            </a:r>
+          </a:p>
+        </p:txBody>
+      </p:sp>
+      <p:sp>
+        <p:nvSpPr>
+          <p:cNvPr id="18" name="Rounded Rectangle 17"/>
+          <p:cNvSpPr/>
+          <p:nvPr/>
+        </p:nvSpPr>
+        <p:spPr>
+          <a:xfrm>
+            <a:off x="6254496" y="3657600"/>
+            <a:ext cx="5120640" cy="1737360"/>
+          </a:xfrm>
+          <a:prstGeom prst="roundRect">
+            <a:avLst>
+              <a:gd name="adj" fmla="val 8000"/>
+            </a:avLst>
+          </a:prstGeom>
+          <a:solidFill>
+            <a:srgbClr val="F1EFEA"/>
+          </a:solidFill>
+          <a:ln>
+            <a:noFill/>
+          </a:ln>
+          <a:effectLst/>
+        </p:spPr>
+        <p:style>
+          <a:lnRef idx="1">
+            <a:schemeClr val="accent1"/>
+          </a:lnRef>
+          <a:fillRef idx="3">
+            <a:schemeClr val="accent1"/>
+          </a:fillRef>
+          <a:effectRef idx="2">
+            <a:schemeClr val="accent1"/>
+          </a:effectRef>
+          <a:fontRef idx="minor">
+            <a:schemeClr val="lt1"/>
+          </a:fontRef>
+        </p:style>
+        <p:txBody>
+          <a:bodyPr rtlCol="0" anchor="ctr"/>
+          <a:lstStyle/>
+          <a:p>
+            <a:pPr algn="ctr"/>
+            <a:endParaRPr/>
+          </a:p>
+        </p:txBody>
+      </p:sp>
+      <p:sp>
+        <p:nvSpPr>
+          <p:cNvPr id="19" name="Oval 18"/>
+          <p:cNvSpPr/>
+          <p:nvPr/>
+        </p:nvSpPr>
+        <p:spPr>
+          <a:xfrm>
+            <a:off x="6528816" y="3931920"/>
+            <a:ext cx="475488" cy="475488"/>
+          </a:xfrm>
+          <a:prstGeom prst="ellipse">
+            <a:avLst/>
+          </a:prstGeom>
+          <a:solidFill>
+            <a:srgbClr val="1F3A5F"/>
+          </a:solidFill>
+          <a:ln>
+            <a:noFill/>
+          </a:ln>
+          <a:effectLst/>
+        </p:spPr>
+        <p:style>
+          <a:lnRef idx="1">
+            <a:schemeClr val="accent1"/>
+          </a:lnRef>
+          <a:fillRef idx="3">
+            <a:schemeClr val="accent1"/>
+          </a:fillRef>
+          <a:effectRef idx="2">
+            <a:schemeClr val="accent1"/>
+          </a:effectRef>
+          <a:fontRef idx="minor">
+            <a:schemeClr val="lt1"/>
+          </a:fontRef>
+        </p:style>
+        <p:txBody>
+          <a:bodyPr lIns="0" tIns="0" rIns="0" bIns="0" rtlCol="0" anchor="ctr"/>
+          <a:lstStyle/>
+          <a:p>
+            <a:pPr algn="ctr"/>
+            <a:r>
+              <a:rPr sz="1600" b="1" i="0">
+                <a:solidFill>
+                  <a:srgbClr val="FFFFFF"/>
+                </a:solidFill>
+                <a:latin typeface="IBM Plex Sans"/>
+                <a:ea typeface="IBM Plex Sans"/>
+                <a:cs typeface="IBM Plex Sans"/>
+              </a:rPr>
+              <a:t>4</a:t>
+            </a:r>
+          </a:p>
+        </p:txBody>
+      </p:sp>
+      <p:sp>
+        <p:nvSpPr>
+          <p:cNvPr id="20" name="TextBox 19"/>
+          <p:cNvSpPr txBox="1"/>
+          <p:nvPr/>
+        </p:nvSpPr>
+        <p:spPr>
+          <a:xfrm>
+            <a:off x="7168896" y="3931920"/>
+            <a:ext cx="3977640" cy="457200"/>
+          </a:xfrm>
+          <a:prstGeom prst="rect">
+            <a:avLst/>
+          </a:prstGeom>
+          <a:noFill/>
+        </p:spPr>
+        <p:txBody>
+          <a:bodyPr wrap="square" lIns="0" tIns="0" rIns="0" bIns="0" anchor="t">
+            <a:spAutoFit/>
+          </a:bodyPr>
+          <a:lstStyle/>
+          <a:p>
+            <a:pPr algn="l">
+              <a:spcAft>
+                <a:spcPts val="800"/>
+              </a:spcAft>
+            </a:pPr>
+            <a:r>
+              <a:rPr sz="1900" b="1" i="0">
+                <a:solidFill>
+                  <a:srgbClr val="1F3A5F"/>
+                </a:solidFill>
+                <a:latin typeface="IBM Plex Sans"/>
+                <a:ea typeface="IBM Plex Sans"/>
+                <a:cs typeface="IBM Plex Sans"/>
+              </a:rPr>
+              <a:t>Spectrum of J</a:t>
+            </a:r>
+          </a:p>
+        </p:txBody>
+      </p:sp>
+      <p:sp>
+        <p:nvSpPr>
+          <p:cNvPr id="21" name="TextBox 20"/>
+          <p:cNvSpPr txBox="1"/>
+          <p:nvPr/>
+        </p:nvSpPr>
+        <p:spPr>
+          <a:xfrm>
+            <a:off x="7168896" y="4434840"/>
+            <a:ext cx="3977640" cy="822960"/>
+          </a:xfrm>
+          <a:prstGeom prst="rect">
+            <a:avLst/>
+          </a:prstGeom>
+          <a:noFill/>
+        </p:spPr>
+        <p:txBody>
+          <a:bodyPr wrap="square" lIns="0" tIns="0" rIns="0" bIns="0" anchor="t">
+            <a:spAutoFit/>
+          </a:bodyPr>
+          <a:lstStyle/>
+          <a:p>
+            <a:pPr algn="l">
+              <a:spcAft>
+                <a:spcPts val="800"/>
+              </a:spcAft>
+            </a:pPr>
+            <a:r>
+              <a:rPr sz="1500" b="0" i="0">
+                <a:solidFill>
+                  <a:srgbClr val="333A48"/>
+                </a:solidFill>
+                <a:latin typeface="IBM Plex Sans"/>
+                <a:ea typeface="IBM Plex Sans"/>
+                <a:cs typeface="IBM Plex Sans"/>
+              </a:rPr>
+              <a:t>power method and inverse iteration: why the shift works</a:t>
             </a:r>
           </a:p>
         </p:txBody>
@@ -2523,8 +3056,8 @@
 </p:sld>
 </file>
 
-<file path=ppt/slides/slide2.xml><?xml version="1.0" encoding="utf-8"?>
-<p:sld xmlns:a="http://schemas.openxmlformats.org/drawingml/2006/main" xmlns:p="http://schemas.openxmlformats.org/presentationml/2006/main" xmlns:r="http://schemas.openxmlformats.org/officeDocument/2006/relationships">
+<file path=ppt/slides/slide3.xml><?xml version="1.0" encoding="utf-8"?>
+<p:sld xmlns:a="http://schemas.openxmlformats.org/drawingml/2006/main" xmlns:r="http://schemas.openxmlformats.org/officeDocument/2006/relationships" xmlns:p="http://schemas.openxmlformats.org/presentationml/2006/main">
   <p:cSld>
     <p:bg>
       <p:bgPr>
@@ -2540,7 +3073,14 @@
         <p:cNvGrpSpPr/>
         <p:nvPr/>
       </p:nvGrpSpPr>
-      <p:grpSpPr/>
+      <p:grpSpPr>
+        <a:xfrm>
+          <a:off x="0" y="0"/>
+          <a:ext cx="0" cy="0"/>
+          <a:chOff x="0" y="0"/>
+          <a:chExt cx="0" cy="0"/>
+        </a:xfrm>
+      </p:grpSpPr>
       <p:sp>
         <p:nvSpPr>
           <p:cNvPr id="2" name="TextBox 1"/>
@@ -2558,7 +3098,7 @@
           <a:noFill/>
         </p:spPr>
         <p:txBody>
-          <a:bodyPr wrap="square" lIns="0" rIns="0" tIns="0" bIns="0" anchor="t">
+          <a:bodyPr wrap="square" lIns="0" tIns="0" rIns="0" bIns="0" anchor="t">
             <a:spAutoFit/>
           </a:bodyPr>
           <a:lstStyle/>
@@ -2577,7 +3117,7 @@
                 <a:ea typeface="IBM Plex Sans"/>
                 <a:cs typeface="IBM Plex Sans"/>
               </a:rPr>
-              <a:t>My part of the project</a:t>
+              <a:t>The fixed-point homotopy</a:t>
             </a:r>
           </a:p>
         </p:txBody>
@@ -2591,7 +3131,7 @@
           <p:nvPr/>
         </p:nvPicPr>
         <p:blipFill>
-          <a:blip r:embed="rId2"/>
+          <a:blip r:embed="rId3"/>
           <a:stretch>
             <a:fillRect/>
           </a:stretch>
@@ -2623,7 +3163,7 @@
           <a:noFill/>
         </p:spPr>
         <p:txBody>
-          <a:bodyPr wrap="square" lIns="0" rIns="0" tIns="0" bIns="0" anchor="t">
+          <a:bodyPr wrap="square" lIns="0" tIns="0" rIns="0" bIns="0" anchor="t">
             <a:spAutoFit/>
           </a:bodyPr>
           <a:lstStyle/>
@@ -2664,7 +3204,7 @@
           <a:noFill/>
         </p:spPr>
         <p:txBody>
-          <a:bodyPr wrap="square" lIns="0" rIns="0" tIns="0" bIns="0" anchor="t">
+          <a:bodyPr wrap="square" lIns="0" tIns="0" rIns="0" bIns="0" anchor="t">
             <a:spAutoFit/>
           </a:bodyPr>
           <a:lstStyle/>
@@ -2683,29 +3223,53 @@
                 <a:ea typeface="IBM Plex Sans"/>
                 <a:cs typeface="IBM Plex Sans"/>
               </a:rPr>
-              <a:t>2</a:t>
-            </a:r>
-          </a:p>
-        </p:txBody>
-      </p:sp>
-      <p:sp>
-        <p:nvSpPr>
-          <p:cNvPr id="6" name="Rounded Rectangle 5"/>
+              <a:t>3</a:t>
+            </a:r>
+          </a:p>
+        </p:txBody>
+      </p:sp>
+      <p:pic>
+        <p:nvPicPr>
+          <p:cNvPr id="6" name="Picture 5" descr="a_G.png"/>
+          <p:cNvPicPr>
+            <a:picLocks noChangeAspect="1"/>
+          </p:cNvPicPr>
+          <p:nvPr/>
+        </p:nvPicPr>
+        <p:blipFill>
+          <a:blip r:embed="rId4"/>
+          <a:stretch>
+            <a:fillRect/>
+          </a:stretch>
+        </p:blipFill>
+        <p:spPr>
+          <a:xfrm>
+            <a:off x="813816" y="1508760"/>
+            <a:ext cx="5471160" cy="432816"/>
+          </a:xfrm>
+          <a:prstGeom prst="rect">
+            <a:avLst/>
+          </a:prstGeom>
+        </p:spPr>
+      </p:pic>
+      <p:sp>
+        <p:nvSpPr>
+          <p:cNvPr id="7" name="Rounded Rectangle 6"/>
           <p:cNvSpPr/>
           <p:nvPr/>
         </p:nvSpPr>
         <p:spPr>
           <a:xfrm>
-            <a:off x="813816" y="1600200"/>
-            <a:ext cx="5120640" cy="1737360"/>
+            <a:off x="813816" y="2377440"/>
+            <a:ext cx="2926080" cy="731520"/>
           </a:xfrm>
           <a:prstGeom prst="roundRect">
             <a:avLst>
-              <a:gd name="adj" fmla="val 8000"/>
+              <a:gd name="adj" fmla="val 18000"/>
             </a:avLst>
           </a:prstGeom>
           <a:solidFill>
-            <a:srgbClr val="F1EFEA"/>
+            <a:srgbClr val="1F3A5F"/>
           </a:solidFill>
           <a:ln>
             <a:noFill/>
@@ -2727,29 +3291,40 @@
           </a:fontRef>
         </p:style>
         <p:txBody>
-          <a:bodyPr rtlCol="0" anchor="ctr"/>
+          <a:bodyPr wrap="square" lIns="54864" rIns="54864" rtlCol="0" anchor="ctr"/>
           <a:lstStyle/>
           <a:p>
             <a:pPr algn="ctr"/>
-          </a:p>
-        </p:txBody>
-      </p:sp>
-      <p:sp>
-        <p:nvSpPr>
-          <p:cNvPr id="7" name="Oval 6"/>
+            <a:r>
+              <a:rPr sz="1500" b="1" i="0">
+                <a:solidFill>
+                  <a:srgbClr val="FFFFFF"/>
+                </a:solidFill>
+                <a:latin typeface="IBM Plex Sans"/>
+                <a:ea typeface="IBM Plex Sans"/>
+                <a:cs typeface="IBM Plex Sans"/>
+              </a:rPr>
+              <a:t>t = 0:  root is x₀</a:t>
+            </a:r>
+          </a:p>
+        </p:txBody>
+      </p:sp>
+      <p:sp>
+        <p:nvSpPr>
+          <p:cNvPr id="8" name="Right Arrow 7"/>
           <p:cNvSpPr/>
           <p:nvPr/>
         </p:nvSpPr>
         <p:spPr>
           <a:xfrm>
-            <a:off x="1088136" y="1874520"/>
-            <a:ext cx="475488" cy="475488"/>
-          </a:xfrm>
-          <a:prstGeom prst="ellipse">
+            <a:off x="3803904" y="2606040"/>
+            <a:ext cx="420623" cy="274320"/>
+          </a:xfrm>
+          <a:prstGeom prst="rightArrow">
             <a:avLst/>
           </a:prstGeom>
           <a:solidFill>
-            <a:srgbClr val="1F3A5F"/>
+            <a:srgbClr val="A8B0BB"/>
           </a:solidFill>
           <a:ln>
             <a:noFill/>
@@ -2771,120 +3346,28 @@
           </a:fontRef>
         </p:style>
         <p:txBody>
-          <a:bodyPr rtlCol="0" anchor="ctr" lIns="0" rIns="0" tIns="0" bIns="0"/>
+          <a:bodyPr rtlCol="0" anchor="ctr"/>
           <a:lstStyle/>
           <a:p>
             <a:pPr algn="ctr"/>
-            <a:r>
-              <a:rPr sz="1600" b="1" i="0">
-                <a:solidFill>
-                  <a:srgbClr val="FFFFFF"/>
-                </a:solidFill>
-                <a:latin typeface="IBM Plex Sans"/>
-                <a:ea typeface="IBM Plex Sans"/>
-                <a:cs typeface="IBM Plex Sans"/>
-              </a:rPr>
-              <a:t>1</a:t>
-            </a:r>
-          </a:p>
-        </p:txBody>
-      </p:sp>
-      <p:sp>
-        <p:nvSpPr>
-          <p:cNvPr id="8" name="TextBox 7"/>
-          <p:cNvSpPr txBox="1"/>
-          <p:nvPr/>
-        </p:nvSpPr>
-        <p:spPr>
-          <a:xfrm>
-            <a:off x="1728216" y="1874520"/>
-            <a:ext cx="3977640" cy="457200"/>
-          </a:xfrm>
-          <a:prstGeom prst="rect">
-            <a:avLst/>
-          </a:prstGeom>
-          <a:noFill/>
-        </p:spPr>
-        <p:txBody>
-          <a:bodyPr wrap="square" lIns="0" rIns="0" tIns="0" bIns="0" anchor="t">
-            <a:spAutoFit/>
-          </a:bodyPr>
-          <a:lstStyle/>
-          <a:p>
-            <a:pPr algn="l">
-              <a:spcAft>
-                <a:spcPts val="800"/>
-              </a:spcAft>
-            </a:pPr>
-            <a:r>
-              <a:rPr sz="1900" b="1" i="0">
-                <a:solidFill>
-                  <a:srgbClr val="1F3A5F"/>
-                </a:solidFill>
-                <a:latin typeface="IBM Plex Sans"/>
-                <a:ea typeface="IBM Plex Sans"/>
-                <a:cs typeface="IBM Plex Sans"/>
-              </a:rPr>
-              <a:t>The homotopy</a:t>
-            </a:r>
-          </a:p>
-        </p:txBody>
-      </p:sp>
-      <p:sp>
-        <p:nvSpPr>
-          <p:cNvPr id="9" name="TextBox 8"/>
-          <p:cNvSpPr txBox="1"/>
-          <p:nvPr/>
-        </p:nvSpPr>
-        <p:spPr>
-          <a:xfrm>
-            <a:off x="1728216" y="2377440"/>
-            <a:ext cx="3977640" cy="822960"/>
-          </a:xfrm>
-          <a:prstGeom prst="rect">
-            <a:avLst/>
-          </a:prstGeom>
-          <a:noFill/>
-        </p:spPr>
-        <p:txBody>
-          <a:bodyPr wrap="square" lIns="0" rIns="0" tIns="0" bIns="0" anchor="t">
-            <a:spAutoFit/>
-          </a:bodyPr>
-          <a:lstStyle/>
-          <a:p>
-            <a:pPr algn="l">
-              <a:spcAft>
-                <a:spcPts val="800"/>
-              </a:spcAft>
-            </a:pPr>
-            <a:r>
-              <a:rPr sz="1500" b="0" i="0">
-                <a:solidFill>
-                  <a:srgbClr val="333A48"/>
-                </a:solidFill>
-                <a:latin typeface="IBM Plex Sans"/>
-                <a:ea typeface="IBM Plex Sans"/>
-                <a:cs typeface="IBM Plex Sans"/>
-              </a:rPr>
-              <a:t>G(x, t), the ODE, and the FE, RK2 and BE integrators</a:t>
-            </a:r>
-          </a:p>
-        </p:txBody>
-      </p:sp>
-      <p:sp>
-        <p:nvSpPr>
-          <p:cNvPr id="10" name="Rounded Rectangle 9"/>
+            <a:endParaRPr/>
+          </a:p>
+        </p:txBody>
+      </p:sp>
+      <p:sp>
+        <p:nvSpPr>
+          <p:cNvPr id="9" name="Rounded Rectangle 8"/>
           <p:cNvSpPr/>
           <p:nvPr/>
         </p:nvSpPr>
         <p:spPr>
           <a:xfrm>
-            <a:off x="6254496" y="1600200"/>
-            <a:ext cx="5120640" cy="1737360"/>
+            <a:off x="4288536" y="2377440"/>
+            <a:ext cx="2926080" cy="731520"/>
           </a:xfrm>
           <a:prstGeom prst="roundRect">
             <a:avLst>
-              <a:gd name="adj" fmla="val 8000"/>
+              <a:gd name="adj" fmla="val 18000"/>
             </a:avLst>
           </a:prstGeom>
           <a:solidFill>
@@ -2910,29 +3393,40 @@
           </a:fontRef>
         </p:style>
         <p:txBody>
-          <a:bodyPr rtlCol="0" anchor="ctr"/>
+          <a:bodyPr wrap="square" lIns="54864" rIns="54864" rtlCol="0" anchor="ctr"/>
           <a:lstStyle/>
           <a:p>
             <a:pPr algn="ctr"/>
-          </a:p>
-        </p:txBody>
-      </p:sp>
-      <p:sp>
-        <p:nvSpPr>
-          <p:cNvPr id="11" name="Oval 10"/>
+            <a:r>
+              <a:rPr sz="1500" b="1" i="0">
+                <a:solidFill>
+                  <a:srgbClr val="1F3A5F"/>
+                </a:solidFill>
+                <a:latin typeface="IBM Plex Sans"/>
+                <a:ea typeface="IBM Plex Sans"/>
+                <a:cs typeface="IBM Plex Sans"/>
+              </a:rPr>
+              <a:t>smooth path x(t)</a:t>
+            </a:r>
+          </a:p>
+        </p:txBody>
+      </p:sp>
+      <p:sp>
+        <p:nvSpPr>
+          <p:cNvPr id="10" name="Right Arrow 9"/>
           <p:cNvSpPr/>
           <p:nvPr/>
         </p:nvSpPr>
         <p:spPr>
           <a:xfrm>
-            <a:off x="6528816" y="1874520"/>
-            <a:ext cx="475488" cy="475488"/>
-          </a:xfrm>
-          <a:prstGeom prst="ellipse">
+            <a:off x="7278624" y="2606040"/>
+            <a:ext cx="420623" cy="274320"/>
+          </a:xfrm>
+          <a:prstGeom prst="rightArrow">
             <a:avLst/>
           </a:prstGeom>
           <a:solidFill>
-            <a:srgbClr val="1F3A5F"/>
+            <a:srgbClr val="A8B0BB"/>
           </a:solidFill>
           <a:ln>
             <a:noFill/>
@@ -2954,124 +3448,32 @@
           </a:fontRef>
         </p:style>
         <p:txBody>
-          <a:bodyPr rtlCol="0" anchor="ctr" lIns="0" rIns="0" tIns="0" bIns="0"/>
+          <a:bodyPr rtlCol="0" anchor="ctr"/>
           <a:lstStyle/>
           <a:p>
             <a:pPr algn="ctr"/>
-            <a:r>
-              <a:rPr sz="1600" b="1" i="0">
-                <a:solidFill>
-                  <a:srgbClr val="FFFFFF"/>
-                </a:solidFill>
-                <a:latin typeface="IBM Plex Sans"/>
-                <a:ea typeface="IBM Plex Sans"/>
-                <a:cs typeface="IBM Plex Sans"/>
-              </a:rPr>
-              <a:t>2</a:t>
-            </a:r>
-          </a:p>
-        </p:txBody>
-      </p:sp>
-      <p:sp>
-        <p:nvSpPr>
-          <p:cNvPr id="12" name="TextBox 11"/>
-          <p:cNvSpPr txBox="1"/>
-          <p:nvPr/>
-        </p:nvSpPr>
-        <p:spPr>
-          <a:xfrm>
-            <a:off x="7168896" y="1874520"/>
-            <a:ext cx="3977640" cy="457200"/>
-          </a:xfrm>
-          <a:prstGeom prst="rect">
-            <a:avLst/>
-          </a:prstGeom>
-          <a:noFill/>
-        </p:spPr>
-        <p:txBody>
-          <a:bodyPr wrap="square" lIns="0" rIns="0" tIns="0" bIns="0" anchor="t">
-            <a:spAutoFit/>
-          </a:bodyPr>
-          <a:lstStyle/>
-          <a:p>
-            <a:pPr algn="l">
-              <a:spcAft>
-                <a:spcPts val="800"/>
-              </a:spcAft>
-            </a:pPr>
-            <a:r>
-              <a:rPr sz="1900" b="1" i="0">
-                <a:solidFill>
-                  <a:srgbClr val="1F3A5F"/>
-                </a:solidFill>
-                <a:latin typeface="IBM Plex Sans"/>
-                <a:ea typeface="IBM Plex Sans"/>
-                <a:cs typeface="IBM Plex Sans"/>
-              </a:rPr>
-              <a:t>Paper results</a:t>
-            </a:r>
-          </a:p>
-        </p:txBody>
-      </p:sp>
-      <p:sp>
-        <p:nvSpPr>
-          <p:cNvPr id="13" name="TextBox 12"/>
-          <p:cNvSpPr txBox="1"/>
-          <p:nvPr/>
-        </p:nvSpPr>
-        <p:spPr>
-          <a:xfrm>
-            <a:off x="7168896" y="2377440"/>
-            <a:ext cx="3977640" cy="822960"/>
-          </a:xfrm>
-          <a:prstGeom prst="rect">
-            <a:avLst/>
-          </a:prstGeom>
-          <a:noFill/>
-        </p:spPr>
-        <p:txBody>
-          <a:bodyPr wrap="square" lIns="0" rIns="0" tIns="0" bIns="0" anchor="t">
-            <a:spAutoFit/>
-          </a:bodyPr>
-          <a:lstStyle/>
-          <a:p>
-            <a:pPr algn="l">
-              <a:spcAft>
-                <a:spcPts val="800"/>
-              </a:spcAft>
-            </a:pPr>
-            <a:r>
-              <a:rPr sz="1500" b="0" i="0">
-                <a:solidFill>
-                  <a:srgbClr val="333A48"/>
-                </a:solidFill>
-                <a:latin typeface="IBM Plex Sans"/>
-                <a:ea typeface="IBM Plex Sans"/>
-                <a:cs typeface="IBM Plex Sans"/>
-              </a:rPr>
-              <a:t>Figures 1, 2 and 4, and the first-step study of Section 4.2.1</a:t>
-            </a:r>
-          </a:p>
-        </p:txBody>
-      </p:sp>
-      <p:sp>
-        <p:nvSpPr>
-          <p:cNvPr id="14" name="Rounded Rectangle 13"/>
+            <a:endParaRPr/>
+          </a:p>
+        </p:txBody>
+      </p:sp>
+      <p:sp>
+        <p:nvSpPr>
+          <p:cNvPr id="11" name="Rounded Rectangle 10"/>
           <p:cNvSpPr/>
           <p:nvPr/>
         </p:nvSpPr>
         <p:spPr>
           <a:xfrm>
-            <a:off x="813816" y="3657600"/>
-            <a:ext cx="5120640" cy="1737360"/>
+            <a:off x="7763256" y="2377440"/>
+            <a:ext cx="2926080" cy="731520"/>
           </a:xfrm>
           <a:prstGeom prst="roundRect">
             <a:avLst>
-              <a:gd name="adj" fmla="val 8000"/>
+              <a:gd name="adj" fmla="val 18000"/>
             </a:avLst>
           </a:prstGeom>
           <a:solidFill>
-            <a:srgbClr val="F1EFEA"/>
+            <a:srgbClr val="1F3A5F"/>
           </a:solidFill>
           <a:ln>
             <a:noFill/>
@@ -3093,56 +3495,12 @@
           </a:fontRef>
         </p:style>
         <p:txBody>
-          <a:bodyPr rtlCol="0" anchor="ctr"/>
+          <a:bodyPr wrap="square" lIns="54864" rIns="54864" rtlCol="0" anchor="ctr"/>
           <a:lstStyle/>
           <a:p>
             <a:pPr algn="ctr"/>
-          </a:p>
-        </p:txBody>
-      </p:sp>
-      <p:sp>
-        <p:nvSpPr>
-          <p:cNvPr id="15" name="Oval 14"/>
-          <p:cNvSpPr/>
-          <p:nvPr/>
-        </p:nvSpPr>
-        <p:spPr>
-          <a:xfrm>
-            <a:off x="1088136" y="3931920"/>
-            <a:ext cx="475488" cy="475488"/>
-          </a:xfrm>
-          <a:prstGeom prst="ellipse">
-            <a:avLst/>
-          </a:prstGeom>
-          <a:solidFill>
-            <a:srgbClr val="1F3A5F"/>
-          </a:solidFill>
-          <a:ln>
-            <a:noFill/>
-          </a:ln>
-          <a:effectLst/>
-        </p:spPr>
-        <p:style>
-          <a:lnRef idx="1">
-            <a:schemeClr val="accent1"/>
-          </a:lnRef>
-          <a:fillRef idx="3">
-            <a:schemeClr val="accent1"/>
-          </a:fillRef>
-          <a:effectRef idx="2">
-            <a:schemeClr val="accent1"/>
-          </a:effectRef>
-          <a:fontRef idx="minor">
-            <a:schemeClr val="lt1"/>
-          </a:fontRef>
-        </p:style>
-        <p:txBody>
-          <a:bodyPr rtlCol="0" anchor="ctr" lIns="0" rIns="0" tIns="0" bIns="0"/>
-          <a:lstStyle/>
-          <a:p>
-            <a:pPr algn="ctr"/>
-            <a:r>
-              <a:rPr sz="1600" b="1" i="0">
+            <a:r>
+              <a:rPr sz="1500" b="1" i="0">
                 <a:solidFill>
                   <a:srgbClr val="FFFFFF"/>
                 </a:solidFill>
@@ -3150,21 +3508,45 @@
                 <a:ea typeface="IBM Plex Sans"/>
                 <a:cs typeface="IBM Plex Sans"/>
               </a:rPr>
-              <a:t>3</a:t>
-            </a:r>
-          </a:p>
-        </p:txBody>
-      </p:sp>
-      <p:sp>
-        <p:nvSpPr>
-          <p:cNvPr id="16" name="TextBox 15"/>
+              <a:t>t = 1:  g(x) = 0</a:t>
+            </a:r>
+          </a:p>
+        </p:txBody>
+      </p:sp>
+      <p:pic>
+        <p:nvPicPr>
+          <p:cNvPr id="12" name="Picture 11" descr="a_ode.png"/>
+          <p:cNvPicPr>
+            <a:picLocks noChangeAspect="1"/>
+          </p:cNvPicPr>
+          <p:nvPr/>
+        </p:nvPicPr>
+        <p:blipFill>
+          <a:blip r:embed="rId5"/>
+          <a:stretch>
+            <a:fillRect/>
+          </a:stretch>
+        </p:blipFill>
+        <p:spPr>
+          <a:xfrm>
+            <a:off x="813816" y="3611880"/>
+            <a:ext cx="8827008" cy="420624"/>
+          </a:xfrm>
+          <a:prstGeom prst="rect">
+            <a:avLst/>
+          </a:prstGeom>
+        </p:spPr>
+      </p:pic>
+      <p:sp>
+        <p:nvSpPr>
+          <p:cNvPr id="13" name="TextBox 12"/>
           <p:cNvSpPr txBox="1"/>
           <p:nvPr/>
         </p:nvSpPr>
         <p:spPr>
           <a:xfrm>
-            <a:off x="1728216" y="3931920"/>
-            <a:ext cx="3977640" cy="457200"/>
+            <a:off x="813816" y="4617720"/>
+            <a:ext cx="10561320" cy="457200"/>
           </a:xfrm>
           <a:prstGeom prst="rect">
             <a:avLst/>
@@ -3172,7 +3554,7 @@
           <a:noFill/>
         </p:spPr>
         <p:txBody>
-          <a:bodyPr wrap="square" lIns="0" rIns="0" tIns="0" bIns="0" anchor="t">
+          <a:bodyPr wrap="square" lIns="0" tIns="0" rIns="0" bIns="0" anchor="t">
             <a:spAutoFit/>
           </a:bodyPr>
           <a:lstStyle/>
@@ -3183,48 +3565,7 @@
               </a:spcAft>
             </a:pPr>
             <a:r>
-              <a:rPr sz="1900" b="1" i="0">
-                <a:solidFill>
-                  <a:srgbClr val="1F3A5F"/>
-                </a:solidFill>
-                <a:latin typeface="IBM Plex Sans"/>
-                <a:ea typeface="IBM Plex Sans"/>
-                <a:cs typeface="IBM Plex Sans"/>
-              </a:rPr>
-              <a:t>solve() and the corrector</a:t>
-            </a:r>
-          </a:p>
-        </p:txBody>
-      </p:sp>
-      <p:sp>
-        <p:nvSpPr>
-          <p:cNvPr id="17" name="TextBox 16"/>
-          <p:cNvSpPr txBox="1"/>
-          <p:nvPr/>
-        </p:nvSpPr>
-        <p:spPr>
-          <a:xfrm>
-            <a:off x="1728216" y="4434840"/>
-            <a:ext cx="3977640" cy="822960"/>
-          </a:xfrm>
-          <a:prstGeom prst="rect">
-            <a:avLst/>
-          </a:prstGeom>
-          <a:noFill/>
-        </p:spPr>
-        <p:txBody>
-          <a:bodyPr wrap="square" lIns="0" rIns="0" tIns="0" bIns="0" anchor="t">
-            <a:spAutoFit/>
-          </a:bodyPr>
-          <a:lstStyle/>
-          <a:p>
-            <a:pPr algn="l">
-              <a:spcAft>
-                <a:spcPts val="800"/>
-              </a:spcAft>
-            </a:pPr>
-            <a:r>
-              <a:rPr sz="1500" b="0" i="0">
+              <a:rPr sz="1600" b="0" i="0">
                 <a:solidFill>
                   <a:srgbClr val="333A48"/>
                 </a:solidFill>
@@ -3232,190 +3573,7 @@
                 <a:ea typeface="IBM Plex Sans"/>
                 <a:cs typeface="IBM Plex Sans"/>
               </a:rPr>
-              <a:t>one path follower with switches; a Newton corrector</a:t>
-            </a:r>
-          </a:p>
-        </p:txBody>
-      </p:sp>
-      <p:sp>
-        <p:nvSpPr>
-          <p:cNvPr id="18" name="Rounded Rectangle 17"/>
-          <p:cNvSpPr/>
-          <p:nvPr/>
-        </p:nvSpPr>
-        <p:spPr>
-          <a:xfrm>
-            <a:off x="6254496" y="3657600"/>
-            <a:ext cx="5120640" cy="1737360"/>
-          </a:xfrm>
-          <a:prstGeom prst="roundRect">
-            <a:avLst>
-              <a:gd name="adj" fmla="val 8000"/>
-            </a:avLst>
-          </a:prstGeom>
-          <a:solidFill>
-            <a:srgbClr val="F1EFEA"/>
-          </a:solidFill>
-          <a:ln>
-            <a:noFill/>
-          </a:ln>
-          <a:effectLst/>
-        </p:spPr>
-        <p:style>
-          <a:lnRef idx="1">
-            <a:schemeClr val="accent1"/>
-          </a:lnRef>
-          <a:fillRef idx="3">
-            <a:schemeClr val="accent1"/>
-          </a:fillRef>
-          <a:effectRef idx="2">
-            <a:schemeClr val="accent1"/>
-          </a:effectRef>
-          <a:fontRef idx="minor">
-            <a:schemeClr val="lt1"/>
-          </a:fontRef>
-        </p:style>
-        <p:txBody>
-          <a:bodyPr rtlCol="0" anchor="ctr"/>
-          <a:lstStyle/>
-          <a:p>
-            <a:pPr algn="ctr"/>
-          </a:p>
-        </p:txBody>
-      </p:sp>
-      <p:sp>
-        <p:nvSpPr>
-          <p:cNvPr id="19" name="Oval 18"/>
-          <p:cNvSpPr/>
-          <p:nvPr/>
-        </p:nvSpPr>
-        <p:spPr>
-          <a:xfrm>
-            <a:off x="6528816" y="3931920"/>
-            <a:ext cx="475488" cy="475488"/>
-          </a:xfrm>
-          <a:prstGeom prst="ellipse">
-            <a:avLst/>
-          </a:prstGeom>
-          <a:solidFill>
-            <a:srgbClr val="1F3A5F"/>
-          </a:solidFill>
-          <a:ln>
-            <a:noFill/>
-          </a:ln>
-          <a:effectLst/>
-        </p:spPr>
-        <p:style>
-          <a:lnRef idx="1">
-            <a:schemeClr val="accent1"/>
-          </a:lnRef>
-          <a:fillRef idx="3">
-            <a:schemeClr val="accent1"/>
-          </a:fillRef>
-          <a:effectRef idx="2">
-            <a:schemeClr val="accent1"/>
-          </a:effectRef>
-          <a:fontRef idx="minor">
-            <a:schemeClr val="lt1"/>
-          </a:fontRef>
-        </p:style>
-        <p:txBody>
-          <a:bodyPr rtlCol="0" anchor="ctr" lIns="0" rIns="0" tIns="0" bIns="0"/>
-          <a:lstStyle/>
-          <a:p>
-            <a:pPr algn="ctr"/>
-            <a:r>
-              <a:rPr sz="1600" b="1" i="0">
-                <a:solidFill>
-                  <a:srgbClr val="FFFFFF"/>
-                </a:solidFill>
-                <a:latin typeface="IBM Plex Sans"/>
-                <a:ea typeface="IBM Plex Sans"/>
-                <a:cs typeface="IBM Plex Sans"/>
-              </a:rPr>
-              <a:t>4</a:t>
-            </a:r>
-          </a:p>
-        </p:txBody>
-      </p:sp>
-      <p:sp>
-        <p:nvSpPr>
-          <p:cNvPr id="20" name="TextBox 19"/>
-          <p:cNvSpPr txBox="1"/>
-          <p:nvPr/>
-        </p:nvSpPr>
-        <p:spPr>
-          <a:xfrm>
-            <a:off x="7168896" y="3931920"/>
-            <a:ext cx="3977640" cy="457200"/>
-          </a:xfrm>
-          <a:prstGeom prst="rect">
-            <a:avLst/>
-          </a:prstGeom>
-          <a:noFill/>
-        </p:spPr>
-        <p:txBody>
-          <a:bodyPr wrap="square" lIns="0" rIns="0" tIns="0" bIns="0" anchor="t">
-            <a:spAutoFit/>
-          </a:bodyPr>
-          <a:lstStyle/>
-          <a:p>
-            <a:pPr algn="l">
-              <a:spcAft>
-                <a:spcPts val="800"/>
-              </a:spcAft>
-            </a:pPr>
-            <a:r>
-              <a:rPr sz="1900" b="1" i="0">
-                <a:solidFill>
-                  <a:srgbClr val="1F3A5F"/>
-                </a:solidFill>
-                <a:latin typeface="IBM Plex Sans"/>
-                <a:ea typeface="IBM Plex Sans"/>
-                <a:cs typeface="IBM Plex Sans"/>
-              </a:rPr>
-              <a:t>Spectrum of J</a:t>
-            </a:r>
-          </a:p>
-        </p:txBody>
-      </p:sp>
-      <p:sp>
-        <p:nvSpPr>
-          <p:cNvPr id="21" name="TextBox 20"/>
-          <p:cNvSpPr txBox="1"/>
-          <p:nvPr/>
-        </p:nvSpPr>
-        <p:spPr>
-          <a:xfrm>
-            <a:off x="7168896" y="4434840"/>
-            <a:ext cx="3977640" cy="822960"/>
-          </a:xfrm>
-          <a:prstGeom prst="rect">
-            <a:avLst/>
-          </a:prstGeom>
-          <a:noFill/>
-        </p:spPr>
-        <p:txBody>
-          <a:bodyPr wrap="square" lIns="0" rIns="0" tIns="0" bIns="0" anchor="t">
-            <a:spAutoFit/>
-          </a:bodyPr>
-          <a:lstStyle/>
-          <a:p>
-            <a:pPr algn="l">
-              <a:spcAft>
-                <a:spcPts val="800"/>
-              </a:spcAft>
-            </a:pPr>
-            <a:r>
-              <a:rPr sz="1500" b="0" i="0">
-                <a:solidFill>
-                  <a:srgbClr val="333A48"/>
-                </a:solidFill>
-                <a:latin typeface="IBM Plex Sans"/>
-                <a:ea typeface="IBM Plex Sans"/>
-                <a:cs typeface="IBM Plex Sans"/>
-              </a:rPr>
-              <a:t>power method and inverse iteration: why the shift works</a:t>
+              <a:t>Root finding becomes an initial value problem. Each slope costs one LU.</a:t>
             </a:r>
           </a:p>
         </p:txBody>
@@ -3428,8 +3586,8 @@
 </p:sld>
 </file>
 
-<file path=ppt/slides/slide3.xml><?xml version="1.0" encoding="utf-8"?>
-<p:sld xmlns:a="http://schemas.openxmlformats.org/drawingml/2006/main" xmlns:p="http://schemas.openxmlformats.org/presentationml/2006/main" xmlns:r="http://schemas.openxmlformats.org/officeDocument/2006/relationships">
+<file path=ppt/slides/slide4.xml><?xml version="1.0" encoding="utf-8"?>
+<p:sld xmlns:a="http://schemas.openxmlformats.org/drawingml/2006/main" xmlns:r="http://schemas.openxmlformats.org/officeDocument/2006/relationships" xmlns:p="http://schemas.openxmlformats.org/presentationml/2006/main">
   <p:cSld>
     <p:bg>
       <p:bgPr>
@@ -3445,7 +3603,14 @@
         <p:cNvGrpSpPr/>
         <p:nvPr/>
       </p:nvGrpSpPr>
-      <p:grpSpPr/>
+      <p:grpSpPr>
+        <a:xfrm>
+          <a:off x="0" y="0"/>
+          <a:ext cx="0" cy="0"/>
+          <a:chOff x="0" y="0"/>
+          <a:chExt cx="0" cy="0"/>
+        </a:xfrm>
+      </p:grpSpPr>
       <p:sp>
         <p:nvSpPr>
           <p:cNvPr id="2" name="TextBox 1"/>
@@ -3463,7 +3628,7 @@
           <a:noFill/>
         </p:spPr>
         <p:txBody>
-          <a:bodyPr wrap="square" lIns="0" rIns="0" tIns="0" bIns="0" anchor="t">
+          <a:bodyPr wrap="square" lIns="0" tIns="0" rIns="0" bIns="0" anchor="t">
             <a:spAutoFit/>
           </a:bodyPr>
           <a:lstStyle/>
@@ -3482,7 +3647,7 @@
                 <a:ea typeface="IBM Plex Sans"/>
                 <a:cs typeface="IBM Plex Sans"/>
               </a:rPr>
-              <a:t>The fixed-point homotopy</a:t>
+              <a:t>The first step is a shifted Newton step</a:t>
             </a:r>
           </a:p>
         </p:txBody>
@@ -3490,112 +3655,6 @@
       <p:pic>
         <p:nvPicPr>
           <p:cNvPr id="3" name="Picture 2" descr="image.png"/>
-          <p:cNvPicPr>
-            <a:picLocks noChangeAspect="1"/>
-          </p:cNvPicPr>
-          <p:nvPr/>
-        </p:nvPicPr>
-        <p:blipFill>
-          <a:blip r:embed="rId2"/>
-          <a:stretch>
-            <a:fillRect/>
-          </a:stretch>
-        </p:blipFill>
-        <p:spPr>
-          <a:xfrm>
-            <a:off x="812800" y="1221741"/>
-            <a:ext cx="10566400" cy="20320"/>
-          </a:xfrm>
-          <a:prstGeom prst="rect">
-            <a:avLst/>
-          </a:prstGeom>
-        </p:spPr>
-      </p:pic>
-      <p:sp>
-        <p:nvSpPr>
-          <p:cNvPr id="4" name="TextBox 3"/>
-          <p:cNvSpPr txBox="1"/>
-          <p:nvPr/>
-        </p:nvSpPr>
-        <p:spPr>
-          <a:xfrm>
-            <a:off x="813816" y="6236208"/>
-            <a:ext cx="7845552" cy="237744"/>
-          </a:xfrm>
-          <a:prstGeom prst="rect">
-            <a:avLst/>
-          </a:prstGeom>
-          <a:noFill/>
-        </p:spPr>
-        <p:txBody>
-          <a:bodyPr wrap="square" lIns="0" rIns="0" tIns="0" bIns="0" anchor="t">
-            <a:spAutoFit/>
-          </a:bodyPr>
-          <a:lstStyle/>
-          <a:p>
-            <a:pPr algn="l">
-              <a:spcAft>
-                <a:spcPts val="800"/>
-              </a:spcAft>
-            </a:pPr>
-            <a:r>
-              <a:rPr sz="1200" b="0" i="0">
-                <a:solidFill>
-                  <a:srgbClr val="6B7280"/>
-                </a:solidFill>
-                <a:latin typeface="IBM Plex Sans"/>
-                <a:ea typeface="IBM Plex Sans"/>
-                <a:cs typeface="IBM Plex Sans"/>
-              </a:rPr>
-              <a:t>Apurbo's part · Lima-Silva &amp; Freitas (2024): reproduction and improvements</a:t>
-            </a:r>
-          </a:p>
-        </p:txBody>
-      </p:sp>
-      <p:sp>
-        <p:nvSpPr>
-          <p:cNvPr id="5" name="TextBox 4"/>
-          <p:cNvSpPr txBox="1"/>
-          <p:nvPr/>
-        </p:nvSpPr>
-        <p:spPr>
-          <a:xfrm>
-            <a:off x="10058400" y="6236208"/>
-            <a:ext cx="1316736" cy="237744"/>
-          </a:xfrm>
-          <a:prstGeom prst="rect">
-            <a:avLst/>
-          </a:prstGeom>
-          <a:noFill/>
-        </p:spPr>
-        <p:txBody>
-          <a:bodyPr wrap="square" lIns="0" rIns="0" tIns="0" bIns="0" anchor="t">
-            <a:spAutoFit/>
-          </a:bodyPr>
-          <a:lstStyle/>
-          <a:p>
-            <a:pPr algn="r">
-              <a:spcAft>
-                <a:spcPts val="800"/>
-              </a:spcAft>
-            </a:pPr>
-            <a:r>
-              <a:rPr sz="1200" b="0" i="0">
-                <a:solidFill>
-                  <a:srgbClr val="6B7280"/>
-                </a:solidFill>
-                <a:latin typeface="IBM Plex Sans"/>
-                <a:ea typeface="IBM Plex Sans"/>
-                <a:cs typeface="IBM Plex Sans"/>
-              </a:rPr>
-              <a:t>3</a:t>
-            </a:r>
-          </a:p>
-        </p:txBody>
-      </p:sp>
-      <p:pic>
-        <p:nvPicPr>
-          <p:cNvPr id="6" name="Picture 5" descr="a_G.png"/>
           <p:cNvPicPr>
             <a:picLocks noChangeAspect="1"/>
           </p:cNvPicPr>
@@ -3609,8 +3668,8 @@
         </p:blipFill>
         <p:spPr>
           <a:xfrm>
-            <a:off x="813816" y="1508760"/>
-            <a:ext cx="5471160" cy="432816"/>
+            <a:off x="812800" y="1221741"/>
+            <a:ext cx="10566400" cy="20320"/>
           </a:xfrm>
           <a:prstGeom prst="rect">
             <a:avLst/>
@@ -3619,266 +3678,89 @@
       </p:pic>
       <p:sp>
         <p:nvSpPr>
-          <p:cNvPr id="7" name="Rounded Rectangle 6"/>
-          <p:cNvSpPr/>
-          <p:nvPr/>
-        </p:nvSpPr>
-        <p:spPr>
-          <a:xfrm>
-            <a:off x="813816" y="2377440"/>
-            <a:ext cx="2926080" cy="731520"/>
-          </a:xfrm>
-          <a:prstGeom prst="roundRect">
-            <a:avLst>
-              <a:gd name="adj" fmla="val 18000"/>
-            </a:avLst>
-          </a:prstGeom>
-          <a:solidFill>
-            <a:srgbClr val="1F3A5F"/>
-          </a:solidFill>
-          <a:ln>
-            <a:noFill/>
-          </a:ln>
-          <a:effectLst/>
-        </p:spPr>
-        <p:style>
-          <a:lnRef idx="1">
-            <a:schemeClr val="accent1"/>
-          </a:lnRef>
-          <a:fillRef idx="3">
-            <a:schemeClr val="accent1"/>
-          </a:fillRef>
-          <a:effectRef idx="2">
-            <a:schemeClr val="accent1"/>
-          </a:effectRef>
-          <a:fontRef idx="minor">
-            <a:schemeClr val="lt1"/>
-          </a:fontRef>
-        </p:style>
-        <p:txBody>
-          <a:bodyPr rtlCol="0" anchor="ctr" wrap="square" lIns="54864" rIns="54864"/>
-          <a:lstStyle/>
-          <a:p>
-            <a:pPr algn="ctr"/>
-            <a:r>
-              <a:rPr sz="1500" b="1" i="0">
-                <a:solidFill>
-                  <a:srgbClr val="FFFFFF"/>
-                </a:solidFill>
-                <a:latin typeface="IBM Plex Sans"/>
-                <a:ea typeface="IBM Plex Sans"/>
-                <a:cs typeface="IBM Plex Sans"/>
-              </a:rPr>
-              <a:t>t = 0:  root is x₀</a:t>
-            </a:r>
-          </a:p>
-        </p:txBody>
-      </p:sp>
-      <p:sp>
-        <p:nvSpPr>
-          <p:cNvPr id="8" name="Right Arrow 7"/>
-          <p:cNvSpPr/>
-          <p:nvPr/>
-        </p:nvSpPr>
-        <p:spPr>
-          <a:xfrm>
-            <a:off x="3803904" y="2606040"/>
-            <a:ext cx="420623" cy="274320"/>
-          </a:xfrm>
-          <a:prstGeom prst="rightArrow">
-            <a:avLst/>
-          </a:prstGeom>
-          <a:solidFill>
-            <a:srgbClr val="A8B0BB"/>
-          </a:solidFill>
-          <a:ln>
-            <a:noFill/>
-          </a:ln>
-          <a:effectLst/>
-        </p:spPr>
-        <p:style>
-          <a:lnRef idx="1">
-            <a:schemeClr val="accent1"/>
-          </a:lnRef>
-          <a:fillRef idx="3">
-            <a:schemeClr val="accent1"/>
-          </a:fillRef>
-          <a:effectRef idx="2">
-            <a:schemeClr val="accent1"/>
-          </a:effectRef>
-          <a:fontRef idx="minor">
-            <a:schemeClr val="lt1"/>
-          </a:fontRef>
-        </p:style>
-        <p:txBody>
-          <a:bodyPr rtlCol="0" anchor="ctr"/>
-          <a:lstStyle/>
-          <a:p>
-            <a:pPr algn="ctr"/>
-          </a:p>
-        </p:txBody>
-      </p:sp>
-      <p:sp>
-        <p:nvSpPr>
-          <p:cNvPr id="9" name="Rounded Rectangle 8"/>
-          <p:cNvSpPr/>
-          <p:nvPr/>
-        </p:nvSpPr>
-        <p:spPr>
-          <a:xfrm>
-            <a:off x="4288536" y="2377440"/>
-            <a:ext cx="2926080" cy="731520"/>
-          </a:xfrm>
-          <a:prstGeom prst="roundRect">
-            <a:avLst>
-              <a:gd name="adj" fmla="val 18000"/>
-            </a:avLst>
-          </a:prstGeom>
-          <a:solidFill>
-            <a:srgbClr val="F1EFEA"/>
-          </a:solidFill>
-          <a:ln>
-            <a:noFill/>
-          </a:ln>
-          <a:effectLst/>
-        </p:spPr>
-        <p:style>
-          <a:lnRef idx="1">
-            <a:schemeClr val="accent1"/>
-          </a:lnRef>
-          <a:fillRef idx="3">
-            <a:schemeClr val="accent1"/>
-          </a:fillRef>
-          <a:effectRef idx="2">
-            <a:schemeClr val="accent1"/>
-          </a:effectRef>
-          <a:fontRef idx="minor">
-            <a:schemeClr val="lt1"/>
-          </a:fontRef>
-        </p:style>
-        <p:txBody>
-          <a:bodyPr rtlCol="0" anchor="ctr" wrap="square" lIns="54864" rIns="54864"/>
-          <a:lstStyle/>
-          <a:p>
-            <a:pPr algn="ctr"/>
-            <a:r>
-              <a:rPr sz="1500" b="1" i="0">
-                <a:solidFill>
-                  <a:srgbClr val="1F3A5F"/>
-                </a:solidFill>
-                <a:latin typeface="IBM Plex Sans"/>
-                <a:ea typeface="IBM Plex Sans"/>
-                <a:cs typeface="IBM Plex Sans"/>
-              </a:rPr>
-              <a:t>smooth path x(t)</a:t>
-            </a:r>
-          </a:p>
-        </p:txBody>
-      </p:sp>
-      <p:sp>
-        <p:nvSpPr>
-          <p:cNvPr id="10" name="Right Arrow 9"/>
-          <p:cNvSpPr/>
-          <p:nvPr/>
-        </p:nvSpPr>
-        <p:spPr>
-          <a:xfrm>
-            <a:off x="7278624" y="2606040"/>
-            <a:ext cx="420623" cy="274320"/>
-          </a:xfrm>
-          <a:prstGeom prst="rightArrow">
-            <a:avLst/>
-          </a:prstGeom>
-          <a:solidFill>
-            <a:srgbClr val="A8B0BB"/>
-          </a:solidFill>
-          <a:ln>
-            <a:noFill/>
-          </a:ln>
-          <a:effectLst/>
-        </p:spPr>
-        <p:style>
-          <a:lnRef idx="1">
-            <a:schemeClr val="accent1"/>
-          </a:lnRef>
-          <a:fillRef idx="3">
-            <a:schemeClr val="accent1"/>
-          </a:fillRef>
-          <a:effectRef idx="2">
-            <a:schemeClr val="accent1"/>
-          </a:effectRef>
-          <a:fontRef idx="minor">
-            <a:schemeClr val="lt1"/>
-          </a:fontRef>
-        </p:style>
-        <p:txBody>
-          <a:bodyPr rtlCol="0" anchor="ctr"/>
-          <a:lstStyle/>
-          <a:p>
-            <a:pPr algn="ctr"/>
-          </a:p>
-        </p:txBody>
-      </p:sp>
-      <p:sp>
-        <p:nvSpPr>
-          <p:cNvPr id="11" name="Rounded Rectangle 10"/>
-          <p:cNvSpPr/>
-          <p:nvPr/>
-        </p:nvSpPr>
-        <p:spPr>
-          <a:xfrm>
-            <a:off x="7763256" y="2377440"/>
-            <a:ext cx="2926080" cy="731520"/>
-          </a:xfrm>
-          <a:prstGeom prst="roundRect">
-            <a:avLst>
-              <a:gd name="adj" fmla="val 18000"/>
-            </a:avLst>
-          </a:prstGeom>
-          <a:solidFill>
-            <a:srgbClr val="1F3A5F"/>
-          </a:solidFill>
-          <a:ln>
-            <a:noFill/>
-          </a:ln>
-          <a:effectLst/>
-        </p:spPr>
-        <p:style>
-          <a:lnRef idx="1">
-            <a:schemeClr val="accent1"/>
-          </a:lnRef>
-          <a:fillRef idx="3">
-            <a:schemeClr val="accent1"/>
-          </a:fillRef>
-          <a:effectRef idx="2">
-            <a:schemeClr val="accent1"/>
-          </a:effectRef>
-          <a:fontRef idx="minor">
-            <a:schemeClr val="lt1"/>
-          </a:fontRef>
-        </p:style>
-        <p:txBody>
-          <a:bodyPr rtlCol="0" anchor="ctr" wrap="square" lIns="54864" rIns="54864"/>
-          <a:lstStyle/>
-          <a:p>
-            <a:pPr algn="ctr"/>
-            <a:r>
-              <a:rPr sz="1500" b="1" i="0">
-                <a:solidFill>
-                  <a:srgbClr val="FFFFFF"/>
-                </a:solidFill>
-                <a:latin typeface="IBM Plex Sans"/>
-                <a:ea typeface="IBM Plex Sans"/>
-                <a:cs typeface="IBM Plex Sans"/>
-              </a:rPr>
-              <a:t>t = 1:  g(x) = 0</a:t>
+          <p:cNvPr id="4" name="TextBox 3"/>
+          <p:cNvSpPr txBox="1"/>
+          <p:nvPr/>
+        </p:nvSpPr>
+        <p:spPr>
+          <a:xfrm>
+            <a:off x="813816" y="6236208"/>
+            <a:ext cx="7845552" cy="237744"/>
+          </a:xfrm>
+          <a:prstGeom prst="rect">
+            <a:avLst/>
+          </a:prstGeom>
+          <a:noFill/>
+        </p:spPr>
+        <p:txBody>
+          <a:bodyPr wrap="square" lIns="0" tIns="0" rIns="0" bIns="0" anchor="t">
+            <a:spAutoFit/>
+          </a:bodyPr>
+          <a:lstStyle/>
+          <a:p>
+            <a:pPr algn="l">
+              <a:spcAft>
+                <a:spcPts val="800"/>
+              </a:spcAft>
+            </a:pPr>
+            <a:r>
+              <a:rPr sz="1200" b="0" i="0">
+                <a:solidFill>
+                  <a:srgbClr val="6B7280"/>
+                </a:solidFill>
+                <a:latin typeface="IBM Plex Sans"/>
+                <a:ea typeface="IBM Plex Sans"/>
+                <a:cs typeface="IBM Plex Sans"/>
+              </a:rPr>
+              <a:t>Apurbo's part · Lima-Silva &amp; Freitas (2024): reproduction and improvements</a:t>
+            </a:r>
+          </a:p>
+        </p:txBody>
+      </p:sp>
+      <p:sp>
+        <p:nvSpPr>
+          <p:cNvPr id="5" name="TextBox 4"/>
+          <p:cNvSpPr txBox="1"/>
+          <p:nvPr/>
+        </p:nvSpPr>
+        <p:spPr>
+          <a:xfrm>
+            <a:off x="10058400" y="6236208"/>
+            <a:ext cx="1316736" cy="237744"/>
+          </a:xfrm>
+          <a:prstGeom prst="rect">
+            <a:avLst/>
+          </a:prstGeom>
+          <a:noFill/>
+        </p:spPr>
+        <p:txBody>
+          <a:bodyPr wrap="square" lIns="0" tIns="0" rIns="0" bIns="0" anchor="t">
+            <a:spAutoFit/>
+          </a:bodyPr>
+          <a:lstStyle/>
+          <a:p>
+            <a:pPr algn="r">
+              <a:spcAft>
+                <a:spcPts val="800"/>
+              </a:spcAft>
+            </a:pPr>
+            <a:r>
+              <a:rPr sz="1200" b="0" i="0">
+                <a:solidFill>
+                  <a:srgbClr val="6B7280"/>
+                </a:solidFill>
+                <a:latin typeface="IBM Plex Sans"/>
+                <a:ea typeface="IBM Plex Sans"/>
+                <a:cs typeface="IBM Plex Sans"/>
+              </a:rPr>
+              <a:t>4</a:t>
             </a:r>
           </a:p>
         </p:txBody>
       </p:sp>
       <p:pic>
         <p:nvPicPr>
-          <p:cNvPr id="12" name="Picture 11" descr="a_ode.png"/>
+          <p:cNvPr id="6" name="Picture 5" descr="a_first.png"/>
           <p:cNvPicPr>
             <a:picLocks noChangeAspect="1"/>
           </p:cNvPicPr>
@@ -3892,8 +3774,8 @@
         </p:blipFill>
         <p:spPr>
           <a:xfrm>
-            <a:off x="813816" y="3611880"/>
-            <a:ext cx="8827008" cy="420624"/>
+            <a:off x="813816" y="1554480"/>
+            <a:ext cx="7562088" cy="451104"/>
           </a:xfrm>
           <a:prstGeom prst="rect">
             <a:avLst/>
@@ -3902,14 +3784,14 @@
       </p:pic>
       <p:sp>
         <p:nvSpPr>
-          <p:cNvPr id="13" name="TextBox 12"/>
+          <p:cNvPr id="7" name="TextBox 6"/>
           <p:cNvSpPr txBox="1"/>
           <p:nvPr/>
         </p:nvSpPr>
         <p:spPr>
           <a:xfrm>
-            <a:off x="813816" y="4617720"/>
-            <a:ext cx="10561320" cy="457200"/>
+            <a:off x="813816" y="2560320"/>
+            <a:ext cx="10561320" cy="2194560"/>
           </a:xfrm>
           <a:prstGeom prst="rect">
             <a:avLst/>
@@ -3917,26 +3799,88 @@
           <a:noFill/>
         </p:spPr>
         <p:txBody>
-          <a:bodyPr wrap="square" lIns="0" rIns="0" tIns="0" bIns="0" anchor="t">
+          <a:bodyPr wrap="square" lIns="0" tIns="0" rIns="0" bIns="0" anchor="t">
             <a:spAutoFit/>
           </a:bodyPr>
           <a:lstStyle/>
           <a:p>
-            <a:pPr algn="l">
+            <a:pPr marL="228600" indent="-228600" algn="l">
               <a:spcAft>
-                <a:spcPts val="800"/>
+                <a:spcPts val="1200"/>
               </a:spcAft>
-            </a:pPr>
-            <a:r>
-              <a:rPr sz="1600" b="0" i="0">
-                <a:solidFill>
-                  <a:srgbClr val="333A48"/>
-                </a:solidFill>
-                <a:latin typeface="IBM Plex Sans"/>
-                <a:ea typeface="IBM Plex Sans"/>
-                <a:cs typeface="IBM Plex Sans"/>
-              </a:rPr>
-              <a:t>Root finding becomes an initial value problem. Each slope costs one LU.</a:t>
+              <a:buFont typeface="Arial"/>
+              <a:buChar char="•"/>
+            </a:pPr>
+            <a:r>
+              <a:rPr sz="1700" b="0" i="0">
+                <a:solidFill>
+                  <a:srgbClr val="1B1F2A"/>
+                </a:solidFill>
+                <a:latin typeface="IBM Plex Sans"/>
+                <a:ea typeface="IBM Plex Sans"/>
+                <a:cs typeface="IBM Plex Sans"/>
+              </a:rPr>
+              <a:t>forward Euler at t = 0 inverts K·I: it steps by −50 g(x₀), blind to the network</a:t>
+            </a:r>
+          </a:p>
+          <a:p>
+            <a:pPr marL="228600" indent="-228600" algn="l">
+              <a:spcAft>
+                <a:spcPts val="1200"/>
+              </a:spcAft>
+              <a:buFont typeface="Arial"/>
+              <a:buChar char="•"/>
+            </a:pPr>
+            <a:r>
+              <a:rPr sz="1700" b="0" i="0">
+                <a:solidFill>
+                  <a:srgbClr val="1B1F2A"/>
+                </a:solidFill>
+                <a:latin typeface="IBM Plex Sans"/>
+                <a:ea typeface="IBM Plex Sans"/>
+                <a:cs typeface="IBM Plex Sans"/>
+              </a:rPr>
+              <a:t>backward Euler inverts Δt₀ J + (1 − Δt₀) K I: a Newton step with δ on the diagonal</a:t>
+            </a:r>
+          </a:p>
+          <a:p>
+            <a:pPr marL="228600" indent="-228600" algn="l">
+              <a:spcAft>
+                <a:spcPts val="1200"/>
+              </a:spcAft>
+              <a:buFont typeface="Arial"/>
+              <a:buChar char="•"/>
+            </a:pPr>
+            <a:r>
+              <a:rPr sz="1700" b="0" i="0">
+                <a:solidFill>
+                  <a:srgbClr val="1B1F2A"/>
+                </a:solidFill>
+                <a:latin typeface="IBM Plex Sans"/>
+                <a:ea typeface="IBM Plex Sans"/>
+                <a:cs typeface="IBM Plex Sans"/>
+              </a:rPr>
+              <a:t>BE and the linearised step (eqs. 26, 27) give the same point; a unit test checks this</a:t>
+            </a:r>
+          </a:p>
+          <a:p>
+            <a:pPr marL="228600" indent="-228600" algn="l">
+              <a:spcAft>
+                <a:spcPts val="1200"/>
+              </a:spcAft>
+              <a:buFont typeface="Arial"/>
+              <a:buChar char="•"/>
+            </a:pPr>
+            <a:r>
+              <a:rPr sz="1700" b="0" i="0">
+                <a:solidFill>
+                  <a:srgbClr val="1B1F2A"/>
+                </a:solidFill>
+                <a:latin typeface="IBM Plex Sans"/>
+                <a:ea typeface="IBM Plex Sans"/>
+                <a:cs typeface="IBM Plex Sans"/>
+              </a:rPr>
+              <a:t>the shift δ lifts the tiny eigenvalues of J</a:t>
             </a:r>
           </a:p>
         </p:txBody>
@@ -3949,8 +3893,8 @@
 </p:sld>
 </file>
 
-<file path=ppt/slides/slide4.xml><?xml version="1.0" encoding="utf-8"?>
-<p:sld xmlns:a="http://schemas.openxmlformats.org/drawingml/2006/main" xmlns:p="http://schemas.openxmlformats.org/presentationml/2006/main" xmlns:r="http://schemas.openxmlformats.org/officeDocument/2006/relationships">
+<file path=ppt/slides/slide5.xml><?xml version="1.0" encoding="utf-8"?>
+<p:sld xmlns:a="http://schemas.openxmlformats.org/drawingml/2006/main" xmlns:r="http://schemas.openxmlformats.org/officeDocument/2006/relationships" xmlns:p="http://schemas.openxmlformats.org/presentationml/2006/main">
   <p:cSld>
     <p:bg>
       <p:bgPr>
@@ -3966,7 +3910,14 @@
         <p:cNvGrpSpPr/>
         <p:nvPr/>
       </p:nvGrpSpPr>
-      <p:grpSpPr/>
+      <p:grpSpPr>
+        <a:xfrm>
+          <a:off x="0" y="0"/>
+          <a:ext cx="0" cy="0"/>
+          <a:chOff x="0" y="0"/>
+          <a:chExt cx="0" cy="0"/>
+        </a:xfrm>
+      </p:grpSpPr>
       <p:sp>
         <p:nvSpPr>
           <p:cNvPr id="2" name="TextBox 1"/>
@@ -3984,7 +3935,7 @@
           <a:noFill/>
         </p:spPr>
         <p:txBody>
-          <a:bodyPr wrap="square" lIns="0" rIns="0" tIns="0" bIns="0" anchor="t">
+          <a:bodyPr wrap="square" lIns="0" tIns="0" rIns="0" bIns="0" anchor="t">
             <a:spAutoFit/>
           </a:bodyPr>
           <a:lstStyle/>
@@ -4003,7 +3954,7 @@
                 <a:ea typeface="IBM Plex Sans"/>
                 <a:cs typeface="IBM Plex Sans"/>
               </a:rPr>
-              <a:t>The first step is a shifted Newton step</a:t>
+              <a:t>Section 4.2.1: the first step, reproduced</a:t>
             </a:r>
           </a:p>
         </p:txBody>
@@ -4011,112 +3962,6 @@
       <p:pic>
         <p:nvPicPr>
           <p:cNvPr id="3" name="Picture 2" descr="image.png"/>
-          <p:cNvPicPr>
-            <a:picLocks noChangeAspect="1"/>
-          </p:cNvPicPr>
-          <p:nvPr/>
-        </p:nvPicPr>
-        <p:blipFill>
-          <a:blip r:embed="rId2"/>
-          <a:stretch>
-            <a:fillRect/>
-          </a:stretch>
-        </p:blipFill>
-        <p:spPr>
-          <a:xfrm>
-            <a:off x="812800" y="1221741"/>
-            <a:ext cx="10566400" cy="20320"/>
-          </a:xfrm>
-          <a:prstGeom prst="rect">
-            <a:avLst/>
-          </a:prstGeom>
-        </p:spPr>
-      </p:pic>
-      <p:sp>
-        <p:nvSpPr>
-          <p:cNvPr id="4" name="TextBox 3"/>
-          <p:cNvSpPr txBox="1"/>
-          <p:nvPr/>
-        </p:nvSpPr>
-        <p:spPr>
-          <a:xfrm>
-            <a:off x="813816" y="6236208"/>
-            <a:ext cx="7845552" cy="237744"/>
-          </a:xfrm>
-          <a:prstGeom prst="rect">
-            <a:avLst/>
-          </a:prstGeom>
-          <a:noFill/>
-        </p:spPr>
-        <p:txBody>
-          <a:bodyPr wrap="square" lIns="0" rIns="0" tIns="0" bIns="0" anchor="t">
-            <a:spAutoFit/>
-          </a:bodyPr>
-          <a:lstStyle/>
-          <a:p>
-            <a:pPr algn="l">
-              <a:spcAft>
-                <a:spcPts val="800"/>
-              </a:spcAft>
-            </a:pPr>
-            <a:r>
-              <a:rPr sz="1200" b="0" i="0">
-                <a:solidFill>
-                  <a:srgbClr val="6B7280"/>
-                </a:solidFill>
-                <a:latin typeface="IBM Plex Sans"/>
-                <a:ea typeface="IBM Plex Sans"/>
-                <a:cs typeface="IBM Plex Sans"/>
-              </a:rPr>
-              <a:t>Apurbo's part · Lima-Silva &amp; Freitas (2024): reproduction and improvements</a:t>
-            </a:r>
-          </a:p>
-        </p:txBody>
-      </p:sp>
-      <p:sp>
-        <p:nvSpPr>
-          <p:cNvPr id="5" name="TextBox 4"/>
-          <p:cNvSpPr txBox="1"/>
-          <p:nvPr/>
-        </p:nvSpPr>
-        <p:spPr>
-          <a:xfrm>
-            <a:off x="10058400" y="6236208"/>
-            <a:ext cx="1316736" cy="237744"/>
-          </a:xfrm>
-          <a:prstGeom prst="rect">
-            <a:avLst/>
-          </a:prstGeom>
-          <a:noFill/>
-        </p:spPr>
-        <p:txBody>
-          <a:bodyPr wrap="square" lIns="0" rIns="0" tIns="0" bIns="0" anchor="t">
-            <a:spAutoFit/>
-          </a:bodyPr>
-          <a:lstStyle/>
-          <a:p>
-            <a:pPr algn="r">
-              <a:spcAft>
-                <a:spcPts val="800"/>
-              </a:spcAft>
-            </a:pPr>
-            <a:r>
-              <a:rPr sz="1200" b="0" i="0">
-                <a:solidFill>
-                  <a:srgbClr val="6B7280"/>
-                </a:solidFill>
-                <a:latin typeface="IBM Plex Sans"/>
-                <a:ea typeface="IBM Plex Sans"/>
-                <a:cs typeface="IBM Plex Sans"/>
-              </a:rPr>
-              <a:t>4</a:t>
-            </a:r>
-          </a:p>
-        </p:txBody>
-      </p:sp>
-      <p:pic>
-        <p:nvPicPr>
-          <p:cNvPr id="6" name="Picture 5" descr="a_first.png"/>
           <p:cNvPicPr>
             <a:picLocks noChangeAspect="1"/>
           </p:cNvPicPr>
@@ -4130,8 +3975,114 @@
         </p:blipFill>
         <p:spPr>
           <a:xfrm>
-            <a:off x="813816" y="1554480"/>
-            <a:ext cx="7562088" cy="451104"/>
+            <a:off x="812800" y="1221741"/>
+            <a:ext cx="10566400" cy="20320"/>
+          </a:xfrm>
+          <a:prstGeom prst="rect">
+            <a:avLst/>
+          </a:prstGeom>
+        </p:spPr>
+      </p:pic>
+      <p:sp>
+        <p:nvSpPr>
+          <p:cNvPr id="4" name="TextBox 3"/>
+          <p:cNvSpPr txBox="1"/>
+          <p:nvPr/>
+        </p:nvSpPr>
+        <p:spPr>
+          <a:xfrm>
+            <a:off x="813816" y="6236208"/>
+            <a:ext cx="7845552" cy="237744"/>
+          </a:xfrm>
+          <a:prstGeom prst="rect">
+            <a:avLst/>
+          </a:prstGeom>
+          <a:noFill/>
+        </p:spPr>
+        <p:txBody>
+          <a:bodyPr wrap="square" lIns="0" tIns="0" rIns="0" bIns="0" anchor="t">
+            <a:spAutoFit/>
+          </a:bodyPr>
+          <a:lstStyle/>
+          <a:p>
+            <a:pPr algn="l">
+              <a:spcAft>
+                <a:spcPts val="800"/>
+              </a:spcAft>
+            </a:pPr>
+            <a:r>
+              <a:rPr sz="1200" b="0" i="0">
+                <a:solidFill>
+                  <a:srgbClr val="6B7280"/>
+                </a:solidFill>
+                <a:latin typeface="IBM Plex Sans"/>
+                <a:ea typeface="IBM Plex Sans"/>
+                <a:cs typeface="IBM Plex Sans"/>
+              </a:rPr>
+              <a:t>Apurbo's part · Lima-Silva &amp; Freitas (2024): reproduction and improvements</a:t>
+            </a:r>
+          </a:p>
+        </p:txBody>
+      </p:sp>
+      <p:sp>
+        <p:nvSpPr>
+          <p:cNvPr id="5" name="TextBox 4"/>
+          <p:cNvSpPr txBox="1"/>
+          <p:nvPr/>
+        </p:nvSpPr>
+        <p:spPr>
+          <a:xfrm>
+            <a:off x="10058400" y="6236208"/>
+            <a:ext cx="1316736" cy="237744"/>
+          </a:xfrm>
+          <a:prstGeom prst="rect">
+            <a:avLst/>
+          </a:prstGeom>
+          <a:noFill/>
+        </p:spPr>
+        <p:txBody>
+          <a:bodyPr wrap="square" lIns="0" tIns="0" rIns="0" bIns="0" anchor="t">
+            <a:spAutoFit/>
+          </a:bodyPr>
+          <a:lstStyle/>
+          <a:p>
+            <a:pPr algn="r">
+              <a:spcAft>
+                <a:spcPts val="800"/>
+              </a:spcAft>
+            </a:pPr>
+            <a:r>
+              <a:rPr sz="1200" b="0" i="0">
+                <a:solidFill>
+                  <a:srgbClr val="6B7280"/>
+                </a:solidFill>
+                <a:latin typeface="IBM Plex Sans"/>
+                <a:ea typeface="IBM Plex Sans"/>
+                <a:cs typeface="IBM Plex Sans"/>
+              </a:rPr>
+              <a:t>5</a:t>
+            </a:r>
+          </a:p>
+        </p:txBody>
+      </p:sp>
+      <p:pic>
+        <p:nvPicPr>
+          <p:cNvPr id="6" name="Picture 5" descr="first_step.png"/>
+          <p:cNvPicPr>
+            <a:picLocks noChangeAspect="1"/>
+          </p:cNvPicPr>
+          <p:nvPr/>
+        </p:nvPicPr>
+        <p:blipFill>
+          <a:blip r:embed="rId4"/>
+          <a:stretch>
+            <a:fillRect/>
+          </a:stretch>
+        </p:blipFill>
+        <p:spPr>
+          <a:xfrm>
+            <a:off x="722376" y="1397326"/>
+            <a:ext cx="6766560" cy="3971907"/>
           </a:xfrm>
           <a:prstGeom prst="rect">
             <a:avLst/>
@@ -4146,8 +4097,8 @@
         </p:nvSpPr>
         <p:spPr>
           <a:xfrm>
-            <a:off x="813816" y="2560320"/>
-            <a:ext cx="10561320" cy="2194560"/>
+            <a:off x="7772400" y="1463040"/>
+            <a:ext cx="3657600" cy="457200"/>
           </a:xfrm>
           <a:prstGeom prst="rect">
             <a:avLst/>
@@ -4155,88 +4106,190 @@
           <a:noFill/>
         </p:spPr>
         <p:txBody>
-          <a:bodyPr wrap="square" lIns="0" rIns="0" tIns="0" bIns="0" anchor="t">
+          <a:bodyPr wrap="square" lIns="0" tIns="0" rIns="0" bIns="0" anchor="t">
             <a:spAutoFit/>
           </a:bodyPr>
           <a:lstStyle/>
           <a:p>
-            <a:pPr algn="l" marL="228600" indent="-228600">
+            <a:pPr algn="l">
               <a:spcAft>
-                <a:spcPts val="1200"/>
+                <a:spcPts val="800"/>
               </a:spcAft>
-              <a:buFont typeface="Arial"/>
-              <a:buChar char="•"/>
-            </a:pPr>
-            <a:r>
-              <a:rPr sz="1700" b="0" i="0">
-                <a:solidFill>
-                  <a:srgbClr val="1B1F2A"/>
-                </a:solidFill>
-                <a:latin typeface="IBM Plex Sans"/>
-                <a:ea typeface="IBM Plex Sans"/>
-                <a:cs typeface="IBM Plex Sans"/>
-              </a:rPr>
-              <a:t>forward Euler at t = 0 inverts K·I: it steps by −50 g(x₀), blind to the network</a:t>
-            </a:r>
-          </a:p>
-          <a:p>
-            <a:pPr algn="l" marL="228600" indent="-228600">
+            </a:pPr>
+            <a:r>
+              <a:rPr sz="1600" b="1" i="0">
+                <a:solidFill>
+                  <a:srgbClr val="1F3A5F"/>
+                </a:solidFill>
+                <a:latin typeface="IBM Plex Sans"/>
+                <a:ea typeface="IBM Plex Sans"/>
+                <a:cs typeface="IBM Plex Sans"/>
+              </a:rPr>
+              <a:t>case18482, ‖g‖ after one step</a:t>
+            </a:r>
+          </a:p>
+        </p:txBody>
+      </p:sp>
+      <p:sp>
+        <p:nvSpPr>
+          <p:cNvPr id="8" name="TextBox 7"/>
+          <p:cNvSpPr txBox="1"/>
+          <p:nvPr/>
+        </p:nvSpPr>
+        <p:spPr>
+          <a:xfrm>
+            <a:off x="7772400" y="2011680"/>
+            <a:ext cx="3657600" cy="822960"/>
+          </a:xfrm>
+          <a:prstGeom prst="rect">
+            <a:avLst/>
+          </a:prstGeom>
+          <a:noFill/>
+        </p:spPr>
+        <p:txBody>
+          <a:bodyPr wrap="square" lIns="0" tIns="0" rIns="0" bIns="0" anchor="t">
+            <a:spAutoFit/>
+          </a:bodyPr>
+          <a:lstStyle/>
+          <a:p>
+            <a:pPr algn="l">
               <a:spcAft>
-                <a:spcPts val="1200"/>
+                <a:spcPts val="800"/>
               </a:spcAft>
-              <a:buFont typeface="Arial"/>
-              <a:buChar char="•"/>
-            </a:pPr>
-            <a:r>
-              <a:rPr sz="1700" b="0" i="0">
-                <a:solidFill>
-                  <a:srgbClr val="1B1F2A"/>
-                </a:solidFill>
-                <a:latin typeface="IBM Plex Sans"/>
-                <a:ea typeface="IBM Plex Sans"/>
-                <a:cs typeface="IBM Plex Sans"/>
-              </a:rPr>
-              <a:t>backward Euler inverts Δt₀ J + (1 − Δt₀) K I: a Newton step with δ on the diagonal</a:t>
-            </a:r>
-          </a:p>
-          <a:p>
-            <a:pPr algn="l" marL="228600" indent="-228600">
+            </a:pPr>
+            <a:r>
+              <a:rPr sz="3600" b="1" i="0">
+                <a:solidFill>
+                  <a:srgbClr val="B54A3F"/>
+                </a:solidFill>
+                <a:latin typeface="IBM Plex Sans"/>
+                <a:ea typeface="IBM Plex Sans"/>
+                <a:cs typeface="IBM Plex Sans"/>
+              </a:rPr>
+              <a:t>533 → 10¹³</a:t>
+            </a:r>
+          </a:p>
+        </p:txBody>
+      </p:sp>
+      <p:sp>
+        <p:nvSpPr>
+          <p:cNvPr id="9" name="TextBox 8"/>
+          <p:cNvSpPr txBox="1"/>
+          <p:nvPr/>
+        </p:nvSpPr>
+        <p:spPr>
+          <a:xfrm>
+            <a:off x="7772400" y="2880360"/>
+            <a:ext cx="3657600" cy="731520"/>
+          </a:xfrm>
+          <a:prstGeom prst="rect">
+            <a:avLst/>
+          </a:prstGeom>
+          <a:noFill/>
+        </p:spPr>
+        <p:txBody>
+          <a:bodyPr wrap="square" lIns="0" tIns="0" rIns="0" bIns="0" anchor="t">
+            <a:spAutoFit/>
+          </a:bodyPr>
+          <a:lstStyle/>
+          <a:p>
+            <a:pPr algn="l">
               <a:spcAft>
-                <a:spcPts val="1200"/>
+                <a:spcPts val="800"/>
               </a:spcAft>
-              <a:buFont typeface="Arial"/>
-              <a:buChar char="•"/>
-            </a:pPr>
-            <a:r>
-              <a:rPr sz="1700" b="0" i="0">
-                <a:solidFill>
-                  <a:srgbClr val="1B1F2A"/>
-                </a:solidFill>
-                <a:latin typeface="IBM Plex Sans"/>
-                <a:ea typeface="IBM Plex Sans"/>
-                <a:cs typeface="IBM Plex Sans"/>
-              </a:rPr>
-              <a:t>BE and the linearised step (eqs. 26, 27) give the same point; a unit test checks this</a:t>
-            </a:r>
-          </a:p>
-          <a:p>
-            <a:pPr algn="l" marL="228600" indent="-228600">
+            </a:pPr>
+            <a:r>
+              <a:rPr sz="1500" b="0" i="0">
+                <a:solidFill>
+                  <a:srgbClr val="333A48"/>
+                </a:solidFill>
+                <a:latin typeface="IBM Plex Sans"/>
+                <a:ea typeface="IBM Plex Sans"/>
+                <a:cs typeface="IBM Plex Sans"/>
+              </a:rPr>
+              <a:t>forward Euler</a:t>
+            </a:r>
+          </a:p>
+        </p:txBody>
+      </p:sp>
+      <p:sp>
+        <p:nvSpPr>
+          <p:cNvPr id="10" name="TextBox 9"/>
+          <p:cNvSpPr txBox="1"/>
+          <p:nvPr/>
+        </p:nvSpPr>
+        <p:spPr>
+          <a:xfrm>
+            <a:off x="7772400" y="3474720"/>
+            <a:ext cx="3657600" cy="822960"/>
+          </a:xfrm>
+          <a:prstGeom prst="rect">
+            <a:avLst/>
+          </a:prstGeom>
+          <a:noFill/>
+        </p:spPr>
+        <p:txBody>
+          <a:bodyPr wrap="square" lIns="0" tIns="0" rIns="0" bIns="0" anchor="t">
+            <a:spAutoFit/>
+          </a:bodyPr>
+          <a:lstStyle/>
+          <a:p>
+            <a:pPr algn="l">
               <a:spcAft>
-                <a:spcPts val="1200"/>
+                <a:spcPts val="800"/>
               </a:spcAft>
-              <a:buFont typeface="Arial"/>
-              <a:buChar char="•"/>
-            </a:pPr>
-            <a:r>
-              <a:rPr sz="1700" b="0" i="0">
-                <a:solidFill>
-                  <a:srgbClr val="1B1F2A"/>
-                </a:solidFill>
-                <a:latin typeface="IBM Plex Sans"/>
-                <a:ea typeface="IBM Plex Sans"/>
-                <a:cs typeface="IBM Plex Sans"/>
-              </a:rPr>
-              <a:t>the shift δ lifts the tiny eigenvalues of J</a:t>
+            </a:pPr>
+            <a:r>
+              <a:rPr sz="3600" b="1" i="0">
+                <a:solidFill>
+                  <a:srgbClr val="2F8F5B"/>
+                </a:solidFill>
+                <a:latin typeface="IBM Plex Sans"/>
+                <a:ea typeface="IBM Plex Sans"/>
+                <a:cs typeface="IBM Plex Sans"/>
+              </a:rPr>
+              <a:t>533 → 65</a:t>
+            </a:r>
+          </a:p>
+        </p:txBody>
+      </p:sp>
+      <p:sp>
+        <p:nvSpPr>
+          <p:cNvPr id="11" name="TextBox 10"/>
+          <p:cNvSpPr txBox="1"/>
+          <p:nvPr/>
+        </p:nvSpPr>
+        <p:spPr>
+          <a:xfrm>
+            <a:off x="7772400" y="4343400"/>
+            <a:ext cx="3657600" cy="731520"/>
+          </a:xfrm>
+          <a:prstGeom prst="rect">
+            <a:avLst/>
+          </a:prstGeom>
+          <a:noFill/>
+        </p:spPr>
+        <p:txBody>
+          <a:bodyPr wrap="square" lIns="0" tIns="0" rIns="0" bIns="0" anchor="t">
+            <a:spAutoFit/>
+          </a:bodyPr>
+          <a:lstStyle/>
+          <a:p>
+            <a:pPr algn="l">
+              <a:spcAft>
+                <a:spcPts val="800"/>
+              </a:spcAft>
+            </a:pPr>
+            <a:r>
+              <a:rPr sz="1500" b="0" i="0">
+                <a:solidFill>
+                  <a:srgbClr val="333A48"/>
+                </a:solidFill>
+                <a:latin typeface="IBM Plex Sans"/>
+                <a:ea typeface="IBM Plex Sans"/>
+                <a:cs typeface="IBM Plex Sans"/>
+              </a:rPr>
+              <a:t>backward Euler</a:t>
             </a:r>
           </a:p>
         </p:txBody>
@@ -4249,8 +4302,8 @@
 </p:sld>
 </file>
 
-<file path=ppt/slides/slide5.xml><?xml version="1.0" encoding="utf-8"?>
-<p:sld xmlns:a="http://schemas.openxmlformats.org/drawingml/2006/main" xmlns:p="http://schemas.openxmlformats.org/presentationml/2006/main" xmlns:r="http://schemas.openxmlformats.org/officeDocument/2006/relationships">
+<file path=ppt/slides/slide6.xml><?xml version="1.0" encoding="utf-8"?>
+<p:sld xmlns:a="http://schemas.openxmlformats.org/drawingml/2006/main" xmlns:r="http://schemas.openxmlformats.org/officeDocument/2006/relationships" xmlns:p="http://schemas.openxmlformats.org/presentationml/2006/main">
   <p:cSld>
     <p:bg>
       <p:bgPr>
@@ -4266,7 +4319,14 @@
         <p:cNvGrpSpPr/>
         <p:nvPr/>
       </p:nvGrpSpPr>
-      <p:grpSpPr/>
+      <p:grpSpPr>
+        <a:xfrm>
+          <a:off x="0" y="0"/>
+          <a:ext cx="0" cy="0"/>
+          <a:chOff x="0" y="0"/>
+          <a:chExt cx="0" cy="0"/>
+        </a:xfrm>
+      </p:grpSpPr>
       <p:sp>
         <p:nvSpPr>
           <p:cNvPr id="2" name="TextBox 1"/>
@@ -4284,7 +4344,7 @@
           <a:noFill/>
         </p:spPr>
         <p:txBody>
-          <a:bodyPr wrap="square" lIns="0" rIns="0" tIns="0" bIns="0" anchor="t">
+          <a:bodyPr wrap="square" lIns="0" tIns="0" rIns="0" bIns="0" anchor="t">
             <a:spAutoFit/>
           </a:bodyPr>
           <a:lstStyle/>
@@ -4303,7 +4363,7 @@
                 <a:ea typeface="IBM Plex Sans"/>
                 <a:cs typeface="IBM Plex Sans"/>
               </a:rPr>
-              <a:t>Section 4.2.1: the first step, reproduced</a:t>
+              <a:t>Figure 4: the largest grid</a:t>
             </a:r>
           </a:p>
         </p:txBody>
@@ -4311,112 +4371,6 @@
       <p:pic>
         <p:nvPicPr>
           <p:cNvPr id="3" name="Picture 2" descr="image.png"/>
-          <p:cNvPicPr>
-            <a:picLocks noChangeAspect="1"/>
-          </p:cNvPicPr>
-          <p:nvPr/>
-        </p:nvPicPr>
-        <p:blipFill>
-          <a:blip r:embed="rId2"/>
-          <a:stretch>
-            <a:fillRect/>
-          </a:stretch>
-        </p:blipFill>
-        <p:spPr>
-          <a:xfrm>
-            <a:off x="812800" y="1221741"/>
-            <a:ext cx="10566400" cy="20320"/>
-          </a:xfrm>
-          <a:prstGeom prst="rect">
-            <a:avLst/>
-          </a:prstGeom>
-        </p:spPr>
-      </p:pic>
-      <p:sp>
-        <p:nvSpPr>
-          <p:cNvPr id="4" name="TextBox 3"/>
-          <p:cNvSpPr txBox="1"/>
-          <p:nvPr/>
-        </p:nvSpPr>
-        <p:spPr>
-          <a:xfrm>
-            <a:off x="813816" y="6236208"/>
-            <a:ext cx="7845552" cy="237744"/>
-          </a:xfrm>
-          <a:prstGeom prst="rect">
-            <a:avLst/>
-          </a:prstGeom>
-          <a:noFill/>
-        </p:spPr>
-        <p:txBody>
-          <a:bodyPr wrap="square" lIns="0" rIns="0" tIns="0" bIns="0" anchor="t">
-            <a:spAutoFit/>
-          </a:bodyPr>
-          <a:lstStyle/>
-          <a:p>
-            <a:pPr algn="l">
-              <a:spcAft>
-                <a:spcPts val="800"/>
-              </a:spcAft>
-            </a:pPr>
-            <a:r>
-              <a:rPr sz="1200" b="0" i="0">
-                <a:solidFill>
-                  <a:srgbClr val="6B7280"/>
-                </a:solidFill>
-                <a:latin typeface="IBM Plex Sans"/>
-                <a:ea typeface="IBM Plex Sans"/>
-                <a:cs typeface="IBM Plex Sans"/>
-              </a:rPr>
-              <a:t>Apurbo's part · Lima-Silva &amp; Freitas (2024): reproduction and improvements</a:t>
-            </a:r>
-          </a:p>
-        </p:txBody>
-      </p:sp>
-      <p:sp>
-        <p:nvSpPr>
-          <p:cNvPr id="5" name="TextBox 4"/>
-          <p:cNvSpPr txBox="1"/>
-          <p:nvPr/>
-        </p:nvSpPr>
-        <p:spPr>
-          <a:xfrm>
-            <a:off x="10058400" y="6236208"/>
-            <a:ext cx="1316736" cy="237744"/>
-          </a:xfrm>
-          <a:prstGeom prst="rect">
-            <a:avLst/>
-          </a:prstGeom>
-          <a:noFill/>
-        </p:spPr>
-        <p:txBody>
-          <a:bodyPr wrap="square" lIns="0" rIns="0" tIns="0" bIns="0" anchor="t">
-            <a:spAutoFit/>
-          </a:bodyPr>
-          <a:lstStyle/>
-          <a:p>
-            <a:pPr algn="r">
-              <a:spcAft>
-                <a:spcPts val="800"/>
-              </a:spcAft>
-            </a:pPr>
-            <a:r>
-              <a:rPr sz="1200" b="0" i="0">
-                <a:solidFill>
-                  <a:srgbClr val="6B7280"/>
-                </a:solidFill>
-                <a:latin typeface="IBM Plex Sans"/>
-                <a:ea typeface="IBM Plex Sans"/>
-                <a:cs typeface="IBM Plex Sans"/>
-              </a:rPr>
-              <a:t>5</a:t>
-            </a:r>
-          </a:p>
-        </p:txBody>
-      </p:sp>
-      <p:pic>
-        <p:nvPicPr>
-          <p:cNvPr id="6" name="Picture 5" descr="first_step.png"/>
           <p:cNvPicPr>
             <a:picLocks noChangeAspect="1"/>
           </p:cNvPicPr>
@@ -4430,8 +4384,8 @@
         </p:blipFill>
         <p:spPr>
           <a:xfrm>
-            <a:off x="722376" y="1397326"/>
-            <a:ext cx="6766560" cy="3971907"/>
+            <a:off x="812800" y="1221741"/>
+            <a:ext cx="10566400" cy="20320"/>
           </a:xfrm>
           <a:prstGeom prst="rect">
             <a:avLst/>
@@ -4440,14 +4394,14 @@
       </p:pic>
       <p:sp>
         <p:nvSpPr>
-          <p:cNvPr id="7" name="TextBox 6"/>
+          <p:cNvPr id="4" name="TextBox 3"/>
           <p:cNvSpPr txBox="1"/>
           <p:nvPr/>
         </p:nvSpPr>
         <p:spPr>
           <a:xfrm>
-            <a:off x="7772400" y="1463040"/>
-            <a:ext cx="3657600" cy="457200"/>
+            <a:off x="813816" y="6236208"/>
+            <a:ext cx="7845552" cy="237744"/>
           </a:xfrm>
           <a:prstGeom prst="rect">
             <a:avLst/>
@@ -4455,7 +4409,7 @@
           <a:noFill/>
         </p:spPr>
         <p:txBody>
-          <a:bodyPr wrap="square" lIns="0" rIns="0" tIns="0" bIns="0" anchor="t">
+          <a:bodyPr wrap="square" lIns="0" tIns="0" rIns="0" bIns="0" anchor="t">
             <a:spAutoFit/>
           </a:bodyPr>
           <a:lstStyle/>
@@ -4466,29 +4420,29 @@
               </a:spcAft>
             </a:pPr>
             <a:r>
-              <a:rPr sz="1600" b="1" i="0">
-                <a:solidFill>
-                  <a:srgbClr val="1F3A5F"/>
-                </a:solidFill>
-                <a:latin typeface="IBM Plex Sans"/>
-                <a:ea typeface="IBM Plex Sans"/>
-                <a:cs typeface="IBM Plex Sans"/>
-              </a:rPr>
-              <a:t>case18482, ‖g‖ after one step</a:t>
-            </a:r>
-          </a:p>
-        </p:txBody>
-      </p:sp>
-      <p:sp>
-        <p:nvSpPr>
-          <p:cNvPr id="8" name="TextBox 7"/>
+              <a:rPr sz="1200" b="0" i="0">
+                <a:solidFill>
+                  <a:srgbClr val="6B7280"/>
+                </a:solidFill>
+                <a:latin typeface="IBM Plex Sans"/>
+                <a:ea typeface="IBM Plex Sans"/>
+                <a:cs typeface="IBM Plex Sans"/>
+              </a:rPr>
+              <a:t>Apurbo's part · Lima-Silva &amp; Freitas (2024): reproduction and improvements</a:t>
+            </a:r>
+          </a:p>
+        </p:txBody>
+      </p:sp>
+      <p:sp>
+        <p:nvSpPr>
+          <p:cNvPr id="5" name="TextBox 4"/>
           <p:cNvSpPr txBox="1"/>
           <p:nvPr/>
         </p:nvSpPr>
         <p:spPr>
           <a:xfrm>
-            <a:off x="7772400" y="2011680"/>
-            <a:ext cx="3657600" cy="822960"/>
+            <a:off x="10058400" y="6236208"/>
+            <a:ext cx="1316736" cy="237744"/>
           </a:xfrm>
           <a:prstGeom prst="rect">
             <a:avLst/>
@@ -4496,7 +4450,72 @@
           <a:noFill/>
         </p:spPr>
         <p:txBody>
-          <a:bodyPr wrap="square" lIns="0" rIns="0" tIns="0" bIns="0" anchor="t">
+          <a:bodyPr wrap="square" lIns="0" tIns="0" rIns="0" bIns="0" anchor="t">
+            <a:spAutoFit/>
+          </a:bodyPr>
+          <a:lstStyle/>
+          <a:p>
+            <a:pPr algn="r">
+              <a:spcAft>
+                <a:spcPts val="800"/>
+              </a:spcAft>
+            </a:pPr>
+            <a:r>
+              <a:rPr sz="1200" b="0" i="0">
+                <a:solidFill>
+                  <a:srgbClr val="6B7280"/>
+                </a:solidFill>
+                <a:latin typeface="IBM Plex Sans"/>
+                <a:ea typeface="IBM Plex Sans"/>
+                <a:cs typeface="IBM Plex Sans"/>
+              </a:rPr>
+              <a:t>7</a:t>
+            </a:r>
+          </a:p>
+        </p:txBody>
+      </p:sp>
+      <p:pic>
+        <p:nvPicPr>
+          <p:cNvPr id="6" name="Picture 5" descr="fig4_case109272_states.png"/>
+          <p:cNvPicPr>
+            <a:picLocks noChangeAspect="1"/>
+          </p:cNvPicPr>
+          <p:nvPr/>
+        </p:nvPicPr>
+        <p:blipFill>
+          <a:blip r:embed="rId4"/>
+          <a:stretch>
+            <a:fillRect/>
+          </a:stretch>
+        </p:blipFill>
+        <p:spPr>
+          <a:xfrm>
+            <a:off x="1089894" y="1325880"/>
+            <a:ext cx="3288323" cy="4114800"/>
+          </a:xfrm>
+          <a:prstGeom prst="rect">
+            <a:avLst/>
+          </a:prstGeom>
+        </p:spPr>
+      </p:pic>
+      <p:sp>
+        <p:nvSpPr>
+          <p:cNvPr id="7" name="TextBox 6"/>
+          <p:cNvSpPr txBox="1"/>
+          <p:nvPr/>
+        </p:nvSpPr>
+        <p:spPr>
+          <a:xfrm>
+            <a:off x="5486400" y="1645920"/>
+            <a:ext cx="5669280" cy="822960"/>
+          </a:xfrm>
+          <a:prstGeom prst="rect">
+            <a:avLst/>
+          </a:prstGeom>
+          <a:noFill/>
+        </p:spPr>
+        <p:txBody>
+          <a:bodyPr wrap="square" lIns="0" tIns="0" rIns="0" bIns="0" anchor="t">
             <a:spAutoFit/>
           </a:bodyPr>
           <a:lstStyle/>
@@ -4507,29 +4526,29 @@
               </a:spcAft>
             </a:pPr>
             <a:r>
-              <a:rPr sz="3600" b="1" i="0">
-                <a:solidFill>
-                  <a:srgbClr val="B54A3F"/>
-                </a:solidFill>
-                <a:latin typeface="IBM Plex Sans"/>
-                <a:ea typeface="IBM Plex Sans"/>
-                <a:cs typeface="IBM Plex Sans"/>
-              </a:rPr>
-              <a:t>533 → 10¹³</a:t>
-            </a:r>
-          </a:p>
-        </p:txBody>
-      </p:sp>
-      <p:sp>
-        <p:nvSpPr>
-          <p:cNvPr id="9" name="TextBox 8"/>
+              <a:rPr sz="4000" b="1" i="0">
+                <a:solidFill>
+                  <a:srgbClr val="1F3A5F"/>
+                </a:solidFill>
+                <a:latin typeface="IBM Plex Sans"/>
+                <a:ea typeface="IBM Plex Sans"/>
+                <a:cs typeface="IBM Plex Sans"/>
+              </a:rPr>
+              <a:t>2 path points + 4 NR</a:t>
+            </a:r>
+          </a:p>
+        </p:txBody>
+      </p:sp>
+      <p:sp>
+        <p:nvSpPr>
+          <p:cNvPr id="8" name="TextBox 7"/>
           <p:cNvSpPr txBox="1"/>
           <p:nvPr/>
         </p:nvSpPr>
         <p:spPr>
           <a:xfrm>
-            <a:off x="7772400" y="2880360"/>
-            <a:ext cx="3657600" cy="731520"/>
+            <a:off x="5486400" y="2514600"/>
+            <a:ext cx="5669280" cy="731520"/>
           </a:xfrm>
           <a:prstGeom prst="rect">
             <a:avLst/>
@@ -4537,7 +4556,7 @@
           <a:noFill/>
         </p:spPr>
         <p:txBody>
-          <a:bodyPr wrap="square" lIns="0" rIns="0" tIns="0" bIns="0" anchor="t">
+          <a:bodyPr wrap="square" lIns="0" tIns="0" rIns="0" bIns="0" anchor="t">
             <a:spAutoFit/>
           </a:bodyPr>
           <a:lstStyle/>
@@ -4556,21 +4575,21 @@
                 <a:ea typeface="IBM Plex Sans"/>
                 <a:cs typeface="IBM Plex Sans"/>
               </a:rPr>
-              <a:t>forward Euler</a:t>
-            </a:r>
-          </a:p>
-        </p:txBody>
-      </p:sp>
-      <p:sp>
-        <p:nvSpPr>
-          <p:cNvPr id="10" name="TextBox 9"/>
+              <a:t>iterations on case109272 (185,807 unknowns), as in the paper</a:t>
+            </a:r>
+          </a:p>
+        </p:txBody>
+      </p:sp>
+      <p:sp>
+        <p:nvSpPr>
+          <p:cNvPr id="9" name="TextBox 8"/>
           <p:cNvSpPr txBox="1"/>
           <p:nvPr/>
         </p:nvSpPr>
         <p:spPr>
           <a:xfrm>
-            <a:off x="7772400" y="3474720"/>
-            <a:ext cx="3657600" cy="822960"/>
+            <a:off x="5486400" y="3291840"/>
+            <a:ext cx="5669280" cy="822960"/>
           </a:xfrm>
           <a:prstGeom prst="rect">
             <a:avLst/>
@@ -4578,7 +4597,7 @@
           <a:noFill/>
         </p:spPr>
         <p:txBody>
-          <a:bodyPr wrap="square" lIns="0" rIns="0" tIns="0" bIns="0" anchor="t">
+          <a:bodyPr wrap="square" lIns="0" tIns="0" rIns="0" bIns="0" anchor="t">
             <a:spAutoFit/>
           </a:bodyPr>
           <a:lstStyle/>
@@ -4589,29 +4608,29 @@
               </a:spcAft>
             </a:pPr>
             <a:r>
-              <a:rPr sz="3600" b="1" i="0">
-                <a:solidFill>
-                  <a:srgbClr val="2F8F5B"/>
-                </a:solidFill>
-                <a:latin typeface="IBM Plex Sans"/>
-                <a:ea typeface="IBM Plex Sans"/>
-                <a:cs typeface="IBM Plex Sans"/>
-              </a:rPr>
-              <a:t>533 → 65</a:t>
-            </a:r>
-          </a:p>
-        </p:txBody>
-      </p:sp>
-      <p:sp>
-        <p:nvSpPr>
-          <p:cNvPr id="11" name="TextBox 10"/>
+              <a:rPr sz="4000" b="1" i="0">
+                <a:solidFill>
+                  <a:srgbClr val="1F3A5F"/>
+                </a:solidFill>
+                <a:latin typeface="IBM Plex Sans"/>
+                <a:ea typeface="IBM Plex Sans"/>
+                <a:cs typeface="IBM Plex Sans"/>
+              </a:rPr>
+              <a:t>1.0045 pu, 21.1°</a:t>
+            </a:r>
+          </a:p>
+        </p:txBody>
+      </p:sp>
+      <p:sp>
+        <p:nvSpPr>
+          <p:cNvPr id="10" name="TextBox 9"/>
           <p:cNvSpPr txBox="1"/>
           <p:nvPr/>
         </p:nvSpPr>
         <p:spPr>
           <a:xfrm>
-            <a:off x="7772400" y="4343400"/>
-            <a:ext cx="3657600" cy="731520"/>
+            <a:off x="5486400" y="4160520"/>
+            <a:ext cx="5669280" cy="731520"/>
           </a:xfrm>
           <a:prstGeom prst="rect">
             <a:avLst/>
@@ -4619,7 +4638,7 @@
           <a:noFill/>
         </p:spPr>
         <p:txBody>
-          <a:bodyPr wrap="square" lIns="0" rIns="0" tIns="0" bIns="0" anchor="t">
+          <a:bodyPr wrap="square" lIns="0" tIns="0" rIns="0" bIns="0" anchor="t">
             <a:spAutoFit/>
           </a:bodyPr>
           <a:lstStyle/>
@@ -4638,7 +4657,7 @@
                 <a:ea typeface="IBM Plex Sans"/>
                 <a:cs typeface="IBM Plex Sans"/>
               </a:rPr>
-              <a:t>backward Euler</a:t>
+              <a:t>final voltage at bus 6, the same as the paper</a:t>
             </a:r>
           </a:p>
         </p:txBody>
@@ -4651,8 +4670,8 @@
 </p:sld>
 </file>
 
-<file path=ppt/slides/slide6.xml><?xml version="1.0" encoding="utf-8"?>
-<p:sld xmlns:a="http://schemas.openxmlformats.org/drawingml/2006/main" xmlns:p="http://schemas.openxmlformats.org/presentationml/2006/main" xmlns:r="http://schemas.openxmlformats.org/officeDocument/2006/relationships">
+<file path=ppt/slides/slide7.xml><?xml version="1.0" encoding="utf-8"?>
+<p:sld xmlns:a="http://schemas.openxmlformats.org/drawingml/2006/main" xmlns:r="http://schemas.openxmlformats.org/officeDocument/2006/relationships" xmlns:p="http://schemas.openxmlformats.org/presentationml/2006/main">
   <p:cSld>
     <p:bg>
       <p:bgPr>
@@ -4668,7 +4687,14 @@
         <p:cNvGrpSpPr/>
         <p:nvPr/>
       </p:nvGrpSpPr>
-      <p:grpSpPr/>
+      <p:grpSpPr>
+        <a:xfrm>
+          <a:off x="0" y="0"/>
+          <a:ext cx="0" cy="0"/>
+          <a:chOff x="0" y="0"/>
+          <a:chExt cx="0" cy="0"/>
+        </a:xfrm>
+      </p:grpSpPr>
       <p:sp>
         <p:nvSpPr>
           <p:cNvPr id="2" name="TextBox 1"/>
@@ -4686,7 +4712,7 @@
           <a:noFill/>
         </p:spPr>
         <p:txBody>
-          <a:bodyPr wrap="square" lIns="0" rIns="0" tIns="0" bIns="0" anchor="t">
+          <a:bodyPr wrap="square" lIns="0" tIns="0" rIns="0" bIns="0" anchor="t">
             <a:spAutoFit/>
           </a:bodyPr>
           <a:lstStyle/>
@@ -4705,7 +4731,7 @@
                 <a:ea typeface="IBM Plex Sans"/>
                 <a:cs typeface="IBM Plex Sans"/>
               </a:rPr>
-              <a:t>Figures 1 and 2: the 2×2 example</a:t>
+              <a:t>One solver with switches: solve()</a:t>
             </a:r>
           </a:p>
         </p:txBody>
@@ -4713,112 +4739,6 @@
       <p:pic>
         <p:nvPicPr>
           <p:cNvPr id="3" name="Picture 2" descr="image.png"/>
-          <p:cNvPicPr>
-            <a:picLocks noChangeAspect="1"/>
-          </p:cNvPicPr>
-          <p:nvPr/>
-        </p:nvPicPr>
-        <p:blipFill>
-          <a:blip r:embed="rId2"/>
-          <a:stretch>
-            <a:fillRect/>
-          </a:stretch>
-        </p:blipFill>
-        <p:spPr>
-          <a:xfrm>
-            <a:off x="812800" y="1221741"/>
-            <a:ext cx="10566400" cy="20320"/>
-          </a:xfrm>
-          <a:prstGeom prst="rect">
-            <a:avLst/>
-          </a:prstGeom>
-        </p:spPr>
-      </p:pic>
-      <p:sp>
-        <p:nvSpPr>
-          <p:cNvPr id="4" name="TextBox 3"/>
-          <p:cNvSpPr txBox="1"/>
-          <p:nvPr/>
-        </p:nvSpPr>
-        <p:spPr>
-          <a:xfrm>
-            <a:off x="813816" y="6236208"/>
-            <a:ext cx="7845552" cy="237744"/>
-          </a:xfrm>
-          <a:prstGeom prst="rect">
-            <a:avLst/>
-          </a:prstGeom>
-          <a:noFill/>
-        </p:spPr>
-        <p:txBody>
-          <a:bodyPr wrap="square" lIns="0" rIns="0" tIns="0" bIns="0" anchor="t">
-            <a:spAutoFit/>
-          </a:bodyPr>
-          <a:lstStyle/>
-          <a:p>
-            <a:pPr algn="l">
-              <a:spcAft>
-                <a:spcPts val="800"/>
-              </a:spcAft>
-            </a:pPr>
-            <a:r>
-              <a:rPr sz="1200" b="0" i="0">
-                <a:solidFill>
-                  <a:srgbClr val="6B7280"/>
-                </a:solidFill>
-                <a:latin typeface="IBM Plex Sans"/>
-                <a:ea typeface="IBM Plex Sans"/>
-                <a:cs typeface="IBM Plex Sans"/>
-              </a:rPr>
-              <a:t>Apurbo's part · Lima-Silva &amp; Freitas (2024): reproduction and improvements</a:t>
-            </a:r>
-          </a:p>
-        </p:txBody>
-      </p:sp>
-      <p:sp>
-        <p:nvSpPr>
-          <p:cNvPr id="5" name="TextBox 4"/>
-          <p:cNvSpPr txBox="1"/>
-          <p:nvPr/>
-        </p:nvSpPr>
-        <p:spPr>
-          <a:xfrm>
-            <a:off x="10058400" y="6236208"/>
-            <a:ext cx="1316736" cy="237744"/>
-          </a:xfrm>
-          <a:prstGeom prst="rect">
-            <a:avLst/>
-          </a:prstGeom>
-          <a:noFill/>
-        </p:spPr>
-        <p:txBody>
-          <a:bodyPr wrap="square" lIns="0" rIns="0" tIns="0" bIns="0" anchor="t">
-            <a:spAutoFit/>
-          </a:bodyPr>
-          <a:lstStyle/>
-          <a:p>
-            <a:pPr algn="r">
-              <a:spcAft>
-                <a:spcPts val="800"/>
-              </a:spcAft>
-            </a:pPr>
-            <a:r>
-              <a:rPr sz="1200" b="0" i="0">
-                <a:solidFill>
-                  <a:srgbClr val="6B7280"/>
-                </a:solidFill>
-                <a:latin typeface="IBM Plex Sans"/>
-                <a:ea typeface="IBM Plex Sans"/>
-                <a:cs typeface="IBM Plex Sans"/>
-              </a:rPr>
-              <a:t>6</a:t>
-            </a:r>
-          </a:p>
-        </p:txBody>
-      </p:sp>
-      <p:pic>
-        <p:nvPicPr>
-          <p:cNvPr id="6" name="Picture 5" descr="tutorial_geometry.png"/>
           <p:cNvPicPr>
             <a:picLocks noChangeAspect="1"/>
           </p:cNvPicPr>
@@ -4832,8 +4752,8 @@
         </p:blipFill>
         <p:spPr>
           <a:xfrm>
-            <a:off x="2610652" y="1325880"/>
-            <a:ext cx="6921927" cy="3200400"/>
+            <a:off x="812800" y="1221741"/>
+            <a:ext cx="10566400" cy="20320"/>
           </a:xfrm>
           <a:prstGeom prst="rect">
             <a:avLst/>
@@ -4842,14 +4762,14 @@
       </p:pic>
       <p:sp>
         <p:nvSpPr>
-          <p:cNvPr id="7" name="TextBox 6"/>
+          <p:cNvPr id="4" name="TextBox 3"/>
           <p:cNvSpPr txBox="1"/>
           <p:nvPr/>
         </p:nvSpPr>
         <p:spPr>
           <a:xfrm>
-            <a:off x="813816" y="4663440"/>
-            <a:ext cx="10561320" cy="822960"/>
+            <a:off x="813816" y="6236208"/>
+            <a:ext cx="7845552" cy="237744"/>
           </a:xfrm>
           <a:prstGeom prst="rect">
             <a:avLst/>
@@ -4857,7 +4777,7 @@
           <a:noFill/>
         </p:spPr>
         <p:txBody>
-          <a:bodyPr wrap="square" lIns="0" rIns="0" tIns="0" bIns="0" anchor="t">
+          <a:bodyPr wrap="square" lIns="0" tIns="0" rIns="0" bIns="0" anchor="t">
             <a:spAutoFit/>
           </a:bodyPr>
           <a:lstStyle/>
@@ -4868,171 +4788,6 @@
               </a:spcAft>
             </a:pPr>
             <a:r>
-              <a:rPr sz="1600" b="0" i="0">
-                <a:solidFill>
-                  <a:srgbClr val="1B1F2A"/>
-                </a:solidFill>
-                <a:latin typeface="IBM Plex Sans"/>
-                <a:ea typeface="IBM Plex Sans"/>
-                <a:cs typeface="IBM Plex Sans"/>
-              </a:rPr>
-              <a:t>Newton alone: </a:t>
-            </a:r>
-            <a:r>
-              <a:rPr sz="1600" b="1" i="0">
-                <a:solidFill>
-                  <a:srgbClr val="1F3A5F"/>
-                </a:solidFill>
-                <a:latin typeface="IBM Plex Sans"/>
-                <a:ea typeface="IBM Plex Sans"/>
-                <a:cs typeface="IBM Plex Sans"/>
-              </a:rPr>
-              <a:t>11 and 10 iterations</a:t>
-            </a:r>
-            <a:r>
-              <a:rPr sz="1600" b="0" i="0">
-                <a:solidFill>
-                  <a:srgbClr val="1B1F2A"/>
-                </a:solidFill>
-                <a:latin typeface="IBM Plex Sans"/>
-                <a:ea typeface="IBM Plex Sans"/>
-                <a:cs typeface="IBM Plex Sans"/>
-              </a:rPr>
-              <a:t>  for ε = 0.005 and 0.01, exactly as in the paper.   </a:t>
-            </a:r>
-            <a:r>
-              <a:rPr sz="1600" b="0" i="0">
-                <a:solidFill>
-                  <a:srgbClr val="6B7280"/>
-                </a:solidFill>
-                <a:latin typeface="IBM Plex Sans"/>
-                <a:ea typeface="IBM Plex Sans"/>
-                <a:cs typeface="IBM Plex Sans"/>
-              </a:rPr>
-              <a:t>The paper's ε = 0.05 curve does not fit its own equations.</a:t>
-            </a:r>
-          </a:p>
-        </p:txBody>
-      </p:sp>
-    </p:spTree>
-  </p:cSld>
-  <p:clrMapOvr>
-    <a:masterClrMapping/>
-  </p:clrMapOvr>
-</p:sld>
-</file>
-
-<file path=ppt/slides/slide7.xml><?xml version="1.0" encoding="utf-8"?>
-<p:sld xmlns:a="http://schemas.openxmlformats.org/drawingml/2006/main" xmlns:p="http://schemas.openxmlformats.org/presentationml/2006/main" xmlns:r="http://schemas.openxmlformats.org/officeDocument/2006/relationships">
-  <p:cSld>
-    <p:bg>
-      <p:bgPr>
-        <a:solidFill>
-          <a:srgbClr val="FBFBF9"/>
-        </a:solidFill>
-        <a:effectLst/>
-      </p:bgPr>
-    </p:bg>
-    <p:spTree>
-      <p:nvGrpSpPr>
-        <p:cNvPr id="1" name=""/>
-        <p:cNvGrpSpPr/>
-        <p:nvPr/>
-      </p:nvGrpSpPr>
-      <p:grpSpPr/>
-      <p:sp>
-        <p:nvSpPr>
-          <p:cNvPr id="2" name="TextBox 1"/>
-          <p:cNvSpPr txBox="1"/>
-          <p:nvPr/>
-        </p:nvSpPr>
-        <p:spPr>
-          <a:xfrm>
-            <a:off x="813816" y="713232"/>
-            <a:ext cx="10881360" cy="429768"/>
-          </a:xfrm>
-          <a:prstGeom prst="rect">
-            <a:avLst/>
-          </a:prstGeom>
-          <a:noFill/>
-        </p:spPr>
-        <p:txBody>
-          <a:bodyPr wrap="square" lIns="0" rIns="0" tIns="0" bIns="0" anchor="t">
-            <a:spAutoFit/>
-          </a:bodyPr>
-          <a:lstStyle/>
-          <a:p>
-            <a:pPr algn="l">
-              <a:spcAft>
-                <a:spcPts val="800"/>
-              </a:spcAft>
-            </a:pPr>
-            <a:r>
-              <a:rPr sz="2800" b="1" i="0">
-                <a:solidFill>
-                  <a:srgbClr val="1F3A5F"/>
-                </a:solidFill>
-                <a:latin typeface="IBM Plex Sans"/>
-                <a:ea typeface="IBM Plex Sans"/>
-                <a:cs typeface="IBM Plex Sans"/>
-              </a:rPr>
-              <a:t>Figure 4: the largest grid</a:t>
-            </a:r>
-          </a:p>
-        </p:txBody>
-      </p:sp>
-      <p:pic>
-        <p:nvPicPr>
-          <p:cNvPr id="3" name="Picture 2" descr="image.png"/>
-          <p:cNvPicPr>
-            <a:picLocks noChangeAspect="1"/>
-          </p:cNvPicPr>
-          <p:nvPr/>
-        </p:nvPicPr>
-        <p:blipFill>
-          <a:blip r:embed="rId2"/>
-          <a:stretch>
-            <a:fillRect/>
-          </a:stretch>
-        </p:blipFill>
-        <p:spPr>
-          <a:xfrm>
-            <a:off x="812800" y="1221741"/>
-            <a:ext cx="10566400" cy="20320"/>
-          </a:xfrm>
-          <a:prstGeom prst="rect">
-            <a:avLst/>
-          </a:prstGeom>
-        </p:spPr>
-      </p:pic>
-      <p:sp>
-        <p:nvSpPr>
-          <p:cNvPr id="4" name="TextBox 3"/>
-          <p:cNvSpPr txBox="1"/>
-          <p:nvPr/>
-        </p:nvSpPr>
-        <p:spPr>
-          <a:xfrm>
-            <a:off x="813816" y="6236208"/>
-            <a:ext cx="7845552" cy="237744"/>
-          </a:xfrm>
-          <a:prstGeom prst="rect">
-            <a:avLst/>
-          </a:prstGeom>
-          <a:noFill/>
-        </p:spPr>
-        <p:txBody>
-          <a:bodyPr wrap="square" lIns="0" rIns="0" tIns="0" bIns="0" anchor="t">
-            <a:spAutoFit/>
-          </a:bodyPr>
-          <a:lstStyle/>
-          <a:p>
-            <a:pPr algn="l">
-              <a:spcAft>
-                <a:spcPts val="800"/>
-              </a:spcAft>
-            </a:pPr>
-            <a:r>
               <a:rPr sz="1200" b="0" i="0">
                 <a:solidFill>
                   <a:srgbClr val="6B7280"/>
@@ -5063,368 +4818,7 @@
           <a:noFill/>
         </p:spPr>
         <p:txBody>
-          <a:bodyPr wrap="square" lIns="0" rIns="0" tIns="0" bIns="0" anchor="t">
-            <a:spAutoFit/>
-          </a:bodyPr>
-          <a:lstStyle/>
-          <a:p>
-            <a:pPr algn="r">
-              <a:spcAft>
-                <a:spcPts val="800"/>
-              </a:spcAft>
-            </a:pPr>
-            <a:r>
-              <a:rPr sz="1200" b="0" i="0">
-                <a:solidFill>
-                  <a:srgbClr val="6B7280"/>
-                </a:solidFill>
-                <a:latin typeface="IBM Plex Sans"/>
-                <a:ea typeface="IBM Plex Sans"/>
-                <a:cs typeface="IBM Plex Sans"/>
-              </a:rPr>
-              <a:t>7</a:t>
-            </a:r>
-          </a:p>
-        </p:txBody>
-      </p:sp>
-      <p:pic>
-        <p:nvPicPr>
-          <p:cNvPr id="6" name="Picture 5" descr="fig4_case109272_states.png"/>
-          <p:cNvPicPr>
-            <a:picLocks noChangeAspect="1"/>
-          </p:cNvPicPr>
-          <p:nvPr/>
-        </p:nvPicPr>
-        <p:blipFill>
-          <a:blip r:embed="rId3"/>
-          <a:stretch>
-            <a:fillRect/>
-          </a:stretch>
-        </p:blipFill>
-        <p:spPr>
-          <a:xfrm>
-            <a:off x="1089894" y="1325880"/>
-            <a:ext cx="3288323" cy="4114800"/>
-          </a:xfrm>
-          <a:prstGeom prst="rect">
-            <a:avLst/>
-          </a:prstGeom>
-        </p:spPr>
-      </p:pic>
-      <p:sp>
-        <p:nvSpPr>
-          <p:cNvPr id="7" name="TextBox 6"/>
-          <p:cNvSpPr txBox="1"/>
-          <p:nvPr/>
-        </p:nvSpPr>
-        <p:spPr>
-          <a:xfrm>
-            <a:off x="5486400" y="1645920"/>
-            <a:ext cx="5669280" cy="822960"/>
-          </a:xfrm>
-          <a:prstGeom prst="rect">
-            <a:avLst/>
-          </a:prstGeom>
-          <a:noFill/>
-        </p:spPr>
-        <p:txBody>
-          <a:bodyPr wrap="square" lIns="0" rIns="0" tIns="0" bIns="0" anchor="t">
-            <a:spAutoFit/>
-          </a:bodyPr>
-          <a:lstStyle/>
-          <a:p>
-            <a:pPr algn="l">
-              <a:spcAft>
-                <a:spcPts val="800"/>
-              </a:spcAft>
-            </a:pPr>
-            <a:r>
-              <a:rPr sz="4000" b="1" i="0">
-                <a:solidFill>
-                  <a:srgbClr val="1F3A5F"/>
-                </a:solidFill>
-                <a:latin typeface="IBM Plex Sans"/>
-                <a:ea typeface="IBM Plex Sans"/>
-                <a:cs typeface="IBM Plex Sans"/>
-              </a:rPr>
-              <a:t>2 path points + 4 NR</a:t>
-            </a:r>
-          </a:p>
-        </p:txBody>
-      </p:sp>
-      <p:sp>
-        <p:nvSpPr>
-          <p:cNvPr id="8" name="TextBox 7"/>
-          <p:cNvSpPr txBox="1"/>
-          <p:nvPr/>
-        </p:nvSpPr>
-        <p:spPr>
-          <a:xfrm>
-            <a:off x="5486400" y="2514600"/>
-            <a:ext cx="5669280" cy="731520"/>
-          </a:xfrm>
-          <a:prstGeom prst="rect">
-            <a:avLst/>
-          </a:prstGeom>
-          <a:noFill/>
-        </p:spPr>
-        <p:txBody>
-          <a:bodyPr wrap="square" lIns="0" rIns="0" tIns="0" bIns="0" anchor="t">
-            <a:spAutoFit/>
-          </a:bodyPr>
-          <a:lstStyle/>
-          <a:p>
-            <a:pPr algn="l">
-              <a:spcAft>
-                <a:spcPts val="800"/>
-              </a:spcAft>
-            </a:pPr>
-            <a:r>
-              <a:rPr sz="1500" b="0" i="0">
-                <a:solidFill>
-                  <a:srgbClr val="333A48"/>
-                </a:solidFill>
-                <a:latin typeface="IBM Plex Sans"/>
-                <a:ea typeface="IBM Plex Sans"/>
-                <a:cs typeface="IBM Plex Sans"/>
-              </a:rPr>
-              <a:t>iterations on case109272 (185,807 unknowns), as in the paper</a:t>
-            </a:r>
-          </a:p>
-        </p:txBody>
-      </p:sp>
-      <p:sp>
-        <p:nvSpPr>
-          <p:cNvPr id="9" name="TextBox 8"/>
-          <p:cNvSpPr txBox="1"/>
-          <p:nvPr/>
-        </p:nvSpPr>
-        <p:spPr>
-          <a:xfrm>
-            <a:off x="5486400" y="3291840"/>
-            <a:ext cx="5669280" cy="822960"/>
-          </a:xfrm>
-          <a:prstGeom prst="rect">
-            <a:avLst/>
-          </a:prstGeom>
-          <a:noFill/>
-        </p:spPr>
-        <p:txBody>
-          <a:bodyPr wrap="square" lIns="0" rIns="0" tIns="0" bIns="0" anchor="t">
-            <a:spAutoFit/>
-          </a:bodyPr>
-          <a:lstStyle/>
-          <a:p>
-            <a:pPr algn="l">
-              <a:spcAft>
-                <a:spcPts val="800"/>
-              </a:spcAft>
-            </a:pPr>
-            <a:r>
-              <a:rPr sz="4000" b="1" i="0">
-                <a:solidFill>
-                  <a:srgbClr val="1F3A5F"/>
-                </a:solidFill>
-                <a:latin typeface="IBM Plex Sans"/>
-                <a:ea typeface="IBM Plex Sans"/>
-                <a:cs typeface="IBM Plex Sans"/>
-              </a:rPr>
-              <a:t>1.0045 pu, 21.1°</a:t>
-            </a:r>
-          </a:p>
-        </p:txBody>
-      </p:sp>
-      <p:sp>
-        <p:nvSpPr>
-          <p:cNvPr id="10" name="TextBox 9"/>
-          <p:cNvSpPr txBox="1"/>
-          <p:nvPr/>
-        </p:nvSpPr>
-        <p:spPr>
-          <a:xfrm>
-            <a:off x="5486400" y="4160520"/>
-            <a:ext cx="5669280" cy="731520"/>
-          </a:xfrm>
-          <a:prstGeom prst="rect">
-            <a:avLst/>
-          </a:prstGeom>
-          <a:noFill/>
-        </p:spPr>
-        <p:txBody>
-          <a:bodyPr wrap="square" lIns="0" rIns="0" tIns="0" bIns="0" anchor="t">
-            <a:spAutoFit/>
-          </a:bodyPr>
-          <a:lstStyle/>
-          <a:p>
-            <a:pPr algn="l">
-              <a:spcAft>
-                <a:spcPts val="800"/>
-              </a:spcAft>
-            </a:pPr>
-            <a:r>
-              <a:rPr sz="1500" b="0" i="0">
-                <a:solidFill>
-                  <a:srgbClr val="333A48"/>
-                </a:solidFill>
-                <a:latin typeface="IBM Plex Sans"/>
-                <a:ea typeface="IBM Plex Sans"/>
-                <a:cs typeface="IBM Plex Sans"/>
-              </a:rPr>
-              <a:t>final voltage at bus 6, the same as the paper</a:t>
-            </a:r>
-          </a:p>
-        </p:txBody>
-      </p:sp>
-    </p:spTree>
-  </p:cSld>
-  <p:clrMapOvr>
-    <a:masterClrMapping/>
-  </p:clrMapOvr>
-</p:sld>
-</file>
-
-<file path=ppt/slides/slide8.xml><?xml version="1.0" encoding="utf-8"?>
-<p:sld xmlns:a="http://schemas.openxmlformats.org/drawingml/2006/main" xmlns:p="http://schemas.openxmlformats.org/presentationml/2006/main" xmlns:r="http://schemas.openxmlformats.org/officeDocument/2006/relationships">
-  <p:cSld>
-    <p:bg>
-      <p:bgPr>
-        <a:solidFill>
-          <a:srgbClr val="FBFBF9"/>
-        </a:solidFill>
-        <a:effectLst/>
-      </p:bgPr>
-    </p:bg>
-    <p:spTree>
-      <p:nvGrpSpPr>
-        <p:cNvPr id="1" name=""/>
-        <p:cNvGrpSpPr/>
-        <p:nvPr/>
-      </p:nvGrpSpPr>
-      <p:grpSpPr/>
-      <p:sp>
-        <p:nvSpPr>
-          <p:cNvPr id="2" name="TextBox 1"/>
-          <p:cNvSpPr txBox="1"/>
-          <p:nvPr/>
-        </p:nvSpPr>
-        <p:spPr>
-          <a:xfrm>
-            <a:off x="813816" y="713232"/>
-            <a:ext cx="10881360" cy="429768"/>
-          </a:xfrm>
-          <a:prstGeom prst="rect">
-            <a:avLst/>
-          </a:prstGeom>
-          <a:noFill/>
-        </p:spPr>
-        <p:txBody>
-          <a:bodyPr wrap="square" lIns="0" rIns="0" tIns="0" bIns="0" anchor="t">
-            <a:spAutoFit/>
-          </a:bodyPr>
-          <a:lstStyle/>
-          <a:p>
-            <a:pPr algn="l">
-              <a:spcAft>
-                <a:spcPts val="800"/>
-              </a:spcAft>
-            </a:pPr>
-            <a:r>
-              <a:rPr sz="2800" b="1" i="0">
-                <a:solidFill>
-                  <a:srgbClr val="1F3A5F"/>
-                </a:solidFill>
-                <a:latin typeface="IBM Plex Sans"/>
-                <a:ea typeface="IBM Plex Sans"/>
-                <a:cs typeface="IBM Plex Sans"/>
-              </a:rPr>
-              <a:t>One solver with switches: solve()</a:t>
-            </a:r>
-          </a:p>
-        </p:txBody>
-      </p:sp>
-      <p:pic>
-        <p:nvPicPr>
-          <p:cNvPr id="3" name="Picture 2" descr="image.png"/>
-          <p:cNvPicPr>
-            <a:picLocks noChangeAspect="1"/>
-          </p:cNvPicPr>
-          <p:nvPr/>
-        </p:nvPicPr>
-        <p:blipFill>
-          <a:blip r:embed="rId2"/>
-          <a:stretch>
-            <a:fillRect/>
-          </a:stretch>
-        </p:blipFill>
-        <p:spPr>
-          <a:xfrm>
-            <a:off x="812800" y="1221741"/>
-            <a:ext cx="10566400" cy="20320"/>
-          </a:xfrm>
-          <a:prstGeom prst="rect">
-            <a:avLst/>
-          </a:prstGeom>
-        </p:spPr>
-      </p:pic>
-      <p:sp>
-        <p:nvSpPr>
-          <p:cNvPr id="4" name="TextBox 3"/>
-          <p:cNvSpPr txBox="1"/>
-          <p:nvPr/>
-        </p:nvSpPr>
-        <p:spPr>
-          <a:xfrm>
-            <a:off x="813816" y="6236208"/>
-            <a:ext cx="7845552" cy="237744"/>
-          </a:xfrm>
-          <a:prstGeom prst="rect">
-            <a:avLst/>
-          </a:prstGeom>
-          <a:noFill/>
-        </p:spPr>
-        <p:txBody>
-          <a:bodyPr wrap="square" lIns="0" rIns="0" tIns="0" bIns="0" anchor="t">
-            <a:spAutoFit/>
-          </a:bodyPr>
-          <a:lstStyle/>
-          <a:p>
-            <a:pPr algn="l">
-              <a:spcAft>
-                <a:spcPts val="800"/>
-              </a:spcAft>
-            </a:pPr>
-            <a:r>
-              <a:rPr sz="1200" b="0" i="0">
-                <a:solidFill>
-                  <a:srgbClr val="6B7280"/>
-                </a:solidFill>
-                <a:latin typeface="IBM Plex Sans"/>
-                <a:ea typeface="IBM Plex Sans"/>
-                <a:cs typeface="IBM Plex Sans"/>
-              </a:rPr>
-              <a:t>Apurbo's part · Lima-Silva &amp; Freitas (2024): reproduction and improvements</a:t>
-            </a:r>
-          </a:p>
-        </p:txBody>
-      </p:sp>
-      <p:sp>
-        <p:nvSpPr>
-          <p:cNvPr id="5" name="TextBox 4"/>
-          <p:cNvSpPr txBox="1"/>
-          <p:nvPr/>
-        </p:nvSpPr>
-        <p:spPr>
-          <a:xfrm>
-            <a:off x="10058400" y="6236208"/>
-            <a:ext cx="1316736" cy="237744"/>
-          </a:xfrm>
-          <a:prstGeom prst="rect">
-            <a:avLst/>
-          </a:prstGeom>
-          <a:noFill/>
-        </p:spPr>
-        <p:txBody>
-          <a:bodyPr wrap="square" lIns="0" rIns="0" tIns="0" bIns="0" anchor="t">
+          <a:bodyPr wrap="square" lIns="0" tIns="0" rIns="0" bIns="0" anchor="t">
             <a:spAutoFit/>
           </a:bodyPr>
           <a:lstStyle/>
@@ -5487,7 +4881,7 @@
           </a:fontRef>
         </p:style>
         <p:txBody>
-          <a:bodyPr rtlCol="0" anchor="ctr" wrap="square" lIns="54864" rIns="54864"/>
+          <a:bodyPr wrap="square" lIns="54864" rIns="54864" rtlCol="0" anchor="ctr"/>
           <a:lstStyle/>
           <a:p>
             <a:pPr algn="ctr"/>
@@ -5546,6 +4940,7 @@
           <a:lstStyle/>
           <a:p>
             <a:pPr algn="ctr"/>
+            <a:endParaRPr/>
           </a:p>
         </p:txBody>
       </p:sp>
@@ -5588,7 +4983,7 @@
           </a:fontRef>
         </p:style>
         <p:txBody>
-          <a:bodyPr rtlCol="0" anchor="ctr" wrap="square" lIns="54864" rIns="54864"/>
+          <a:bodyPr wrap="square" lIns="54864" rIns="54864" rtlCol="0" anchor="ctr"/>
           <a:lstStyle/>
           <a:p>
             <a:pPr algn="ctr"/>
@@ -5647,6 +5042,7 @@
           <a:lstStyle/>
           <a:p>
             <a:pPr algn="ctr"/>
+            <a:endParaRPr/>
           </a:p>
         </p:txBody>
       </p:sp>
@@ -5689,7 +5085,7 @@
           </a:fontRef>
         </p:style>
         <p:txBody>
-          <a:bodyPr rtlCol="0" anchor="ctr" wrap="square" lIns="54864" rIns="54864"/>
+          <a:bodyPr wrap="square" lIns="54864" rIns="54864" rtlCol="0" anchor="ctr"/>
           <a:lstStyle/>
           <a:p>
             <a:pPr algn="ctr"/>
@@ -5748,6 +5144,7 @@
           <a:lstStyle/>
           <a:p>
             <a:pPr algn="ctr"/>
+            <a:endParaRPr/>
           </a:p>
         </p:txBody>
       </p:sp>
@@ -5790,7 +5187,7 @@
           </a:fontRef>
         </p:style>
         <p:txBody>
-          <a:bodyPr rtlCol="0" anchor="ctr" wrap="square" lIns="54864" rIns="54864"/>
+          <a:bodyPr wrap="square" lIns="54864" rIns="54864" rtlCol="0" anchor="ctr"/>
           <a:lstStyle/>
           <a:p>
             <a:pPr algn="ctr"/>
@@ -5849,6 +5246,7 @@
           <a:lstStyle/>
           <a:p>
             <a:pPr algn="ctr"/>
+            <a:endParaRPr/>
           </a:p>
         </p:txBody>
       </p:sp>
@@ -5891,7 +5289,7 @@
           </a:fontRef>
         </p:style>
         <p:txBody>
-          <a:bodyPr rtlCol="0" anchor="ctr" wrap="square" lIns="54864" rIns="54864"/>
+          <a:bodyPr wrap="square" lIns="54864" rIns="54864" rtlCol="0" anchor="ctr"/>
           <a:lstStyle/>
           <a:p>
             <a:pPr algn="ctr"/>
@@ -5924,18 +5322,36 @@
         <a:graphic>
           <a:graphicData uri="http://schemas.openxmlformats.org/drawingml/2006/table">
             <a:tbl>
-              <a:tblPr firstRow="0" bandRow="0">
+              <a:tblPr>
                 <a:tableStyleId>{2D5ABB26-0587-4C30-8999-92F81FD0307C}</a:tableStyleId>
               </a:tblPr>
               <a:tblGrid>
-                <a:gridCol w="2377440"/>
-                <a:gridCol w="3108960"/>
-                <a:gridCol w="1828800"/>
+                <a:gridCol w="2377440">
+                  <a:extLst>
+                    <a:ext uri="{9D8B030D-6E8A-4147-A177-3AD203B41FA5}">
+                      <a16:colId xmlns:a16="http://schemas.microsoft.com/office/drawing/2014/main" val="20000"/>
+                    </a:ext>
+                  </a:extLst>
+                </a:gridCol>
+                <a:gridCol w="3108960">
+                  <a:extLst>
+                    <a:ext uri="{9D8B030D-6E8A-4147-A177-3AD203B41FA5}">
+                      <a16:colId xmlns:a16="http://schemas.microsoft.com/office/drawing/2014/main" val="20001"/>
+                    </a:ext>
+                  </a:extLst>
+                </a:gridCol>
+                <a:gridCol w="1828800">
+                  <a:extLst>
+                    <a:ext uri="{9D8B030D-6E8A-4147-A177-3AD203B41FA5}">
+                      <a16:colId xmlns:a16="http://schemas.microsoft.com/office/drawing/2014/main" val="20002"/>
+                    </a:ext>
+                  </a:extLst>
+                </a:gridCol>
               </a:tblGrid>
               <a:tr h="384048">
                 <a:tc>
                   <a:txBody>
-                    <a:bodyPr wrap="square"/>
+                    <a:bodyPr/>
                     <a:lstStyle/>
                     <a:p>
                       <a:pPr algn="l"/>
@@ -5974,7 +5390,7 @@
                 </a:tc>
                 <a:tc>
                   <a:txBody>
-                    <a:bodyPr wrap="square"/>
+                    <a:bodyPr/>
                     <a:lstStyle/>
                     <a:p>
                       <a:pPr algn="l"/>
@@ -6013,7 +5429,7 @@
                 </a:tc>
                 <a:tc>
                   <a:txBody>
-                    <a:bodyPr wrap="square"/>
+                    <a:bodyPr/>
                     <a:lstStyle/>
                     <a:p>
                       <a:pPr algn="l"/>
@@ -6050,11 +5466,16 @@
                     </a:solidFill>
                   </a:tcPr>
                 </a:tc>
+                <a:extLst>
+                  <a:ext uri="{0D108BD9-81ED-4DB2-BD59-A6C34878D82A}">
+                    <a16:rowId xmlns:a16="http://schemas.microsoft.com/office/drawing/2014/main" val="10000"/>
+                  </a:ext>
+                </a:extLst>
               </a:tr>
               <a:tr h="384048">
                 <a:tc>
                   <a:txBody>
-                    <a:bodyPr wrap="square"/>
+                    <a:bodyPr/>
                     <a:lstStyle/>
                     <a:p>
                       <a:pPr algn="l"/>
@@ -6078,8 +5499,14 @@
                     <a:lnR w="0">
                       <a:noFill/>
                     </a:lnR>
-                    <a:lnT w="0">
-                      <a:noFill/>
+                    <a:lnT w="12700" cap="flat" cmpd="sng" algn="ctr">
+                      <a:solidFill>
+                        <a:srgbClr val="C8C8C6"/>
+                      </a:solidFill>
+                      <a:prstDash val="solid"/>
+                      <a:round/>
+                      <a:headEnd type="none" w="med" len="med"/>
+                      <a:tailEnd type="none" w="med" len="med"/>
                     </a:lnT>
                     <a:lnB w="12700">
                       <a:solidFill>
@@ -6093,7 +5520,7 @@
                 </a:tc>
                 <a:tc>
                   <a:txBody>
-                    <a:bodyPr wrap="square"/>
+                    <a:bodyPr/>
                     <a:lstStyle/>
                     <a:p>
                       <a:pPr algn="l"/>
@@ -6117,8 +5544,14 @@
                     <a:lnR w="0">
                       <a:noFill/>
                     </a:lnR>
-                    <a:lnT w="0">
-                      <a:noFill/>
+                    <a:lnT w="12700" cap="flat" cmpd="sng" algn="ctr">
+                      <a:solidFill>
+                        <a:srgbClr val="C8C8C6"/>
+                      </a:solidFill>
+                      <a:prstDash val="solid"/>
+                      <a:round/>
+                      <a:headEnd type="none" w="med" len="med"/>
+                      <a:tailEnd type="none" w="med" len="med"/>
                     </a:lnT>
                     <a:lnB w="12700">
                       <a:solidFill>
@@ -6132,7 +5565,7 @@
                 </a:tc>
                 <a:tc>
                   <a:txBody>
-                    <a:bodyPr wrap="square"/>
+                    <a:bodyPr/>
                     <a:lstStyle/>
                     <a:p>
                       <a:pPr algn="l"/>
@@ -6156,8 +5589,14 @@
                     <a:lnR w="0">
                       <a:noFill/>
                     </a:lnR>
-                    <a:lnT w="0">
-                      <a:noFill/>
+                    <a:lnT w="12700" cap="flat" cmpd="sng" algn="ctr">
+                      <a:solidFill>
+                        <a:srgbClr val="C8C8C6"/>
+                      </a:solidFill>
+                      <a:prstDash val="solid"/>
+                      <a:round/>
+                      <a:headEnd type="none" w="med" len="med"/>
+                      <a:tailEnd type="none" w="med" len="med"/>
                     </a:lnT>
                     <a:lnB w="12700">
                       <a:solidFill>
@@ -6169,11 +5608,16 @@
                     </a:solidFill>
                   </a:tcPr>
                 </a:tc>
+                <a:extLst>
+                  <a:ext uri="{0D108BD9-81ED-4DB2-BD59-A6C34878D82A}">
+                    <a16:rowId xmlns:a16="http://schemas.microsoft.com/office/drawing/2014/main" val="10001"/>
+                  </a:ext>
+                </a:extLst>
               </a:tr>
               <a:tr h="384048">
                 <a:tc>
                   <a:txBody>
-                    <a:bodyPr wrap="square"/>
+                    <a:bodyPr/>
                     <a:lstStyle/>
                     <a:p>
                       <a:pPr algn="l"/>
@@ -6197,8 +5641,14 @@
                     <a:lnR w="0">
                       <a:noFill/>
                     </a:lnR>
-                    <a:lnT w="0">
-                      <a:noFill/>
+                    <a:lnT w="12700" cap="flat" cmpd="sng" algn="ctr">
+                      <a:solidFill>
+                        <a:srgbClr val="C8C8C6"/>
+                      </a:solidFill>
+                      <a:prstDash val="solid"/>
+                      <a:round/>
+                      <a:headEnd type="none" w="med" len="med"/>
+                      <a:tailEnd type="none" w="med" len="med"/>
                     </a:lnT>
                     <a:lnB w="12700">
                       <a:solidFill>
@@ -6212,7 +5662,7 @@
                 </a:tc>
                 <a:tc>
                   <a:txBody>
-                    <a:bodyPr wrap="square"/>
+                    <a:bodyPr/>
                     <a:lstStyle/>
                     <a:p>
                       <a:pPr algn="l"/>
@@ -6236,8 +5686,14 @@
                     <a:lnR w="0">
                       <a:noFill/>
                     </a:lnR>
-                    <a:lnT w="0">
-                      <a:noFill/>
+                    <a:lnT w="12700" cap="flat" cmpd="sng" algn="ctr">
+                      <a:solidFill>
+                        <a:srgbClr val="C8C8C6"/>
+                      </a:solidFill>
+                      <a:prstDash val="solid"/>
+                      <a:round/>
+                      <a:headEnd type="none" w="med" len="med"/>
+                      <a:tailEnd type="none" w="med" len="med"/>
                     </a:lnT>
                     <a:lnB w="12700">
                       <a:solidFill>
@@ -6251,7 +5707,7 @@
                 </a:tc>
                 <a:tc>
                   <a:txBody>
-                    <a:bodyPr wrap="square"/>
+                    <a:bodyPr/>
                     <a:lstStyle/>
                     <a:p>
                       <a:pPr algn="l"/>
@@ -6275,8 +5731,14 @@
                     <a:lnR w="0">
                       <a:noFill/>
                     </a:lnR>
-                    <a:lnT w="0">
-                      <a:noFill/>
+                    <a:lnT w="12700" cap="flat" cmpd="sng" algn="ctr">
+                      <a:solidFill>
+                        <a:srgbClr val="C8C8C6"/>
+                      </a:solidFill>
+                      <a:prstDash val="solid"/>
+                      <a:round/>
+                      <a:headEnd type="none" w="med" len="med"/>
+                      <a:tailEnd type="none" w="med" len="med"/>
                     </a:lnT>
                     <a:lnB w="12700">
                       <a:solidFill>
@@ -6288,11 +5750,16 @@
                     </a:solidFill>
                   </a:tcPr>
                 </a:tc>
+                <a:extLst>
+                  <a:ext uri="{0D108BD9-81ED-4DB2-BD59-A6C34878D82A}">
+                    <a16:rowId xmlns:a16="http://schemas.microsoft.com/office/drawing/2014/main" val="10002"/>
+                  </a:ext>
+                </a:extLst>
               </a:tr>
               <a:tr h="384048">
                 <a:tc>
                   <a:txBody>
-                    <a:bodyPr wrap="square"/>
+                    <a:bodyPr/>
                     <a:lstStyle/>
                     <a:p>
                       <a:pPr algn="l"/>
@@ -6316,8 +5783,14 @@
                     <a:lnR w="0">
                       <a:noFill/>
                     </a:lnR>
-                    <a:lnT w="0">
-                      <a:noFill/>
+                    <a:lnT w="12700" cap="flat" cmpd="sng" algn="ctr">
+                      <a:solidFill>
+                        <a:srgbClr val="C8C8C6"/>
+                      </a:solidFill>
+                      <a:prstDash val="solid"/>
+                      <a:round/>
+                      <a:headEnd type="none" w="med" len="med"/>
+                      <a:tailEnd type="none" w="med" len="med"/>
                     </a:lnT>
                     <a:lnB w="12700">
                       <a:solidFill>
@@ -6331,7 +5804,7 @@
                 </a:tc>
                 <a:tc>
                   <a:txBody>
-                    <a:bodyPr wrap="square"/>
+                    <a:bodyPr/>
                     <a:lstStyle/>
                     <a:p>
                       <a:pPr algn="l"/>
@@ -6355,8 +5828,14 @@
                     <a:lnR w="0">
                       <a:noFill/>
                     </a:lnR>
-                    <a:lnT w="0">
-                      <a:noFill/>
+                    <a:lnT w="12700" cap="flat" cmpd="sng" algn="ctr">
+                      <a:solidFill>
+                        <a:srgbClr val="C8C8C6"/>
+                      </a:solidFill>
+                      <a:prstDash val="solid"/>
+                      <a:round/>
+                      <a:headEnd type="none" w="med" len="med"/>
+                      <a:tailEnd type="none" w="med" len="med"/>
                     </a:lnT>
                     <a:lnB w="12700">
                       <a:solidFill>
@@ -6370,7 +5849,7 @@
                 </a:tc>
                 <a:tc>
                   <a:txBody>
-                    <a:bodyPr wrap="square"/>
+                    <a:bodyPr/>
                     <a:lstStyle/>
                     <a:p>
                       <a:pPr algn="l"/>
@@ -6394,8 +5873,14 @@
                     <a:lnR w="0">
                       <a:noFill/>
                     </a:lnR>
-                    <a:lnT w="0">
-                      <a:noFill/>
+                    <a:lnT w="12700" cap="flat" cmpd="sng" algn="ctr">
+                      <a:solidFill>
+                        <a:srgbClr val="C8C8C6"/>
+                      </a:solidFill>
+                      <a:prstDash val="solid"/>
+                      <a:round/>
+                      <a:headEnd type="none" w="med" len="med"/>
+                      <a:tailEnd type="none" w="med" len="med"/>
                     </a:lnT>
                     <a:lnB w="12700">
                       <a:solidFill>
@@ -6407,11 +5892,16 @@
                     </a:solidFill>
                   </a:tcPr>
                 </a:tc>
+                <a:extLst>
+                  <a:ext uri="{0D108BD9-81ED-4DB2-BD59-A6C34878D82A}">
+                    <a16:rowId xmlns:a16="http://schemas.microsoft.com/office/drawing/2014/main" val="10003"/>
+                  </a:ext>
+                </a:extLst>
               </a:tr>
               <a:tr h="384048">
                 <a:tc>
                   <a:txBody>
-                    <a:bodyPr wrap="square"/>
+                    <a:bodyPr/>
                     <a:lstStyle/>
                     <a:p>
                       <a:pPr algn="l"/>
@@ -6435,8 +5925,14 @@
                     <a:lnR w="0">
                       <a:noFill/>
                     </a:lnR>
-                    <a:lnT w="0">
-                      <a:noFill/>
+                    <a:lnT w="12700" cap="flat" cmpd="sng" algn="ctr">
+                      <a:solidFill>
+                        <a:srgbClr val="C8C8C6"/>
+                      </a:solidFill>
+                      <a:prstDash val="solid"/>
+                      <a:round/>
+                      <a:headEnd type="none" w="med" len="med"/>
+                      <a:tailEnd type="none" w="med" len="med"/>
                     </a:lnT>
                     <a:lnB w="12700">
                       <a:solidFill>
@@ -6450,7 +5946,7 @@
                 </a:tc>
                 <a:tc>
                   <a:txBody>
-                    <a:bodyPr wrap="square"/>
+                    <a:bodyPr/>
                     <a:lstStyle/>
                     <a:p>
                       <a:pPr algn="l"/>
@@ -6474,8 +5970,14 @@
                     <a:lnR w="0">
                       <a:noFill/>
                     </a:lnR>
-                    <a:lnT w="0">
-                      <a:noFill/>
+                    <a:lnT w="12700" cap="flat" cmpd="sng" algn="ctr">
+                      <a:solidFill>
+                        <a:srgbClr val="C8C8C6"/>
+                      </a:solidFill>
+                      <a:prstDash val="solid"/>
+                      <a:round/>
+                      <a:headEnd type="none" w="med" len="med"/>
+                      <a:tailEnd type="none" w="med" len="med"/>
                     </a:lnT>
                     <a:lnB w="12700">
                       <a:solidFill>
@@ -6489,7 +5991,7 @@
                 </a:tc>
                 <a:tc>
                   <a:txBody>
-                    <a:bodyPr wrap="square"/>
+                    <a:bodyPr/>
                     <a:lstStyle/>
                     <a:p>
                       <a:pPr algn="l"/>
@@ -6513,8 +6015,14 @@
                     <a:lnR w="0">
                       <a:noFill/>
                     </a:lnR>
-                    <a:lnT w="0">
-                      <a:noFill/>
+                    <a:lnT w="12700" cap="flat" cmpd="sng" algn="ctr">
+                      <a:solidFill>
+                        <a:srgbClr val="C8C8C6"/>
+                      </a:solidFill>
+                      <a:prstDash val="solid"/>
+                      <a:round/>
+                      <a:headEnd type="none" w="med" len="med"/>
+                      <a:tailEnd type="none" w="med" len="med"/>
                     </a:lnT>
                     <a:lnB w="12700">
                       <a:solidFill>
@@ -6526,6 +6034,11 @@
                     </a:solidFill>
                   </a:tcPr>
                 </a:tc>
+                <a:extLst>
+                  <a:ext uri="{0D108BD9-81ED-4DB2-BD59-A6C34878D82A}">
+                    <a16:rowId xmlns:a16="http://schemas.microsoft.com/office/drawing/2014/main" val="10004"/>
+                  </a:ext>
+                </a:extLst>
               </a:tr>
             </a:tbl>
           </a:graphicData>
@@ -6548,7 +6061,7 @@
           <a:noFill/>
         </p:spPr>
         <p:txBody>
-          <a:bodyPr wrap="square" lIns="0" rIns="0" tIns="0" bIns="0" anchor="t">
+          <a:bodyPr wrap="square" lIns="0" tIns="0" rIns="0" bIns="0" anchor="t">
             <a:spAutoFit/>
           </a:bodyPr>
           <a:lstStyle/>
@@ -6598,8 +6111,8 @@
 </p:sld>
 </file>
 
-<file path=ppt/slides/slide9.xml><?xml version="1.0" encoding="utf-8"?>
-<p:sld xmlns:a="http://schemas.openxmlformats.org/drawingml/2006/main" xmlns:p="http://schemas.openxmlformats.org/presentationml/2006/main" xmlns:r="http://schemas.openxmlformats.org/officeDocument/2006/relationships">
+<file path=ppt/slides/slide8.xml><?xml version="1.0" encoding="utf-8"?>
+<p:sld xmlns:a="http://schemas.openxmlformats.org/drawingml/2006/main" xmlns:r="http://schemas.openxmlformats.org/officeDocument/2006/relationships" xmlns:p="http://schemas.openxmlformats.org/presentationml/2006/main">
   <p:cSld>
     <p:bg>
       <p:bgPr>
@@ -6615,7 +6128,14 @@
         <p:cNvGrpSpPr/>
         <p:nvPr/>
       </p:nvGrpSpPr>
-      <p:grpSpPr/>
+      <p:grpSpPr>
+        <a:xfrm>
+          <a:off x="0" y="0"/>
+          <a:ext cx="0" cy="0"/>
+          <a:chOff x="0" y="0"/>
+          <a:chExt cx="0" cy="0"/>
+        </a:xfrm>
+      </p:grpSpPr>
       <p:sp>
         <p:nvSpPr>
           <p:cNvPr id="2" name="TextBox 1"/>
@@ -6633,7 +6153,7 @@
           <a:noFill/>
         </p:spPr>
         <p:txBody>
-          <a:bodyPr wrap="square" lIns="0" rIns="0" tIns="0" bIns="0" anchor="t">
+          <a:bodyPr wrap="square" lIns="0" tIns="0" rIns="0" bIns="0" anchor="t">
             <a:spAutoFit/>
           </a:bodyPr>
           <a:lstStyle/>
@@ -6660,112 +6180,6 @@
       <p:pic>
         <p:nvPicPr>
           <p:cNvPr id="3" name="Picture 2" descr="image.png"/>
-          <p:cNvPicPr>
-            <a:picLocks noChangeAspect="1"/>
-          </p:cNvPicPr>
-          <p:nvPr/>
-        </p:nvPicPr>
-        <p:blipFill>
-          <a:blip r:embed="rId2"/>
-          <a:stretch>
-            <a:fillRect/>
-          </a:stretch>
-        </p:blipFill>
-        <p:spPr>
-          <a:xfrm>
-            <a:off x="812800" y="1221741"/>
-            <a:ext cx="10566400" cy="20320"/>
-          </a:xfrm>
-          <a:prstGeom prst="rect">
-            <a:avLst/>
-          </a:prstGeom>
-        </p:spPr>
-      </p:pic>
-      <p:sp>
-        <p:nvSpPr>
-          <p:cNvPr id="4" name="TextBox 3"/>
-          <p:cNvSpPr txBox="1"/>
-          <p:nvPr/>
-        </p:nvSpPr>
-        <p:spPr>
-          <a:xfrm>
-            <a:off x="813816" y="6236208"/>
-            <a:ext cx="7845552" cy="237744"/>
-          </a:xfrm>
-          <a:prstGeom prst="rect">
-            <a:avLst/>
-          </a:prstGeom>
-          <a:noFill/>
-        </p:spPr>
-        <p:txBody>
-          <a:bodyPr wrap="square" lIns="0" rIns="0" tIns="0" bIns="0" anchor="t">
-            <a:spAutoFit/>
-          </a:bodyPr>
-          <a:lstStyle/>
-          <a:p>
-            <a:pPr algn="l">
-              <a:spcAft>
-                <a:spcPts val="800"/>
-              </a:spcAft>
-            </a:pPr>
-            <a:r>
-              <a:rPr sz="1200" b="0" i="0">
-                <a:solidFill>
-                  <a:srgbClr val="6B7280"/>
-                </a:solidFill>
-                <a:latin typeface="IBM Plex Sans"/>
-                <a:ea typeface="IBM Plex Sans"/>
-                <a:cs typeface="IBM Plex Sans"/>
-              </a:rPr>
-              <a:t>Apurbo's part · Lima-Silva &amp; Freitas (2024): reproduction and improvements</a:t>
-            </a:r>
-          </a:p>
-        </p:txBody>
-      </p:sp>
-      <p:sp>
-        <p:nvSpPr>
-          <p:cNvPr id="5" name="TextBox 4"/>
-          <p:cNvSpPr txBox="1"/>
-          <p:nvPr/>
-        </p:nvSpPr>
-        <p:spPr>
-          <a:xfrm>
-            <a:off x="10058400" y="6236208"/>
-            <a:ext cx="1316736" cy="237744"/>
-          </a:xfrm>
-          <a:prstGeom prst="rect">
-            <a:avLst/>
-          </a:prstGeom>
-          <a:noFill/>
-        </p:spPr>
-        <p:txBody>
-          <a:bodyPr wrap="square" lIns="0" rIns="0" tIns="0" bIns="0" anchor="t">
-            <a:spAutoFit/>
-          </a:bodyPr>
-          <a:lstStyle/>
-          <a:p>
-            <a:pPr algn="r">
-              <a:spcAft>
-                <a:spcPts val="800"/>
-              </a:spcAft>
-            </a:pPr>
-            <a:r>
-              <a:rPr sz="1200" b="0" i="0">
-                <a:solidFill>
-                  <a:srgbClr val="6B7280"/>
-                </a:solidFill>
-                <a:latin typeface="IBM Plex Sans"/>
-                <a:ea typeface="IBM Plex Sans"/>
-                <a:cs typeface="IBM Plex Sans"/>
-              </a:rPr>
-              <a:t>9</a:t>
-            </a:r>
-          </a:p>
-        </p:txBody>
-      </p:sp>
-      <p:pic>
-        <p:nvPicPr>
-          <p:cNvPr id="6" name="Picture 5" descr="a_pc.png"/>
           <p:cNvPicPr>
             <a:picLocks noChangeAspect="1"/>
           </p:cNvPicPr>
@@ -6779,8 +6193,8 @@
         </p:blipFill>
         <p:spPr>
           <a:xfrm>
-            <a:off x="813816" y="1554480"/>
-            <a:ext cx="5705856" cy="478536"/>
+            <a:off x="812800" y="1221741"/>
+            <a:ext cx="10566400" cy="20320"/>
           </a:xfrm>
           <a:prstGeom prst="rect">
             <a:avLst/>
@@ -6789,14 +6203,14 @@
       </p:pic>
       <p:sp>
         <p:nvSpPr>
-          <p:cNvPr id="7" name="TextBox 6"/>
+          <p:cNvPr id="4" name="TextBox 3"/>
           <p:cNvSpPr txBox="1"/>
           <p:nvPr/>
         </p:nvSpPr>
         <p:spPr>
           <a:xfrm>
-            <a:off x="813816" y="2377440"/>
-            <a:ext cx="10561320" cy="457200"/>
+            <a:off x="813816" y="6236208"/>
+            <a:ext cx="7845552" cy="237744"/>
           </a:xfrm>
           <a:prstGeom prst="rect">
             <a:avLst/>
@@ -6804,7 +6218,7 @@
           <a:noFill/>
         </p:spPr>
         <p:txBody>
-          <a:bodyPr wrap="square" lIns="0" rIns="0" tIns="0" bIns="0" anchor="t">
+          <a:bodyPr wrap="square" lIns="0" tIns="0" rIns="0" bIns="0" anchor="t">
             <a:spAutoFit/>
           </a:bodyPr>
           <a:lstStyle/>
@@ -6815,29 +6229,29 @@
               </a:spcAft>
             </a:pPr>
             <a:r>
-              <a:rPr sz="1700" b="0" i="0">
-                <a:solidFill>
-                  <a:srgbClr val="333A48"/>
-                </a:solidFill>
-                <a:latin typeface="IBM Plex Sans"/>
-                <a:ea typeface="IBM Plex Sans"/>
-                <a:cs typeface="IBM Plex Sans"/>
-              </a:rPr>
-              <a:t>predictor: the BE step gives x̃ near the path;  corrector: one Newton step back onto it</a:t>
-            </a:r>
-          </a:p>
-        </p:txBody>
-      </p:sp>
-      <p:sp>
-        <p:nvSpPr>
-          <p:cNvPr id="8" name="TextBox 7"/>
+              <a:rPr sz="1200" b="0" i="0">
+                <a:solidFill>
+                  <a:srgbClr val="6B7280"/>
+                </a:solidFill>
+                <a:latin typeface="IBM Plex Sans"/>
+                <a:ea typeface="IBM Plex Sans"/>
+                <a:cs typeface="IBM Plex Sans"/>
+              </a:rPr>
+              <a:t>Apurbo's part · Lima-Silva &amp; Freitas (2024): reproduction and improvements</a:t>
+            </a:r>
+          </a:p>
+        </p:txBody>
+      </p:sp>
+      <p:sp>
+        <p:nvSpPr>
+          <p:cNvPr id="5" name="TextBox 4"/>
           <p:cNvSpPr txBox="1"/>
           <p:nvPr/>
         </p:nvSpPr>
         <p:spPr>
           <a:xfrm>
-            <a:off x="813816" y="3200400"/>
-            <a:ext cx="3291840" cy="822960"/>
+            <a:off x="10058400" y="6236208"/>
+            <a:ext cx="1316736" cy="237744"/>
           </a:xfrm>
           <a:prstGeom prst="rect">
             <a:avLst/>
@@ -6845,7 +6259,72 @@
           <a:noFill/>
         </p:spPr>
         <p:txBody>
-          <a:bodyPr wrap="square" lIns="0" rIns="0" tIns="0" bIns="0" anchor="t">
+          <a:bodyPr wrap="square" lIns="0" tIns="0" rIns="0" bIns="0" anchor="t">
+            <a:spAutoFit/>
+          </a:bodyPr>
+          <a:lstStyle/>
+          <a:p>
+            <a:pPr algn="r">
+              <a:spcAft>
+                <a:spcPts val="800"/>
+              </a:spcAft>
+            </a:pPr>
+            <a:r>
+              <a:rPr sz="1200" b="0" i="0">
+                <a:solidFill>
+                  <a:srgbClr val="6B7280"/>
+                </a:solidFill>
+                <a:latin typeface="IBM Plex Sans"/>
+                <a:ea typeface="IBM Plex Sans"/>
+                <a:cs typeface="IBM Plex Sans"/>
+              </a:rPr>
+              <a:t>9</a:t>
+            </a:r>
+          </a:p>
+        </p:txBody>
+      </p:sp>
+      <p:pic>
+        <p:nvPicPr>
+          <p:cNvPr id="6" name="Picture 5" descr="a_pc.png"/>
+          <p:cNvPicPr>
+            <a:picLocks noChangeAspect="1"/>
+          </p:cNvPicPr>
+          <p:nvPr/>
+        </p:nvPicPr>
+        <p:blipFill>
+          <a:blip r:embed="rId4"/>
+          <a:stretch>
+            <a:fillRect/>
+          </a:stretch>
+        </p:blipFill>
+        <p:spPr>
+          <a:xfrm>
+            <a:off x="813816" y="1554480"/>
+            <a:ext cx="5705856" cy="478536"/>
+          </a:xfrm>
+          <a:prstGeom prst="rect">
+            <a:avLst/>
+          </a:prstGeom>
+        </p:spPr>
+      </p:pic>
+      <p:sp>
+        <p:nvSpPr>
+          <p:cNvPr id="7" name="TextBox 6"/>
+          <p:cNvSpPr txBox="1"/>
+          <p:nvPr/>
+        </p:nvSpPr>
+        <p:spPr>
+          <a:xfrm>
+            <a:off x="813816" y="2377440"/>
+            <a:ext cx="10561320" cy="457200"/>
+          </a:xfrm>
+          <a:prstGeom prst="rect">
+            <a:avLst/>
+          </a:prstGeom>
+          <a:noFill/>
+        </p:spPr>
+        <p:txBody>
+          <a:bodyPr wrap="square" lIns="0" tIns="0" rIns="0" bIns="0" anchor="t">
             <a:spAutoFit/>
           </a:bodyPr>
           <a:lstStyle/>
@@ -6856,29 +6335,29 @@
               </a:spcAft>
             </a:pPr>
             <a:r>
-              <a:rPr sz="4800" b="1" i="0">
-                <a:solidFill>
-                  <a:srgbClr val="2F8F5B"/>
-                </a:solidFill>
-                <a:latin typeface="IBM Plex Sans"/>
-                <a:ea typeface="IBM Plex Sans"/>
-                <a:cs typeface="IBM Plex Sans"/>
-              </a:rPr>
-              <a:t>152</a:t>
-            </a:r>
-          </a:p>
-        </p:txBody>
-      </p:sp>
-      <p:sp>
-        <p:nvSpPr>
-          <p:cNvPr id="9" name="TextBox 8"/>
+              <a:rPr sz="1700" b="0" i="0">
+                <a:solidFill>
+                  <a:srgbClr val="333A48"/>
+                </a:solidFill>
+                <a:latin typeface="IBM Plex Sans"/>
+                <a:ea typeface="IBM Plex Sans"/>
+                <a:cs typeface="IBM Plex Sans"/>
+              </a:rPr>
+              <a:t>predictor: the BE step gives x̃ near the path;  corrector: one Newton step back onto it</a:t>
+            </a:r>
+          </a:p>
+        </p:txBody>
+      </p:sp>
+      <p:sp>
+        <p:nvSpPr>
+          <p:cNvPr id="8" name="TextBox 7"/>
           <p:cNvSpPr txBox="1"/>
           <p:nvPr/>
         </p:nvSpPr>
         <p:spPr>
           <a:xfrm>
-            <a:off x="813816" y="4069080"/>
-            <a:ext cx="3291840" cy="731520"/>
+            <a:off x="813816" y="3200400"/>
+            <a:ext cx="3291840" cy="822960"/>
           </a:xfrm>
           <a:prstGeom prst="rect">
             <a:avLst/>
@@ -6886,7 +6365,7 @@
           <a:noFill/>
         </p:spPr>
         <p:txBody>
-          <a:bodyPr wrap="square" lIns="0" rIns="0" tIns="0" bIns="0" anchor="t">
+          <a:bodyPr wrap="square" lIns="0" tIns="0" rIns="0" bIns="0" anchor="t">
             <a:spAutoFit/>
           </a:bodyPr>
           <a:lstStyle/>
@@ -6897,29 +6376,29 @@
               </a:spcAft>
             </a:pPr>
             <a:r>
-              <a:rPr sz="1500" b="0" i="0">
-                <a:solidFill>
-                  <a:srgbClr val="333A48"/>
-                </a:solidFill>
-                <a:latin typeface="IBM Plex Sans"/>
-                <a:ea typeface="IBM Plex Sans"/>
-                <a:cs typeface="IBM Plex Sans"/>
-              </a:rPr>
-              <a:t>of 170 runs solved (paper 127), none lost</a:t>
-            </a:r>
-          </a:p>
-        </p:txBody>
-      </p:sp>
-      <p:sp>
-        <p:nvSpPr>
-          <p:cNvPr id="10" name="TextBox 9"/>
+              <a:rPr sz="4800" b="1" i="0">
+                <a:solidFill>
+                  <a:srgbClr val="2F8F5B"/>
+                </a:solidFill>
+                <a:latin typeface="IBM Plex Sans"/>
+                <a:ea typeface="IBM Plex Sans"/>
+                <a:cs typeface="IBM Plex Sans"/>
+              </a:rPr>
+              <a:t>152</a:t>
+            </a:r>
+          </a:p>
+        </p:txBody>
+      </p:sp>
+      <p:sp>
+        <p:nvSpPr>
+          <p:cNvPr id="9" name="TextBox 8"/>
           <p:cNvSpPr txBox="1"/>
           <p:nvPr/>
         </p:nvSpPr>
         <p:spPr>
           <a:xfrm>
-            <a:off x="4379976" y="3200400"/>
-            <a:ext cx="3291840" cy="822960"/>
+            <a:off x="813816" y="4069080"/>
+            <a:ext cx="3291840" cy="731520"/>
           </a:xfrm>
           <a:prstGeom prst="rect">
             <a:avLst/>
@@ -6927,7 +6406,7 @@
           <a:noFill/>
         </p:spPr>
         <p:txBody>
-          <a:bodyPr wrap="square" lIns="0" rIns="0" tIns="0" bIns="0" anchor="t">
+          <a:bodyPr wrap="square" lIns="0" tIns="0" rIns="0" bIns="0" anchor="t">
             <a:spAutoFit/>
           </a:bodyPr>
           <a:lstStyle/>
@@ -6938,29 +6417,29 @@
               </a:spcAft>
             </a:pPr>
             <a:r>
-              <a:rPr sz="4800" b="1" i="0">
-                <a:solidFill>
-                  <a:srgbClr val="1F3A5F"/>
-                </a:solidFill>
-                <a:latin typeface="IBM Plex Sans"/>
-                <a:ea typeface="IBM Plex Sans"/>
-                <a:cs typeface="IBM Plex Sans"/>
-              </a:rPr>
-              <a:t>14 → 2</a:t>
-            </a:r>
-          </a:p>
-        </p:txBody>
-      </p:sp>
-      <p:sp>
-        <p:nvSpPr>
-          <p:cNvPr id="11" name="TextBox 10"/>
+              <a:rPr sz="1500" b="0" i="0">
+                <a:solidFill>
+                  <a:srgbClr val="333A48"/>
+                </a:solidFill>
+                <a:latin typeface="IBM Plex Sans"/>
+                <a:ea typeface="IBM Plex Sans"/>
+                <a:cs typeface="IBM Plex Sans"/>
+              </a:rPr>
+              <a:t>of 170 runs solved (paper 127), none lost</a:t>
+            </a:r>
+          </a:p>
+        </p:txBody>
+      </p:sp>
+      <p:sp>
+        <p:nvSpPr>
+          <p:cNvPr id="10" name="TextBox 9"/>
           <p:cNvSpPr txBox="1"/>
           <p:nvPr/>
         </p:nvSpPr>
         <p:spPr>
           <a:xfrm>
-            <a:off x="4379976" y="4069080"/>
-            <a:ext cx="3291840" cy="731520"/>
+            <a:off x="4379976" y="3200400"/>
+            <a:ext cx="3291840" cy="822960"/>
           </a:xfrm>
           <a:prstGeom prst="rect">
             <a:avLst/>
@@ -6968,7 +6447,7 @@
           <a:noFill/>
         </p:spPr>
         <p:txBody>
-          <a:bodyPr wrap="square" lIns="0" rIns="0" tIns="0" bIns="0" anchor="t">
+          <a:bodyPr wrap="square" lIns="0" tIns="0" rIns="0" bIns="0" anchor="t">
             <a:spAutoFit/>
           </a:bodyPr>
           <a:lstStyle/>
@@ -6979,29 +6458,29 @@
               </a:spcAft>
             </a:pPr>
             <a:r>
-              <a:rPr sz="1500" b="0" i="0">
-                <a:solidFill>
-                  <a:srgbClr val="333A48"/>
-                </a:solidFill>
-                <a:latin typeface="IBM Plex Sans"/>
-                <a:ea typeface="IBM Plex Sans"/>
-                <a:cs typeface="IBM Plex Sans"/>
-              </a:rPr>
-              <a:t>wrong roots</a:t>
-            </a:r>
-          </a:p>
-        </p:txBody>
-      </p:sp>
-      <p:sp>
-        <p:nvSpPr>
-          <p:cNvPr id="12" name="TextBox 11"/>
+              <a:rPr sz="4800" b="1" i="0">
+                <a:solidFill>
+                  <a:srgbClr val="1F3A5F"/>
+                </a:solidFill>
+                <a:latin typeface="IBM Plex Sans"/>
+                <a:ea typeface="IBM Plex Sans"/>
+                <a:cs typeface="IBM Plex Sans"/>
+              </a:rPr>
+              <a:t>14 → 2</a:t>
+            </a:r>
+          </a:p>
+        </p:txBody>
+      </p:sp>
+      <p:sp>
+        <p:nvSpPr>
+          <p:cNvPr id="11" name="TextBox 10"/>
           <p:cNvSpPr txBox="1"/>
           <p:nvPr/>
         </p:nvSpPr>
         <p:spPr>
           <a:xfrm>
-            <a:off x="7946136" y="3200400"/>
-            <a:ext cx="3291840" cy="822960"/>
+            <a:off x="4379976" y="4069080"/>
+            <a:ext cx="3291840" cy="731520"/>
           </a:xfrm>
           <a:prstGeom prst="rect">
             <a:avLst/>
@@ -7009,7 +6488,7 @@
           <a:noFill/>
         </p:spPr>
         <p:txBody>
-          <a:bodyPr wrap="square" lIns="0" rIns="0" tIns="0" bIns="0" anchor="t">
+          <a:bodyPr wrap="square" lIns="0" tIns="0" rIns="0" bIns="0" anchor="t">
             <a:spAutoFit/>
           </a:bodyPr>
           <a:lstStyle/>
@@ -7020,29 +6499,29 @@
               </a:spcAft>
             </a:pPr>
             <a:r>
-              <a:rPr sz="4800" b="1" i="0">
-                <a:solidFill>
-                  <a:srgbClr val="1F3A5F"/>
-                </a:solidFill>
-                <a:latin typeface="IBM Plex Sans"/>
-                <a:ea typeface="IBM Plex Sans"/>
-                <a:cs typeface="IBM Plex Sans"/>
-              </a:rPr>
-              <a:t>+0.4 LU</a:t>
-            </a:r>
-          </a:p>
-        </p:txBody>
-      </p:sp>
-      <p:sp>
-        <p:nvSpPr>
-          <p:cNvPr id="13" name="TextBox 12"/>
+              <a:rPr sz="1500" b="0" i="0">
+                <a:solidFill>
+                  <a:srgbClr val="333A48"/>
+                </a:solidFill>
+                <a:latin typeface="IBM Plex Sans"/>
+                <a:ea typeface="IBM Plex Sans"/>
+                <a:cs typeface="IBM Plex Sans"/>
+              </a:rPr>
+              <a:t>wrong roots</a:t>
+            </a:r>
+          </a:p>
+        </p:txBody>
+      </p:sp>
+      <p:sp>
+        <p:nvSpPr>
+          <p:cNvPr id="12" name="TextBox 11"/>
           <p:cNvSpPr txBox="1"/>
           <p:nvPr/>
         </p:nvSpPr>
         <p:spPr>
           <a:xfrm>
-            <a:off x="7946136" y="4069080"/>
-            <a:ext cx="3291840" cy="731520"/>
+            <a:off x="7946136" y="3200400"/>
+            <a:ext cx="3291840" cy="822960"/>
           </a:xfrm>
           <a:prstGeom prst="rect">
             <a:avLst/>
@@ -7050,7 +6529,7 @@
           <a:noFill/>
         </p:spPr>
         <p:txBody>
-          <a:bodyPr wrap="square" lIns="0" rIns="0" tIns="0" bIns="0" anchor="t">
+          <a:bodyPr wrap="square" lIns="0" tIns="0" rIns="0" bIns="0" anchor="t">
             <a:spAutoFit/>
           </a:bodyPr>
           <a:lstStyle/>
@@ -7061,6 +6540,47 @@
               </a:spcAft>
             </a:pPr>
             <a:r>
+              <a:rPr sz="4800" b="1" i="0">
+                <a:solidFill>
+                  <a:srgbClr val="1F3A5F"/>
+                </a:solidFill>
+                <a:latin typeface="IBM Plex Sans"/>
+                <a:ea typeface="IBM Plex Sans"/>
+                <a:cs typeface="IBM Plex Sans"/>
+              </a:rPr>
+              <a:t>+0.4 LU</a:t>
+            </a:r>
+          </a:p>
+        </p:txBody>
+      </p:sp>
+      <p:sp>
+        <p:nvSpPr>
+          <p:cNvPr id="13" name="TextBox 12"/>
+          <p:cNvSpPr txBox="1"/>
+          <p:nvPr/>
+        </p:nvSpPr>
+        <p:spPr>
+          <a:xfrm>
+            <a:off x="7946136" y="4069080"/>
+            <a:ext cx="3291840" cy="731520"/>
+          </a:xfrm>
+          <a:prstGeom prst="rect">
+            <a:avLst/>
+          </a:prstGeom>
+          <a:noFill/>
+        </p:spPr>
+        <p:txBody>
+          <a:bodyPr wrap="square" lIns="0" tIns="0" rIns="0" bIns="0" anchor="t">
+            <a:spAutoFit/>
+          </a:bodyPr>
+          <a:lstStyle/>
+          <a:p>
+            <a:pPr algn="l">
+              <a:spcAft>
+                <a:spcPts val="800"/>
+              </a:spcAft>
+            </a:pPr>
+            <a:r>
               <a:rPr sz="1500" b="0" i="0">
                 <a:solidFill>
                   <a:srgbClr val="333A48"/>
@@ -7070,6 +6590,355 @@
                 <a:cs typeface="IBM Plex Sans"/>
               </a:rPr>
               <a:t>per run (8.43 vs 8.04)</a:t>
+            </a:r>
+          </a:p>
+        </p:txBody>
+      </p:sp>
+    </p:spTree>
+  </p:cSld>
+  <p:clrMapOvr>
+    <a:masterClrMapping/>
+  </p:clrMapOvr>
+</p:sld>
+</file>
+
+<file path=ppt/slides/slide9.xml><?xml version="1.0" encoding="utf-8"?>
+<p:sld xmlns:a="http://schemas.openxmlformats.org/drawingml/2006/main" xmlns:r="http://schemas.openxmlformats.org/officeDocument/2006/relationships" xmlns:p="http://schemas.openxmlformats.org/presentationml/2006/main">
+  <p:cSld>
+    <p:bg>
+      <p:bgPr>
+        <a:solidFill>
+          <a:srgbClr val="FBFBF9"/>
+        </a:solidFill>
+        <a:effectLst/>
+      </p:bgPr>
+    </p:bg>
+    <p:spTree>
+      <p:nvGrpSpPr>
+        <p:cNvPr id="1" name=""/>
+        <p:cNvGrpSpPr/>
+        <p:nvPr/>
+      </p:nvGrpSpPr>
+      <p:grpSpPr>
+        <a:xfrm>
+          <a:off x="0" y="0"/>
+          <a:ext cx="0" cy="0"/>
+          <a:chOff x="0" y="0"/>
+          <a:chExt cx="0" cy="0"/>
+        </a:xfrm>
+      </p:grpSpPr>
+      <p:sp>
+        <p:nvSpPr>
+          <p:cNvPr id="2" name="TextBox 1"/>
+          <p:cNvSpPr txBox="1"/>
+          <p:nvPr/>
+        </p:nvSpPr>
+        <p:spPr>
+          <a:xfrm>
+            <a:off x="813816" y="713232"/>
+            <a:ext cx="10881360" cy="429768"/>
+          </a:xfrm>
+          <a:prstGeom prst="rect">
+            <a:avLst/>
+          </a:prstGeom>
+          <a:noFill/>
+        </p:spPr>
+        <p:txBody>
+          <a:bodyPr wrap="square" lIns="0" tIns="0" rIns="0" bIns="0" anchor="t">
+            <a:spAutoFit/>
+          </a:bodyPr>
+          <a:lstStyle/>
+          <a:p>
+            <a:pPr algn="l">
+              <a:spcAft>
+                <a:spcPts val="800"/>
+              </a:spcAft>
+            </a:pPr>
+            <a:r>
+              <a:rPr sz="2800" b="1" i="0">
+                <a:solidFill>
+                  <a:srgbClr val="1F3A5F"/>
+                </a:solidFill>
+                <a:latin typeface="IBM Plex Sans"/>
+                <a:ea typeface="IBM Plex Sans"/>
+                <a:cs typeface="IBM Plex Sans"/>
+              </a:rPr>
+              <a:t>Adaptive steps: a smaller gain</a:t>
+            </a:r>
+          </a:p>
+        </p:txBody>
+      </p:sp>
+      <p:pic>
+        <p:nvPicPr>
+          <p:cNvPr id="3" name="Picture 2" descr="image.png"/>
+          <p:cNvPicPr>
+            <a:picLocks noChangeAspect="1"/>
+          </p:cNvPicPr>
+          <p:nvPr/>
+        </p:nvPicPr>
+        <p:blipFill>
+          <a:blip r:embed="rId3"/>
+          <a:stretch>
+            <a:fillRect/>
+          </a:stretch>
+        </p:blipFill>
+        <p:spPr>
+          <a:xfrm>
+            <a:off x="812800" y="1221741"/>
+            <a:ext cx="10566400" cy="20320"/>
+          </a:xfrm>
+          <a:prstGeom prst="rect">
+            <a:avLst/>
+          </a:prstGeom>
+        </p:spPr>
+      </p:pic>
+      <p:sp>
+        <p:nvSpPr>
+          <p:cNvPr id="4" name="TextBox 3"/>
+          <p:cNvSpPr txBox="1"/>
+          <p:nvPr/>
+        </p:nvSpPr>
+        <p:spPr>
+          <a:xfrm>
+            <a:off x="813816" y="6236208"/>
+            <a:ext cx="7845552" cy="237744"/>
+          </a:xfrm>
+          <a:prstGeom prst="rect">
+            <a:avLst/>
+          </a:prstGeom>
+          <a:noFill/>
+        </p:spPr>
+        <p:txBody>
+          <a:bodyPr wrap="square" lIns="0" tIns="0" rIns="0" bIns="0" anchor="t">
+            <a:spAutoFit/>
+          </a:bodyPr>
+          <a:lstStyle/>
+          <a:p>
+            <a:pPr algn="l">
+              <a:spcAft>
+                <a:spcPts val="800"/>
+              </a:spcAft>
+            </a:pPr>
+            <a:r>
+              <a:rPr sz="1200" b="0" i="0">
+                <a:solidFill>
+                  <a:srgbClr val="6B7280"/>
+                </a:solidFill>
+                <a:latin typeface="IBM Plex Sans"/>
+                <a:ea typeface="IBM Plex Sans"/>
+                <a:cs typeface="IBM Plex Sans"/>
+              </a:rPr>
+              <a:t>Apurbo's part · Lima-Silva &amp; Freitas (2024): reproduction and improvements</a:t>
+            </a:r>
+          </a:p>
+        </p:txBody>
+      </p:sp>
+      <p:sp>
+        <p:nvSpPr>
+          <p:cNvPr id="5" name="TextBox 4"/>
+          <p:cNvSpPr txBox="1"/>
+          <p:nvPr/>
+        </p:nvSpPr>
+        <p:spPr>
+          <a:xfrm>
+            <a:off x="10058400" y="6236208"/>
+            <a:ext cx="1316736" cy="237744"/>
+          </a:xfrm>
+          <a:prstGeom prst="rect">
+            <a:avLst/>
+          </a:prstGeom>
+          <a:noFill/>
+        </p:spPr>
+        <p:txBody>
+          <a:bodyPr wrap="square" lIns="0" tIns="0" rIns="0" bIns="0" anchor="t">
+            <a:spAutoFit/>
+          </a:bodyPr>
+          <a:lstStyle/>
+          <a:p>
+            <a:pPr algn="r">
+              <a:spcAft>
+                <a:spcPts val="800"/>
+              </a:spcAft>
+            </a:pPr>
+            <a:r>
+              <a:rPr sz="1200" b="0" i="0">
+                <a:solidFill>
+                  <a:srgbClr val="6B7280"/>
+                </a:solidFill>
+                <a:latin typeface="IBM Plex Sans"/>
+                <a:ea typeface="IBM Plex Sans"/>
+                <a:cs typeface="IBM Plex Sans"/>
+              </a:rPr>
+              <a:t>10</a:t>
+            </a:r>
+          </a:p>
+        </p:txBody>
+      </p:sp>
+      <p:pic>
+        <p:nvPicPr>
+          <p:cNvPr id="6" name="Picture 5" descr="adaptive_path.png"/>
+          <p:cNvPicPr>
+            <a:picLocks noChangeAspect="1"/>
+          </p:cNvPicPr>
+          <p:nvPr/>
+        </p:nvPicPr>
+        <p:blipFill>
+          <a:blip r:embed="rId4"/>
+          <a:stretch>
+            <a:fillRect/>
+          </a:stretch>
+        </p:blipFill>
+        <p:spPr>
+          <a:xfrm>
+            <a:off x="722376" y="1406613"/>
+            <a:ext cx="6309360" cy="3953333"/>
+          </a:xfrm>
+          <a:prstGeom prst="rect">
+            <a:avLst/>
+          </a:prstGeom>
+        </p:spPr>
+      </p:pic>
+      <p:sp>
+        <p:nvSpPr>
+          <p:cNvPr id="7" name="TextBox 6"/>
+          <p:cNvSpPr txBox="1"/>
+          <p:nvPr/>
+        </p:nvSpPr>
+        <p:spPr>
+          <a:xfrm>
+            <a:off x="7498079" y="1737360"/>
+            <a:ext cx="3840480" cy="1463040"/>
+          </a:xfrm>
+          <a:prstGeom prst="rect">
+            <a:avLst/>
+          </a:prstGeom>
+          <a:noFill/>
+        </p:spPr>
+        <p:txBody>
+          <a:bodyPr wrap="square" lIns="0" tIns="0" rIns="0" bIns="0" anchor="t">
+            <a:spAutoFit/>
+          </a:bodyPr>
+          <a:lstStyle/>
+          <a:p>
+            <a:pPr marL="228600" indent="-228600" algn="l">
+              <a:spcAft>
+                <a:spcPts val="800"/>
+              </a:spcAft>
+              <a:buFont typeface="Arial"/>
+              <a:buChar char="•"/>
+            </a:pPr>
+            <a:r>
+              <a:rPr sz="1700" b="0" i="0">
+                <a:solidFill>
+                  <a:srgbClr val="1B1F2A"/>
+                </a:solidFill>
+                <a:latin typeface="IBM Plex Sans"/>
+                <a:ea typeface="IBM Plex Sans"/>
+                <a:cs typeface="IBM Plex Sans"/>
+              </a:rPr>
+              <a:t>try to jump straight to t = 1</a:t>
+            </a:r>
+          </a:p>
+          <a:p>
+            <a:pPr marL="228600" indent="-228600" algn="l">
+              <a:spcAft>
+                <a:spcPts val="800"/>
+              </a:spcAft>
+              <a:buFont typeface="Arial"/>
+              <a:buChar char="•"/>
+            </a:pPr>
+            <a:r>
+              <a:rPr sz="1700" b="0" i="0">
+                <a:solidFill>
+                  <a:srgbClr val="1B1F2A"/>
+                </a:solidFill>
+                <a:latin typeface="IBM Plex Sans"/>
+                <a:ea typeface="IBM Plex Sans"/>
+                <a:cs typeface="IBM Plex Sans"/>
+              </a:rPr>
+              <a:t>halve the step while ‖g‖ grows</a:t>
+            </a:r>
+          </a:p>
+        </p:txBody>
+      </p:sp>
+      <p:sp>
+        <p:nvSpPr>
+          <p:cNvPr id="8" name="TextBox 7"/>
+          <p:cNvSpPr txBox="1"/>
+          <p:nvPr/>
+        </p:nvSpPr>
+        <p:spPr>
+          <a:xfrm>
+            <a:off x="7498079" y="3108960"/>
+            <a:ext cx="3840480" cy="822960"/>
+          </a:xfrm>
+          <a:prstGeom prst="rect">
+            <a:avLst/>
+          </a:prstGeom>
+          <a:noFill/>
+        </p:spPr>
+        <p:txBody>
+          <a:bodyPr wrap="square" lIns="0" tIns="0" rIns="0" bIns="0" anchor="t">
+            <a:spAutoFit/>
+          </a:bodyPr>
+          <a:lstStyle/>
+          <a:p>
+            <a:pPr algn="l">
+              <a:spcAft>
+                <a:spcPts val="800"/>
+              </a:spcAft>
+            </a:pPr>
+            <a:r>
+              <a:rPr sz="4800" b="1" i="0">
+                <a:solidFill>
+                  <a:srgbClr val="1F3A5F"/>
+                </a:solidFill>
+                <a:latin typeface="IBM Plex Sans"/>
+                <a:ea typeface="IBM Plex Sans"/>
+                <a:cs typeface="IBM Plex Sans"/>
+              </a:rPr>
+              <a:t>132</a:t>
+            </a:r>
+          </a:p>
+        </p:txBody>
+      </p:sp>
+      <p:sp>
+        <p:nvSpPr>
+          <p:cNvPr id="9" name="TextBox 8"/>
+          <p:cNvSpPr txBox="1"/>
+          <p:nvPr/>
+        </p:nvSpPr>
+        <p:spPr>
+          <a:xfrm>
+            <a:off x="7498079" y="3977640"/>
+            <a:ext cx="3840480" cy="731520"/>
+          </a:xfrm>
+          <a:prstGeom prst="rect">
+            <a:avLst/>
+          </a:prstGeom>
+          <a:noFill/>
+        </p:spPr>
+        <p:txBody>
+          <a:bodyPr wrap="square" lIns="0" tIns="0" rIns="0" bIns="0" anchor="t">
+            <a:spAutoFit/>
+          </a:bodyPr>
+          <a:lstStyle/>
+          <a:p>
+            <a:pPr algn="l">
+              <a:spcAft>
+                <a:spcPts val="800"/>
+              </a:spcAft>
+            </a:pPr>
+            <a:r>
+              <a:rPr sz="1500" b="0" i="0">
+                <a:solidFill>
+                  <a:srgbClr val="333A48"/>
+                </a:solidFill>
+                <a:latin typeface="IBM Plex Sans"/>
+                <a:ea typeface="IBM Plex Sans"/>
+                <a:cs typeface="IBM Plex Sans"/>
+              </a:rPr>
+              <a:t>of 170 solved (paper 127)</a:t>
             </a:r>
           </a:p>
         </p:txBody>
